--- a/A-D2.pptx
+++ b/A-D2.pptx
@@ -6,12 +6,16 @@
     <p:sldMasterId id="2147483660" r:id="rId2"/>
   </p:sldMasterIdLst>
   <p:notesMasterIdLst>
-    <p:notesMasterId r:id="rId6"/>
+    <p:notesMasterId r:id="rId10"/>
   </p:notesMasterIdLst>
   <p:sldIdLst>
     <p:sldId id="273" r:id="rId3"/>
     <p:sldId id="285" r:id="rId4"/>
-    <p:sldId id="286" r:id="rId5"/>
+    <p:sldId id="288" r:id="rId5"/>
+    <p:sldId id="290" r:id="rId6"/>
+    <p:sldId id="289" r:id="rId7"/>
+    <p:sldId id="291" r:id="rId8"/>
+    <p:sldId id="286" r:id="rId9"/>
   </p:sldIdLst>
   <p:sldSz cx="9144000" cy="6858000" type="screen4x3"/>
   <p:notesSz cx="7772400" cy="10058400"/>
@@ -148,7 +152,7 @@
   <p:extLst>
     <p:ext uri="{EFAFB233-063F-42B5-8137-9DF3F51BA10A}">
       <p15:sldGuideLst xmlns:p15="http://schemas.microsoft.com/office/powerpoint/2012/main">
-        <p15:guide id="1" orient="horz" pos="2160">
+        <p15:guide id="1" orient="horz" pos="2137" userDrawn="1">
           <p15:clr>
             <a:srgbClr val="A4A3A4"/>
           </p15:clr>
@@ -8301,16 +8305,13 @@
               <a:buNone/>
             </a:pPr>
             <a:r>
-              <a:rPr lang="en-US" altLang="en-US" sz="2000">
+              <a:rPr lang="en-US" altLang="en-US" sz="2000" dirty="0">
                 <a:latin typeface="Tahoma" pitchFamily="34" charset="0"/>
                 <a:cs typeface="Tahoma" pitchFamily="34" charset="0"/>
               </a:rPr>
-              <a:t>Names of Individuals, Group Members, Team Members, Unit Members (As Applicable)</a:t>
-            </a:r>
-          </a:p>
-          <a:p>
-            <a:pPr marL="0" indent="0" algn="ctr"/>
-            <a:endParaRPr lang="en-US" altLang="en-US" sz="2400">
+              <a:t>Michael Pouget (40246798)</a:t>
+            </a:r>
+            <a:endParaRPr lang="en-US" altLang="en-US" sz="2400" dirty="0">
               <a:latin typeface="Tahoma" pitchFamily="34" charset="0"/>
               <a:cs typeface="Tahoma" pitchFamily="34" charset="0"/>
             </a:endParaRPr>
@@ -8587,13 +8588,13 @@
               <a:buNone/>
             </a:pPr>
             <a:r>
-              <a:rPr lang="en-US" altLang="en-US" sz="2000">
+              <a:rPr lang="en-US" altLang="en-US" sz="2000" dirty="0">
                 <a:solidFill>
                   <a:schemeClr val="tx1"/>
                 </a:solidFill>
                 <a:latin typeface="Tahoma" pitchFamily="34" charset="0"/>
               </a:rPr>
-              <a:t>Day and Date</a:t>
+              <a:t>April 10, 2026</a:t>
             </a:r>
           </a:p>
         </p:txBody>
@@ -9600,6 +9601,1830 @@
 </file>
 
 <file path=ppt/slides/slide3.xml><?xml version="1.0" encoding="utf-8"?>
+<p:sld xmlns:a="http://schemas.openxmlformats.org/drawingml/2006/main" xmlns:r="http://schemas.openxmlformats.org/officeDocument/2006/relationships" xmlns:p="http://schemas.openxmlformats.org/presentationml/2006/main">
+  <p:cSld>
+    <p:spTree>
+      <p:nvGrpSpPr>
+        <p:cNvPr id="1" name="">
+          <a:extLst>
+            <a:ext uri="{FF2B5EF4-FFF2-40B4-BE49-F238E27FC236}">
+              <a16:creationId xmlns:a16="http://schemas.microsoft.com/office/drawing/2014/main" id="{F1F666D1-A3EA-52BE-5952-8341FD3EA4A8}"/>
+            </a:ext>
+          </a:extLst>
+        </p:cNvPr>
+        <p:cNvGrpSpPr/>
+        <p:nvPr/>
+      </p:nvGrpSpPr>
+      <p:grpSpPr>
+        <a:xfrm>
+          <a:off x="0" y="0"/>
+          <a:ext cx="0" cy="0"/>
+          <a:chOff x="0" y="0"/>
+          <a:chExt cx="0" cy="0"/>
+        </a:xfrm>
+      </p:grpSpPr>
+      <p:sp>
+        <p:nvSpPr>
+          <p:cNvPr id="4098" name="object 5">
+            <a:extLst>
+              <a:ext uri="{FF2B5EF4-FFF2-40B4-BE49-F238E27FC236}">
+                <a16:creationId xmlns:a16="http://schemas.microsoft.com/office/drawing/2014/main" id="{9520983B-091F-2636-8871-DA683FB60D06}"/>
+              </a:ext>
+            </a:extLst>
+          </p:cNvPr>
+          <p:cNvSpPr>
+            <a:spLocks/>
+          </p:cNvSpPr>
+          <p:nvPr/>
+        </p:nvSpPr>
+        <p:spPr bwMode="auto">
+          <a:xfrm>
+            <a:off x="303213" y="104775"/>
+            <a:ext cx="8662987" cy="812800"/>
+          </a:xfrm>
+          <a:custGeom>
+            <a:avLst/>
+            <a:gdLst>
+              <a:gd name="T0" fmla="*/ 0 w 21600"/>
+              <a:gd name="T1" fmla="*/ 0 h 21600"/>
+              <a:gd name="T2" fmla="*/ 2147483647 w 21600"/>
+              <a:gd name="T3" fmla="*/ 0 h 21600"/>
+              <a:gd name="T4" fmla="*/ 2147483647 w 21600"/>
+              <a:gd name="T5" fmla="*/ 2147483647 h 21600"/>
+              <a:gd name="T6" fmla="*/ 0 w 21600"/>
+              <a:gd name="T7" fmla="*/ 2147483647 h 21600"/>
+              <a:gd name="T8" fmla="*/ 0 w 21600"/>
+              <a:gd name="T9" fmla="*/ 0 h 21600"/>
+              <a:gd name="T10" fmla="*/ 0 60000 65536"/>
+              <a:gd name="T11" fmla="*/ 0 60000 65536"/>
+              <a:gd name="T12" fmla="*/ 0 60000 65536"/>
+              <a:gd name="T13" fmla="*/ 0 60000 65536"/>
+              <a:gd name="T14" fmla="*/ 0 60000 65536"/>
+              <a:gd name="T15" fmla="*/ 0 w 21600"/>
+              <a:gd name="T16" fmla="*/ 0 h 21600"/>
+              <a:gd name="T17" fmla="*/ 21600 w 21600"/>
+              <a:gd name="T18" fmla="*/ 21600 h 21600"/>
+            </a:gdLst>
+            <a:ahLst/>
+            <a:cxnLst>
+              <a:cxn ang="T10">
+                <a:pos x="T0" y="T1"/>
+              </a:cxn>
+              <a:cxn ang="T11">
+                <a:pos x="T2" y="T3"/>
+              </a:cxn>
+              <a:cxn ang="T12">
+                <a:pos x="T4" y="T5"/>
+              </a:cxn>
+              <a:cxn ang="T13">
+                <a:pos x="T6" y="T7"/>
+              </a:cxn>
+              <a:cxn ang="T14">
+                <a:pos x="T8" y="T9"/>
+              </a:cxn>
+            </a:cxnLst>
+            <a:rect l="T15" t="T16" r="T17" b="T18"/>
+            <a:pathLst>
+              <a:path w="21600" h="21600">
+                <a:moveTo>
+                  <a:pt x="0" y="0"/>
+                </a:moveTo>
+                <a:lnTo>
+                  <a:pt x="21600" y="0"/>
+                </a:lnTo>
+                <a:lnTo>
+                  <a:pt x="21600" y="21600"/>
+                </a:lnTo>
+                <a:lnTo>
+                  <a:pt x="0" y="21600"/>
+                </a:lnTo>
+                <a:lnTo>
+                  <a:pt x="0" y="0"/>
+                </a:lnTo>
+                <a:close/>
+              </a:path>
+            </a:pathLst>
+          </a:custGeom>
+          <a:blipFill dpi="0" rotWithShape="1">
+            <a:blip r:embed="rId2"/>
+            <a:srcRect/>
+            <a:stretch>
+              <a:fillRect/>
+            </a:stretch>
+          </a:blipFill>
+          <a:ln>
+            <a:noFill/>
+          </a:ln>
+          <a:extLst>
+            <a:ext uri="{91240B29-F687-4F45-9708-019B960494DF}">
+              <a14:hiddenLine xmlns:a14="http://schemas.microsoft.com/office/drawing/2010/main" w="9525">
+                <a:solidFill>
+                  <a:srgbClr val="000000"/>
+                </a:solidFill>
+                <a:round/>
+                <a:headEnd/>
+                <a:tailEnd/>
+              </a14:hiddenLine>
+            </a:ext>
+          </a:extLst>
+        </p:spPr>
+        <p:txBody>
+          <a:bodyPr lIns="0" tIns="0" rIns="0" bIns="0"/>
+          <a:lstStyle/>
+          <a:p>
+            <a:endParaRPr lang="en-US"/>
+          </a:p>
+        </p:txBody>
+      </p:sp>
+      <p:sp>
+        <p:nvSpPr>
+          <p:cNvPr id="5" name="TextBox 6">
+            <a:extLst>
+              <a:ext uri="{FF2B5EF4-FFF2-40B4-BE49-F238E27FC236}">
+                <a16:creationId xmlns:a16="http://schemas.microsoft.com/office/drawing/2014/main" id="{420EE01B-748B-E5A4-B97B-75CB81A57012}"/>
+              </a:ext>
+            </a:extLst>
+          </p:cNvPr>
+          <p:cNvSpPr txBox="1">
+            <a:spLocks noChangeArrowheads="1"/>
+          </p:cNvSpPr>
+          <p:nvPr/>
+        </p:nvSpPr>
+        <p:spPr bwMode="auto">
+          <a:xfrm>
+            <a:off x="303213" y="1336675"/>
+            <a:ext cx="8662987" cy="3476415"/>
+          </a:xfrm>
+          <a:prstGeom prst="rect">
+            <a:avLst/>
+          </a:prstGeom>
+          <a:noFill/>
+          <a:ln>
+            <a:noFill/>
+          </a:ln>
+          <a:extLst>
+            <a:ext uri="{909E8E84-426E-40DD-AFC4-6F175D3DCCD1}">
+              <a14:hiddenFill xmlns:a14="http://schemas.microsoft.com/office/drawing/2010/main">
+                <a:solidFill>
+                  <a:srgbClr val="FFFFFF"/>
+                </a:solidFill>
+              </a14:hiddenFill>
+            </a:ext>
+            <a:ext uri="{91240B29-F687-4F45-9708-019B960494DF}">
+              <a14:hiddenLine xmlns:a14="http://schemas.microsoft.com/office/drawing/2010/main" w="9525">
+                <a:solidFill>
+                  <a:srgbClr val="000000"/>
+                </a:solidFill>
+                <a:miter lim="800000"/>
+                <a:headEnd/>
+                <a:tailEnd/>
+              </a14:hiddenLine>
+            </a:ext>
+          </a:extLst>
+        </p:spPr>
+        <p:txBody>
+          <a:bodyPr lIns="90004" tIns="44997" rIns="90004" bIns="44997">
+            <a:spAutoFit/>
+          </a:bodyPr>
+          <a:lstStyle>
+            <a:lvl1pPr>
+              <a:spcAft>
+                <a:spcPts val="1413"/>
+              </a:spcAft>
+              <a:buChar char="•"/>
+              <a:defRPr sz="2400">
+                <a:solidFill>
+                  <a:srgbClr val="000000"/>
+                </a:solidFill>
+                <a:latin typeface="Times New Roman" pitchFamily="18" charset="0"/>
+                <a:ea typeface="Microsoft YaHei" pitchFamily="34" charset="-122"/>
+              </a:defRPr>
+            </a:lvl1pPr>
+            <a:lvl2pPr marL="742950" indent="-285750">
+              <a:spcAft>
+                <a:spcPts val="1413"/>
+              </a:spcAft>
+              <a:buSzPct val="75000"/>
+              <a:buFont typeface="StarSymbol"/>
+              <a:buChar char="–"/>
+              <a:defRPr sz="2400">
+                <a:solidFill>
+                  <a:srgbClr val="000000"/>
+                </a:solidFill>
+                <a:latin typeface="Times New Roman" pitchFamily="18" charset="0"/>
+                <a:ea typeface="Microsoft YaHei" pitchFamily="34" charset="-122"/>
+              </a:defRPr>
+            </a:lvl2pPr>
+            <a:lvl3pPr marL="1143000" indent="-228600">
+              <a:spcAft>
+                <a:spcPts val="1413"/>
+              </a:spcAft>
+              <a:buSzPct val="75000"/>
+              <a:buFont typeface="StarSymbol"/>
+              <a:buChar char="●"/>
+              <a:defRPr sz="2400">
+                <a:solidFill>
+                  <a:srgbClr val="000000"/>
+                </a:solidFill>
+                <a:latin typeface="Times New Roman" pitchFamily="18" charset="0"/>
+                <a:ea typeface="Microsoft YaHei" pitchFamily="34" charset="-122"/>
+              </a:defRPr>
+            </a:lvl3pPr>
+            <a:lvl4pPr marL="1600200" indent="-228600">
+              <a:spcAft>
+                <a:spcPts val="1413"/>
+              </a:spcAft>
+              <a:buSzPct val="75000"/>
+              <a:buFont typeface="StarSymbol"/>
+              <a:buChar char="–"/>
+              <a:defRPr sz="2400">
+                <a:solidFill>
+                  <a:srgbClr val="000000"/>
+                </a:solidFill>
+                <a:latin typeface="Times New Roman" pitchFamily="18" charset="0"/>
+                <a:ea typeface="Microsoft YaHei" pitchFamily="34" charset="-122"/>
+              </a:defRPr>
+            </a:lvl4pPr>
+            <a:lvl5pPr marL="2057400" indent="-228600">
+              <a:spcAft>
+                <a:spcPts val="1413"/>
+              </a:spcAft>
+              <a:buSzPct val="75000"/>
+              <a:buFont typeface="StarSymbol"/>
+              <a:buChar char="●"/>
+              <a:defRPr sz="2400">
+                <a:solidFill>
+                  <a:srgbClr val="000000"/>
+                </a:solidFill>
+                <a:latin typeface="Times New Roman" pitchFamily="18" charset="0"/>
+                <a:ea typeface="Microsoft YaHei" pitchFamily="34" charset="-122"/>
+              </a:defRPr>
+            </a:lvl5pPr>
+            <a:lvl6pPr marL="2514600" indent="-228600" eaLnBrk="0" fontAlgn="base" hangingPunct="0">
+              <a:spcBef>
+                <a:spcPct val="0"/>
+              </a:spcBef>
+              <a:spcAft>
+                <a:spcPts val="1413"/>
+              </a:spcAft>
+              <a:buSzPct val="75000"/>
+              <a:buFont typeface="StarSymbol"/>
+              <a:buChar char="●"/>
+              <a:defRPr sz="2400">
+                <a:solidFill>
+                  <a:srgbClr val="000000"/>
+                </a:solidFill>
+                <a:latin typeface="Times New Roman" pitchFamily="18" charset="0"/>
+                <a:ea typeface="Microsoft YaHei" pitchFamily="34" charset="-122"/>
+              </a:defRPr>
+            </a:lvl6pPr>
+            <a:lvl7pPr marL="2971800" indent="-228600" eaLnBrk="0" fontAlgn="base" hangingPunct="0">
+              <a:spcBef>
+                <a:spcPct val="0"/>
+              </a:spcBef>
+              <a:spcAft>
+                <a:spcPts val="1413"/>
+              </a:spcAft>
+              <a:buSzPct val="75000"/>
+              <a:buFont typeface="StarSymbol"/>
+              <a:buChar char="●"/>
+              <a:defRPr sz="2400">
+                <a:solidFill>
+                  <a:srgbClr val="000000"/>
+                </a:solidFill>
+                <a:latin typeface="Times New Roman" pitchFamily="18" charset="0"/>
+                <a:ea typeface="Microsoft YaHei" pitchFamily="34" charset="-122"/>
+              </a:defRPr>
+            </a:lvl7pPr>
+            <a:lvl8pPr marL="3429000" indent="-228600" eaLnBrk="0" fontAlgn="base" hangingPunct="0">
+              <a:spcBef>
+                <a:spcPct val="0"/>
+              </a:spcBef>
+              <a:spcAft>
+                <a:spcPts val="1413"/>
+              </a:spcAft>
+              <a:buSzPct val="75000"/>
+              <a:buFont typeface="StarSymbol"/>
+              <a:buChar char="●"/>
+              <a:defRPr sz="2400">
+                <a:solidFill>
+                  <a:srgbClr val="000000"/>
+                </a:solidFill>
+                <a:latin typeface="Times New Roman" pitchFamily="18" charset="0"/>
+                <a:ea typeface="Microsoft YaHei" pitchFamily="34" charset="-122"/>
+              </a:defRPr>
+            </a:lvl8pPr>
+            <a:lvl9pPr marL="3886200" indent="-228600" eaLnBrk="0" fontAlgn="base" hangingPunct="0">
+              <a:spcBef>
+                <a:spcPct val="0"/>
+              </a:spcBef>
+              <a:spcAft>
+                <a:spcPts val="1413"/>
+              </a:spcAft>
+              <a:buSzPct val="75000"/>
+              <a:buFont typeface="StarSymbol"/>
+              <a:buChar char="●"/>
+              <a:defRPr sz="2400">
+                <a:solidFill>
+                  <a:srgbClr val="000000"/>
+                </a:solidFill>
+                <a:latin typeface="Times New Roman" pitchFamily="18" charset="0"/>
+                <a:ea typeface="Microsoft YaHei" pitchFamily="34" charset="-122"/>
+              </a:defRPr>
+            </a:lvl9pPr>
+          </a:lstStyle>
+          <a:p>
+            <a:pPr algn="just" eaLnBrk="1">
+              <a:spcAft>
+                <a:spcPct val="0"/>
+              </a:spcAft>
+              <a:buFontTx/>
+              <a:buNone/>
+            </a:pPr>
+            <a:r>
+              <a:rPr lang="en-US" altLang="en-US" sz="2000" dirty="0">
+                <a:solidFill>
+                  <a:srgbClr val="1C1C1C"/>
+                </a:solidFill>
+                <a:latin typeface="Tahoma" pitchFamily="34" charset="0"/>
+                <a:cs typeface="Tahoma" pitchFamily="34" charset="0"/>
+              </a:rPr>
+              <a:t>Most of the marks I lost were related to a lack of documentation in the PowerPoint. My work was instead documented as code comments. Professor </a:t>
+            </a:r>
+            <a:r>
+              <a:rPr lang="en-US" altLang="en-US" sz="2000" dirty="0" err="1">
+                <a:solidFill>
+                  <a:srgbClr val="1C1C1C"/>
+                </a:solidFill>
+                <a:latin typeface="Tahoma" pitchFamily="34" charset="0"/>
+                <a:cs typeface="Tahoma" pitchFamily="34" charset="0"/>
+              </a:rPr>
+              <a:t>Kamthan</a:t>
+            </a:r>
+            <a:r>
+              <a:rPr lang="en-US" altLang="en-US" sz="2000" dirty="0">
+                <a:solidFill>
+                  <a:srgbClr val="1C1C1C"/>
+                </a:solidFill>
+                <a:latin typeface="Tahoma" pitchFamily="34" charset="0"/>
+                <a:cs typeface="Tahoma" pitchFamily="34" charset="0"/>
+              </a:rPr>
+              <a:t> has agreed to accept in-code documentation and grant those marks, but not all of them were given back as of yet (I will talk with my TA or the professor about that soon). Other marks were lost for a lack of modularity, but I recently pointed out to my TA that modularity had not been taught before the D1 submission date. That leaves the code testing, where I performed very poorly due to not having documented my testing sessions. Any testing I perform will be thoroughly documented in some way (e.g. test cases). Besides that, I successfully completed the assignment and do not have any parts of my expert system to modify.</a:t>
+            </a:r>
+          </a:p>
+        </p:txBody>
+      </p:sp>
+      <p:sp>
+        <p:nvSpPr>
+          <p:cNvPr id="4100" name="object 7">
+            <a:extLst>
+              <a:ext uri="{FF2B5EF4-FFF2-40B4-BE49-F238E27FC236}">
+                <a16:creationId xmlns:a16="http://schemas.microsoft.com/office/drawing/2014/main" id="{B35E79B3-76E9-14F2-9984-03B56C085D46}"/>
+              </a:ext>
+            </a:extLst>
+          </p:cNvPr>
+          <p:cNvSpPr txBox="1">
+            <a:spLocks noChangeArrowheads="1"/>
+          </p:cNvSpPr>
+          <p:nvPr/>
+        </p:nvSpPr>
+        <p:spPr bwMode="auto">
+          <a:xfrm>
+            <a:off x="588963" y="238125"/>
+            <a:ext cx="8091487" cy="553998"/>
+          </a:xfrm>
+          <a:prstGeom prst="rect">
+            <a:avLst/>
+          </a:prstGeom>
+          <a:noFill/>
+          <a:ln>
+            <a:noFill/>
+          </a:ln>
+          <a:extLst>
+            <a:ext uri="{909E8E84-426E-40DD-AFC4-6F175D3DCCD1}">
+              <a14:hiddenFill xmlns:a14="http://schemas.microsoft.com/office/drawing/2010/main">
+                <a:solidFill>
+                  <a:srgbClr val="FFFFFF"/>
+                </a:solidFill>
+              </a14:hiddenFill>
+            </a:ext>
+            <a:ext uri="{91240B29-F687-4F45-9708-019B960494DF}">
+              <a14:hiddenLine xmlns:a14="http://schemas.microsoft.com/office/drawing/2010/main" w="9525">
+                <a:solidFill>
+                  <a:srgbClr val="000000"/>
+                </a:solidFill>
+                <a:miter lim="800000"/>
+                <a:headEnd/>
+                <a:tailEnd/>
+              </a14:hiddenLine>
+            </a:ext>
+          </a:extLst>
+        </p:spPr>
+        <p:txBody>
+          <a:bodyPr lIns="0" tIns="0" rIns="0" bIns="0" anchorCtr="1">
+            <a:spAutoFit/>
+          </a:bodyPr>
+          <a:lstStyle>
+            <a:lvl1pPr marL="11113">
+              <a:spcAft>
+                <a:spcPts val="1413"/>
+              </a:spcAft>
+              <a:buChar char="•"/>
+              <a:defRPr sz="2400">
+                <a:solidFill>
+                  <a:srgbClr val="000000"/>
+                </a:solidFill>
+                <a:latin typeface="Times New Roman" pitchFamily="18" charset="0"/>
+                <a:ea typeface="Microsoft YaHei" pitchFamily="34" charset="-122"/>
+              </a:defRPr>
+            </a:lvl1pPr>
+            <a:lvl2pPr marL="685800" indent="-228600">
+              <a:spcAft>
+                <a:spcPts val="1413"/>
+              </a:spcAft>
+              <a:buSzPct val="75000"/>
+              <a:buFont typeface="StarSymbol"/>
+              <a:buChar char="–"/>
+              <a:defRPr sz="2400">
+                <a:solidFill>
+                  <a:srgbClr val="000000"/>
+                </a:solidFill>
+                <a:latin typeface="Times New Roman" pitchFamily="18" charset="0"/>
+                <a:ea typeface="Microsoft YaHei" pitchFamily="34" charset="-122"/>
+              </a:defRPr>
+            </a:lvl2pPr>
+            <a:lvl3pPr marL="1143000" indent="-228600">
+              <a:spcAft>
+                <a:spcPts val="1413"/>
+              </a:spcAft>
+              <a:buSzPct val="75000"/>
+              <a:buFont typeface="StarSymbol"/>
+              <a:buChar char="●"/>
+              <a:defRPr sz="2400">
+                <a:solidFill>
+                  <a:srgbClr val="000000"/>
+                </a:solidFill>
+                <a:latin typeface="Times New Roman" pitchFamily="18" charset="0"/>
+                <a:ea typeface="Microsoft YaHei" pitchFamily="34" charset="-122"/>
+              </a:defRPr>
+            </a:lvl3pPr>
+            <a:lvl4pPr marL="1600200" indent="-228600">
+              <a:spcAft>
+                <a:spcPts val="1413"/>
+              </a:spcAft>
+              <a:buSzPct val="75000"/>
+              <a:buFont typeface="StarSymbol"/>
+              <a:buChar char="–"/>
+              <a:defRPr sz="2400">
+                <a:solidFill>
+                  <a:srgbClr val="000000"/>
+                </a:solidFill>
+                <a:latin typeface="Times New Roman" pitchFamily="18" charset="0"/>
+                <a:ea typeface="Microsoft YaHei" pitchFamily="34" charset="-122"/>
+              </a:defRPr>
+            </a:lvl4pPr>
+            <a:lvl5pPr marL="2057400" indent="-228600">
+              <a:spcAft>
+                <a:spcPts val="1413"/>
+              </a:spcAft>
+              <a:buSzPct val="75000"/>
+              <a:buFont typeface="StarSymbol"/>
+              <a:buChar char="●"/>
+              <a:defRPr sz="2400">
+                <a:solidFill>
+                  <a:srgbClr val="000000"/>
+                </a:solidFill>
+                <a:latin typeface="Times New Roman" pitchFamily="18" charset="0"/>
+                <a:ea typeface="Microsoft YaHei" pitchFamily="34" charset="-122"/>
+              </a:defRPr>
+            </a:lvl5pPr>
+            <a:lvl6pPr marL="2514600" indent="-228600" eaLnBrk="0" fontAlgn="base" hangingPunct="0">
+              <a:spcBef>
+                <a:spcPct val="0"/>
+              </a:spcBef>
+              <a:spcAft>
+                <a:spcPts val="1413"/>
+              </a:spcAft>
+              <a:buSzPct val="75000"/>
+              <a:buFont typeface="StarSymbol"/>
+              <a:buChar char="●"/>
+              <a:defRPr sz="2400">
+                <a:solidFill>
+                  <a:srgbClr val="000000"/>
+                </a:solidFill>
+                <a:latin typeface="Times New Roman" pitchFamily="18" charset="0"/>
+                <a:ea typeface="Microsoft YaHei" pitchFamily="34" charset="-122"/>
+              </a:defRPr>
+            </a:lvl6pPr>
+            <a:lvl7pPr marL="2971800" indent="-228600" eaLnBrk="0" fontAlgn="base" hangingPunct="0">
+              <a:spcBef>
+                <a:spcPct val="0"/>
+              </a:spcBef>
+              <a:spcAft>
+                <a:spcPts val="1413"/>
+              </a:spcAft>
+              <a:buSzPct val="75000"/>
+              <a:buFont typeface="StarSymbol"/>
+              <a:buChar char="●"/>
+              <a:defRPr sz="2400">
+                <a:solidFill>
+                  <a:srgbClr val="000000"/>
+                </a:solidFill>
+                <a:latin typeface="Times New Roman" pitchFamily="18" charset="0"/>
+                <a:ea typeface="Microsoft YaHei" pitchFamily="34" charset="-122"/>
+              </a:defRPr>
+            </a:lvl7pPr>
+            <a:lvl8pPr marL="3429000" indent="-228600" eaLnBrk="0" fontAlgn="base" hangingPunct="0">
+              <a:spcBef>
+                <a:spcPct val="0"/>
+              </a:spcBef>
+              <a:spcAft>
+                <a:spcPts val="1413"/>
+              </a:spcAft>
+              <a:buSzPct val="75000"/>
+              <a:buFont typeface="StarSymbol"/>
+              <a:buChar char="●"/>
+              <a:defRPr sz="2400">
+                <a:solidFill>
+                  <a:srgbClr val="000000"/>
+                </a:solidFill>
+                <a:latin typeface="Times New Roman" pitchFamily="18" charset="0"/>
+                <a:ea typeface="Microsoft YaHei" pitchFamily="34" charset="-122"/>
+              </a:defRPr>
+            </a:lvl8pPr>
+            <a:lvl9pPr marL="3886200" indent="-228600" eaLnBrk="0" fontAlgn="base" hangingPunct="0">
+              <a:spcBef>
+                <a:spcPct val="0"/>
+              </a:spcBef>
+              <a:spcAft>
+                <a:spcPts val="1413"/>
+              </a:spcAft>
+              <a:buSzPct val="75000"/>
+              <a:buFont typeface="StarSymbol"/>
+              <a:buChar char="●"/>
+              <a:defRPr sz="2400">
+                <a:solidFill>
+                  <a:srgbClr val="000000"/>
+                </a:solidFill>
+                <a:latin typeface="Times New Roman" pitchFamily="18" charset="0"/>
+                <a:ea typeface="Microsoft YaHei" pitchFamily="34" charset="-122"/>
+              </a:defRPr>
+            </a:lvl9pPr>
+          </a:lstStyle>
+          <a:p>
+            <a:pPr algn="ctr" eaLnBrk="1">
+              <a:spcAft>
+                <a:spcPct val="0"/>
+              </a:spcAft>
+              <a:buFontTx/>
+              <a:buNone/>
+            </a:pPr>
+            <a:r>
+              <a:rPr lang="en-US" altLang="en-US" sz="3600" dirty="0">
+                <a:solidFill>
+                  <a:srgbClr val="FFFFFF"/>
+                </a:solidFill>
+                <a:latin typeface="Tahoma" pitchFamily="34" charset="0"/>
+                <a:cs typeface="Tahoma" pitchFamily="34" charset="0"/>
+              </a:rPr>
+              <a:t>Lessons Learned from D1 (TODO 1)</a:t>
+            </a:r>
+            <a:endParaRPr lang="en-US" altLang="en-US" sz="2800" dirty="0">
+              <a:solidFill>
+                <a:srgbClr val="FFFFFF"/>
+              </a:solidFill>
+              <a:latin typeface="Tahoma" pitchFamily="34" charset="0"/>
+              <a:cs typeface="Tahoma" pitchFamily="34" charset="0"/>
+            </a:endParaRPr>
+          </a:p>
+        </p:txBody>
+      </p:sp>
+    </p:spTree>
+    <p:extLst>
+      <p:ext uri="{BB962C8B-B14F-4D97-AF65-F5344CB8AC3E}">
+        <p14:creationId xmlns:p14="http://schemas.microsoft.com/office/powerpoint/2010/main" val="1254155971"/>
+      </p:ext>
+    </p:extLst>
+  </p:cSld>
+  <p:clrMapOvr>
+    <a:masterClrMapping/>
+  </p:clrMapOvr>
+  <p:transition spd="slow"/>
+  <p:timing>
+    <p:tnLst>
+      <p:par>
+        <p:cTn id="1" dur="indefinite" restart="never" nodeType="tmRoot">
+          <p:childTnLst>
+            <p:seq concurrent="1" nextAc="seek">
+              <p:cTn id="2" dur="indefinite" nodeType="mainSeq">
+                <p:childTnLst>
+                  <p:par>
+                    <p:cTn id="3" fill="hold" nodeType="clickPar">
+                      <p:stCondLst>
+                        <p:cond delay="indefinite"/>
+                      </p:stCondLst>
+                      <p:childTnLst>
+                        <p:par>
+                          <p:cTn id="4" fill="hold" nodeType="withGroup">
+                            <p:stCondLst>
+                              <p:cond delay="0"/>
+                            </p:stCondLst>
+                            <p:childTnLst>
+                              <p:par>
+                                <p:cTn id="5" presetID="4" presetClass="entr" presetSubtype="16" fill="hold" grpId="0" nodeType="clickEffect">
+                                  <p:stCondLst>
+                                    <p:cond delay="0"/>
+                                  </p:stCondLst>
+                                  <p:childTnLst>
+                                    <p:set>
+                                      <p:cBhvr>
+                                        <p:cTn id="6" dur="1" fill="hold">
+                                          <p:stCondLst>
+                                            <p:cond delay="0"/>
+                                          </p:stCondLst>
+                                        </p:cTn>
+                                        <p:tgtEl>
+                                          <p:spTgt spid="5"/>
+                                        </p:tgtEl>
+                                        <p:attrNameLst>
+                                          <p:attrName>style.visibility</p:attrName>
+                                        </p:attrNameLst>
+                                      </p:cBhvr>
+                                      <p:to>
+                                        <p:strVal val="visible"/>
+                                      </p:to>
+                                    </p:set>
+                                    <p:animEffect transition="in" filter="box(in)">
+                                      <p:cBhvr>
+                                        <p:cTn id="7" dur="500"/>
+                                        <p:tgtEl>
+                                          <p:spTgt spid="5"/>
+                                        </p:tgtEl>
+                                      </p:cBhvr>
+                                    </p:animEffect>
+                                  </p:childTnLst>
+                                </p:cTn>
+                              </p:par>
+                            </p:childTnLst>
+                          </p:cTn>
+                        </p:par>
+                      </p:childTnLst>
+                    </p:cTn>
+                  </p:par>
+                </p:childTnLst>
+              </p:cTn>
+              <p:prevCondLst>
+                <p:cond evt="onPrev" delay="0">
+                  <p:tgtEl>
+                    <p:sldTgt/>
+                  </p:tgtEl>
+                </p:cond>
+              </p:prevCondLst>
+              <p:nextCondLst>
+                <p:cond evt="onNext" delay="0">
+                  <p:tgtEl>
+                    <p:sldTgt/>
+                  </p:tgtEl>
+                </p:cond>
+              </p:nextCondLst>
+            </p:seq>
+          </p:childTnLst>
+        </p:cTn>
+      </p:par>
+    </p:tnLst>
+    <p:bldLst>
+      <p:bldP spid="5" grpId="0" autoUpdateAnimBg="0"/>
+    </p:bldLst>
+  </p:timing>
+</p:sld>
+</file>
+
+<file path=ppt/slides/slide4.xml><?xml version="1.0" encoding="utf-8"?>
+<p:sld xmlns:a="http://schemas.openxmlformats.org/drawingml/2006/main" xmlns:r="http://schemas.openxmlformats.org/officeDocument/2006/relationships" xmlns:p="http://schemas.openxmlformats.org/presentationml/2006/main">
+  <p:cSld>
+    <p:spTree>
+      <p:nvGrpSpPr>
+        <p:cNvPr id="1" name="">
+          <a:extLst>
+            <a:ext uri="{FF2B5EF4-FFF2-40B4-BE49-F238E27FC236}">
+              <a16:creationId xmlns:a16="http://schemas.microsoft.com/office/drawing/2014/main" id="{C32A255E-37B3-D943-7D65-879D1A07F3F3}"/>
+            </a:ext>
+          </a:extLst>
+        </p:cNvPr>
+        <p:cNvGrpSpPr/>
+        <p:nvPr/>
+      </p:nvGrpSpPr>
+      <p:grpSpPr>
+        <a:xfrm>
+          <a:off x="0" y="0"/>
+          <a:ext cx="0" cy="0"/>
+          <a:chOff x="0" y="0"/>
+          <a:chExt cx="0" cy="0"/>
+        </a:xfrm>
+      </p:grpSpPr>
+      <p:sp>
+        <p:nvSpPr>
+          <p:cNvPr id="4098" name="object 5">
+            <a:extLst>
+              <a:ext uri="{FF2B5EF4-FFF2-40B4-BE49-F238E27FC236}">
+                <a16:creationId xmlns:a16="http://schemas.microsoft.com/office/drawing/2014/main" id="{07BD5FCC-FD5B-5F5E-F81B-D9080148C490}"/>
+              </a:ext>
+            </a:extLst>
+          </p:cNvPr>
+          <p:cNvSpPr>
+            <a:spLocks/>
+          </p:cNvSpPr>
+          <p:nvPr/>
+        </p:nvSpPr>
+        <p:spPr bwMode="auto">
+          <a:xfrm>
+            <a:off x="303213" y="104775"/>
+            <a:ext cx="8662987" cy="812800"/>
+          </a:xfrm>
+          <a:custGeom>
+            <a:avLst/>
+            <a:gdLst>
+              <a:gd name="T0" fmla="*/ 0 w 21600"/>
+              <a:gd name="T1" fmla="*/ 0 h 21600"/>
+              <a:gd name="T2" fmla="*/ 2147483647 w 21600"/>
+              <a:gd name="T3" fmla="*/ 0 h 21600"/>
+              <a:gd name="T4" fmla="*/ 2147483647 w 21600"/>
+              <a:gd name="T5" fmla="*/ 2147483647 h 21600"/>
+              <a:gd name="T6" fmla="*/ 0 w 21600"/>
+              <a:gd name="T7" fmla="*/ 2147483647 h 21600"/>
+              <a:gd name="T8" fmla="*/ 0 w 21600"/>
+              <a:gd name="T9" fmla="*/ 0 h 21600"/>
+              <a:gd name="T10" fmla="*/ 0 60000 65536"/>
+              <a:gd name="T11" fmla="*/ 0 60000 65536"/>
+              <a:gd name="T12" fmla="*/ 0 60000 65536"/>
+              <a:gd name="T13" fmla="*/ 0 60000 65536"/>
+              <a:gd name="T14" fmla="*/ 0 60000 65536"/>
+              <a:gd name="T15" fmla="*/ 0 w 21600"/>
+              <a:gd name="T16" fmla="*/ 0 h 21600"/>
+              <a:gd name="T17" fmla="*/ 21600 w 21600"/>
+              <a:gd name="T18" fmla="*/ 21600 h 21600"/>
+            </a:gdLst>
+            <a:ahLst/>
+            <a:cxnLst>
+              <a:cxn ang="T10">
+                <a:pos x="T0" y="T1"/>
+              </a:cxn>
+              <a:cxn ang="T11">
+                <a:pos x="T2" y="T3"/>
+              </a:cxn>
+              <a:cxn ang="T12">
+                <a:pos x="T4" y="T5"/>
+              </a:cxn>
+              <a:cxn ang="T13">
+                <a:pos x="T6" y="T7"/>
+              </a:cxn>
+              <a:cxn ang="T14">
+                <a:pos x="T8" y="T9"/>
+              </a:cxn>
+            </a:cxnLst>
+            <a:rect l="T15" t="T16" r="T17" b="T18"/>
+            <a:pathLst>
+              <a:path w="21600" h="21600">
+                <a:moveTo>
+                  <a:pt x="0" y="0"/>
+                </a:moveTo>
+                <a:lnTo>
+                  <a:pt x="21600" y="0"/>
+                </a:lnTo>
+                <a:lnTo>
+                  <a:pt x="21600" y="21600"/>
+                </a:lnTo>
+                <a:lnTo>
+                  <a:pt x="0" y="21600"/>
+                </a:lnTo>
+                <a:lnTo>
+                  <a:pt x="0" y="0"/>
+                </a:lnTo>
+                <a:close/>
+              </a:path>
+            </a:pathLst>
+          </a:custGeom>
+          <a:blipFill dpi="0" rotWithShape="1">
+            <a:blip r:embed="rId2"/>
+            <a:srcRect/>
+            <a:stretch>
+              <a:fillRect/>
+            </a:stretch>
+          </a:blipFill>
+          <a:ln>
+            <a:noFill/>
+          </a:ln>
+          <a:extLst>
+            <a:ext uri="{91240B29-F687-4F45-9708-019B960494DF}">
+              <a14:hiddenLine xmlns:a14="http://schemas.microsoft.com/office/drawing/2010/main" w="9525">
+                <a:solidFill>
+                  <a:srgbClr val="000000"/>
+                </a:solidFill>
+                <a:round/>
+                <a:headEnd/>
+                <a:tailEnd/>
+              </a14:hiddenLine>
+            </a:ext>
+          </a:extLst>
+        </p:spPr>
+        <p:txBody>
+          <a:bodyPr lIns="0" tIns="0" rIns="0" bIns="0"/>
+          <a:lstStyle/>
+          <a:p>
+            <a:endParaRPr lang="en-US"/>
+          </a:p>
+        </p:txBody>
+      </p:sp>
+      <p:sp>
+        <p:nvSpPr>
+          <p:cNvPr id="4100" name="object 7">
+            <a:extLst>
+              <a:ext uri="{FF2B5EF4-FFF2-40B4-BE49-F238E27FC236}">
+                <a16:creationId xmlns:a16="http://schemas.microsoft.com/office/drawing/2014/main" id="{3DB2066B-4694-1961-B7EE-D636E7BA99CF}"/>
+              </a:ext>
+            </a:extLst>
+          </p:cNvPr>
+          <p:cNvSpPr txBox="1">
+            <a:spLocks noChangeArrowheads="1"/>
+          </p:cNvSpPr>
+          <p:nvPr/>
+        </p:nvSpPr>
+        <p:spPr bwMode="auto">
+          <a:xfrm>
+            <a:off x="588963" y="238125"/>
+            <a:ext cx="8091487" cy="553998"/>
+          </a:xfrm>
+          <a:prstGeom prst="rect">
+            <a:avLst/>
+          </a:prstGeom>
+          <a:noFill/>
+          <a:ln>
+            <a:noFill/>
+          </a:ln>
+          <a:extLst>
+            <a:ext uri="{909E8E84-426E-40DD-AFC4-6F175D3DCCD1}">
+              <a14:hiddenFill xmlns:a14="http://schemas.microsoft.com/office/drawing/2010/main">
+                <a:solidFill>
+                  <a:srgbClr val="FFFFFF"/>
+                </a:solidFill>
+              </a14:hiddenFill>
+            </a:ext>
+            <a:ext uri="{91240B29-F687-4F45-9708-019B960494DF}">
+              <a14:hiddenLine xmlns:a14="http://schemas.microsoft.com/office/drawing/2010/main" w="9525">
+                <a:solidFill>
+                  <a:srgbClr val="000000"/>
+                </a:solidFill>
+                <a:miter lim="800000"/>
+                <a:headEnd/>
+                <a:tailEnd/>
+              </a14:hiddenLine>
+            </a:ext>
+          </a:extLst>
+        </p:spPr>
+        <p:txBody>
+          <a:bodyPr lIns="0" tIns="0" rIns="0" bIns="0" anchorCtr="1">
+            <a:spAutoFit/>
+          </a:bodyPr>
+          <a:lstStyle>
+            <a:lvl1pPr marL="11113">
+              <a:spcAft>
+                <a:spcPts val="1413"/>
+              </a:spcAft>
+              <a:buChar char="•"/>
+              <a:defRPr sz="2400">
+                <a:solidFill>
+                  <a:srgbClr val="000000"/>
+                </a:solidFill>
+                <a:latin typeface="Times New Roman" pitchFamily="18" charset="0"/>
+                <a:ea typeface="Microsoft YaHei" pitchFamily="34" charset="-122"/>
+              </a:defRPr>
+            </a:lvl1pPr>
+            <a:lvl2pPr marL="685800" indent="-228600">
+              <a:spcAft>
+                <a:spcPts val="1413"/>
+              </a:spcAft>
+              <a:buSzPct val="75000"/>
+              <a:buFont typeface="StarSymbol"/>
+              <a:buChar char="–"/>
+              <a:defRPr sz="2400">
+                <a:solidFill>
+                  <a:srgbClr val="000000"/>
+                </a:solidFill>
+                <a:latin typeface="Times New Roman" pitchFamily="18" charset="0"/>
+                <a:ea typeface="Microsoft YaHei" pitchFamily="34" charset="-122"/>
+              </a:defRPr>
+            </a:lvl2pPr>
+            <a:lvl3pPr marL="1143000" indent="-228600">
+              <a:spcAft>
+                <a:spcPts val="1413"/>
+              </a:spcAft>
+              <a:buSzPct val="75000"/>
+              <a:buFont typeface="StarSymbol"/>
+              <a:buChar char="●"/>
+              <a:defRPr sz="2400">
+                <a:solidFill>
+                  <a:srgbClr val="000000"/>
+                </a:solidFill>
+                <a:latin typeface="Times New Roman" pitchFamily="18" charset="0"/>
+                <a:ea typeface="Microsoft YaHei" pitchFamily="34" charset="-122"/>
+              </a:defRPr>
+            </a:lvl3pPr>
+            <a:lvl4pPr marL="1600200" indent="-228600">
+              <a:spcAft>
+                <a:spcPts val="1413"/>
+              </a:spcAft>
+              <a:buSzPct val="75000"/>
+              <a:buFont typeface="StarSymbol"/>
+              <a:buChar char="–"/>
+              <a:defRPr sz="2400">
+                <a:solidFill>
+                  <a:srgbClr val="000000"/>
+                </a:solidFill>
+                <a:latin typeface="Times New Roman" pitchFamily="18" charset="0"/>
+                <a:ea typeface="Microsoft YaHei" pitchFamily="34" charset="-122"/>
+              </a:defRPr>
+            </a:lvl4pPr>
+            <a:lvl5pPr marL="2057400" indent="-228600">
+              <a:spcAft>
+                <a:spcPts val="1413"/>
+              </a:spcAft>
+              <a:buSzPct val="75000"/>
+              <a:buFont typeface="StarSymbol"/>
+              <a:buChar char="●"/>
+              <a:defRPr sz="2400">
+                <a:solidFill>
+                  <a:srgbClr val="000000"/>
+                </a:solidFill>
+                <a:latin typeface="Times New Roman" pitchFamily="18" charset="0"/>
+                <a:ea typeface="Microsoft YaHei" pitchFamily="34" charset="-122"/>
+              </a:defRPr>
+            </a:lvl5pPr>
+            <a:lvl6pPr marL="2514600" indent="-228600" eaLnBrk="0" fontAlgn="base" hangingPunct="0">
+              <a:spcBef>
+                <a:spcPct val="0"/>
+              </a:spcBef>
+              <a:spcAft>
+                <a:spcPts val="1413"/>
+              </a:spcAft>
+              <a:buSzPct val="75000"/>
+              <a:buFont typeface="StarSymbol"/>
+              <a:buChar char="●"/>
+              <a:defRPr sz="2400">
+                <a:solidFill>
+                  <a:srgbClr val="000000"/>
+                </a:solidFill>
+                <a:latin typeface="Times New Roman" pitchFamily="18" charset="0"/>
+                <a:ea typeface="Microsoft YaHei" pitchFamily="34" charset="-122"/>
+              </a:defRPr>
+            </a:lvl6pPr>
+            <a:lvl7pPr marL="2971800" indent="-228600" eaLnBrk="0" fontAlgn="base" hangingPunct="0">
+              <a:spcBef>
+                <a:spcPct val="0"/>
+              </a:spcBef>
+              <a:spcAft>
+                <a:spcPts val="1413"/>
+              </a:spcAft>
+              <a:buSzPct val="75000"/>
+              <a:buFont typeface="StarSymbol"/>
+              <a:buChar char="●"/>
+              <a:defRPr sz="2400">
+                <a:solidFill>
+                  <a:srgbClr val="000000"/>
+                </a:solidFill>
+                <a:latin typeface="Times New Roman" pitchFamily="18" charset="0"/>
+                <a:ea typeface="Microsoft YaHei" pitchFamily="34" charset="-122"/>
+              </a:defRPr>
+            </a:lvl7pPr>
+            <a:lvl8pPr marL="3429000" indent="-228600" eaLnBrk="0" fontAlgn="base" hangingPunct="0">
+              <a:spcBef>
+                <a:spcPct val="0"/>
+              </a:spcBef>
+              <a:spcAft>
+                <a:spcPts val="1413"/>
+              </a:spcAft>
+              <a:buSzPct val="75000"/>
+              <a:buFont typeface="StarSymbol"/>
+              <a:buChar char="●"/>
+              <a:defRPr sz="2400">
+                <a:solidFill>
+                  <a:srgbClr val="000000"/>
+                </a:solidFill>
+                <a:latin typeface="Times New Roman" pitchFamily="18" charset="0"/>
+                <a:ea typeface="Microsoft YaHei" pitchFamily="34" charset="-122"/>
+              </a:defRPr>
+            </a:lvl8pPr>
+            <a:lvl9pPr marL="3886200" indent="-228600" eaLnBrk="0" fontAlgn="base" hangingPunct="0">
+              <a:spcBef>
+                <a:spcPct val="0"/>
+              </a:spcBef>
+              <a:spcAft>
+                <a:spcPts val="1413"/>
+              </a:spcAft>
+              <a:buSzPct val="75000"/>
+              <a:buFont typeface="StarSymbol"/>
+              <a:buChar char="●"/>
+              <a:defRPr sz="2400">
+                <a:solidFill>
+                  <a:srgbClr val="000000"/>
+                </a:solidFill>
+                <a:latin typeface="Times New Roman" pitchFamily="18" charset="0"/>
+                <a:ea typeface="Microsoft YaHei" pitchFamily="34" charset="-122"/>
+              </a:defRPr>
+            </a:lvl9pPr>
+          </a:lstStyle>
+          <a:p>
+            <a:pPr algn="ctr" eaLnBrk="1">
+              <a:spcAft>
+                <a:spcPct val="0"/>
+              </a:spcAft>
+              <a:buFontTx/>
+              <a:buNone/>
+            </a:pPr>
+            <a:r>
+              <a:rPr lang="en-US" altLang="en-US" sz="3600" dirty="0">
+                <a:solidFill>
+                  <a:srgbClr val="FFFFFF"/>
+                </a:solidFill>
+                <a:latin typeface="Tahoma" pitchFamily="34" charset="0"/>
+                <a:cs typeface="Tahoma" pitchFamily="34" charset="0"/>
+              </a:rPr>
+              <a:t>Probabilistic Uncertainty (TODO 2)</a:t>
+            </a:r>
+            <a:endParaRPr lang="en-US" altLang="en-US" sz="2800" dirty="0">
+              <a:solidFill>
+                <a:srgbClr val="FFFFFF"/>
+              </a:solidFill>
+              <a:latin typeface="Tahoma" pitchFamily="34" charset="0"/>
+              <a:cs typeface="Tahoma" pitchFamily="34" charset="0"/>
+            </a:endParaRPr>
+          </a:p>
+        </p:txBody>
+      </p:sp>
+    </p:spTree>
+    <p:extLst>
+      <p:ext uri="{BB962C8B-B14F-4D97-AF65-F5344CB8AC3E}">
+        <p14:creationId xmlns:p14="http://schemas.microsoft.com/office/powerpoint/2010/main" val="3586973174"/>
+      </p:ext>
+    </p:extLst>
+  </p:cSld>
+  <p:clrMapOvr>
+    <a:masterClrMapping/>
+  </p:clrMapOvr>
+  <p:transition spd="slow"/>
+</p:sld>
+</file>
+
+<file path=ppt/slides/slide5.xml><?xml version="1.0" encoding="utf-8"?>
+<p:sld xmlns:a="http://schemas.openxmlformats.org/drawingml/2006/main" xmlns:r="http://schemas.openxmlformats.org/officeDocument/2006/relationships" xmlns:p="http://schemas.openxmlformats.org/presentationml/2006/main">
+  <p:cSld>
+    <p:spTree>
+      <p:nvGrpSpPr>
+        <p:cNvPr id="1" name="">
+          <a:extLst>
+            <a:ext uri="{FF2B5EF4-FFF2-40B4-BE49-F238E27FC236}">
+              <a16:creationId xmlns:a16="http://schemas.microsoft.com/office/drawing/2014/main" id="{6FA8E1D0-A4F8-7B9C-3CFB-85346560FA48}"/>
+            </a:ext>
+          </a:extLst>
+        </p:cNvPr>
+        <p:cNvGrpSpPr/>
+        <p:nvPr/>
+      </p:nvGrpSpPr>
+      <p:grpSpPr>
+        <a:xfrm>
+          <a:off x="0" y="0"/>
+          <a:ext cx="0" cy="0"/>
+          <a:chOff x="0" y="0"/>
+          <a:chExt cx="0" cy="0"/>
+        </a:xfrm>
+      </p:grpSpPr>
+      <p:sp>
+        <p:nvSpPr>
+          <p:cNvPr id="4098" name="object 5">
+            <a:extLst>
+              <a:ext uri="{FF2B5EF4-FFF2-40B4-BE49-F238E27FC236}">
+                <a16:creationId xmlns:a16="http://schemas.microsoft.com/office/drawing/2014/main" id="{1CDA658B-1B1A-8FC7-724B-EC088FA992A2}"/>
+              </a:ext>
+            </a:extLst>
+          </p:cNvPr>
+          <p:cNvSpPr>
+            <a:spLocks/>
+          </p:cNvSpPr>
+          <p:nvPr/>
+        </p:nvSpPr>
+        <p:spPr bwMode="auto">
+          <a:xfrm>
+            <a:off x="303213" y="104775"/>
+            <a:ext cx="8662987" cy="812800"/>
+          </a:xfrm>
+          <a:custGeom>
+            <a:avLst/>
+            <a:gdLst>
+              <a:gd name="T0" fmla="*/ 0 w 21600"/>
+              <a:gd name="T1" fmla="*/ 0 h 21600"/>
+              <a:gd name="T2" fmla="*/ 2147483647 w 21600"/>
+              <a:gd name="T3" fmla="*/ 0 h 21600"/>
+              <a:gd name="T4" fmla="*/ 2147483647 w 21600"/>
+              <a:gd name="T5" fmla="*/ 2147483647 h 21600"/>
+              <a:gd name="T6" fmla="*/ 0 w 21600"/>
+              <a:gd name="T7" fmla="*/ 2147483647 h 21600"/>
+              <a:gd name="T8" fmla="*/ 0 w 21600"/>
+              <a:gd name="T9" fmla="*/ 0 h 21600"/>
+              <a:gd name="T10" fmla="*/ 0 60000 65536"/>
+              <a:gd name="T11" fmla="*/ 0 60000 65536"/>
+              <a:gd name="T12" fmla="*/ 0 60000 65536"/>
+              <a:gd name="T13" fmla="*/ 0 60000 65536"/>
+              <a:gd name="T14" fmla="*/ 0 60000 65536"/>
+              <a:gd name="T15" fmla="*/ 0 w 21600"/>
+              <a:gd name="T16" fmla="*/ 0 h 21600"/>
+              <a:gd name="T17" fmla="*/ 21600 w 21600"/>
+              <a:gd name="T18" fmla="*/ 21600 h 21600"/>
+            </a:gdLst>
+            <a:ahLst/>
+            <a:cxnLst>
+              <a:cxn ang="T10">
+                <a:pos x="T0" y="T1"/>
+              </a:cxn>
+              <a:cxn ang="T11">
+                <a:pos x="T2" y="T3"/>
+              </a:cxn>
+              <a:cxn ang="T12">
+                <a:pos x="T4" y="T5"/>
+              </a:cxn>
+              <a:cxn ang="T13">
+                <a:pos x="T6" y="T7"/>
+              </a:cxn>
+              <a:cxn ang="T14">
+                <a:pos x="T8" y="T9"/>
+              </a:cxn>
+            </a:cxnLst>
+            <a:rect l="T15" t="T16" r="T17" b="T18"/>
+            <a:pathLst>
+              <a:path w="21600" h="21600">
+                <a:moveTo>
+                  <a:pt x="0" y="0"/>
+                </a:moveTo>
+                <a:lnTo>
+                  <a:pt x="21600" y="0"/>
+                </a:lnTo>
+                <a:lnTo>
+                  <a:pt x="21600" y="21600"/>
+                </a:lnTo>
+                <a:lnTo>
+                  <a:pt x="0" y="21600"/>
+                </a:lnTo>
+                <a:lnTo>
+                  <a:pt x="0" y="0"/>
+                </a:lnTo>
+                <a:close/>
+              </a:path>
+            </a:pathLst>
+          </a:custGeom>
+          <a:blipFill dpi="0" rotWithShape="1">
+            <a:blip r:embed="rId2"/>
+            <a:srcRect/>
+            <a:stretch>
+              <a:fillRect/>
+            </a:stretch>
+          </a:blipFill>
+          <a:ln>
+            <a:noFill/>
+          </a:ln>
+          <a:extLst>
+            <a:ext uri="{91240B29-F687-4F45-9708-019B960494DF}">
+              <a14:hiddenLine xmlns:a14="http://schemas.microsoft.com/office/drawing/2010/main" w="9525">
+                <a:solidFill>
+                  <a:srgbClr val="000000"/>
+                </a:solidFill>
+                <a:round/>
+                <a:headEnd/>
+                <a:tailEnd/>
+              </a14:hiddenLine>
+            </a:ext>
+          </a:extLst>
+        </p:spPr>
+        <p:txBody>
+          <a:bodyPr lIns="0" tIns="0" rIns="0" bIns="0"/>
+          <a:lstStyle/>
+          <a:p>
+            <a:endParaRPr lang="en-US"/>
+          </a:p>
+        </p:txBody>
+      </p:sp>
+      <p:sp>
+        <p:nvSpPr>
+          <p:cNvPr id="4100" name="object 7">
+            <a:extLst>
+              <a:ext uri="{FF2B5EF4-FFF2-40B4-BE49-F238E27FC236}">
+                <a16:creationId xmlns:a16="http://schemas.microsoft.com/office/drawing/2014/main" id="{17686FD2-BE8E-4BE6-ED78-6F2C3B20CC5E}"/>
+              </a:ext>
+            </a:extLst>
+          </p:cNvPr>
+          <p:cNvSpPr txBox="1">
+            <a:spLocks noChangeArrowheads="1"/>
+          </p:cNvSpPr>
+          <p:nvPr/>
+        </p:nvSpPr>
+        <p:spPr bwMode="auto">
+          <a:xfrm>
+            <a:off x="588963" y="238125"/>
+            <a:ext cx="8091487" cy="553998"/>
+          </a:xfrm>
+          <a:prstGeom prst="rect">
+            <a:avLst/>
+          </a:prstGeom>
+          <a:noFill/>
+          <a:ln>
+            <a:noFill/>
+          </a:ln>
+          <a:extLst>
+            <a:ext uri="{909E8E84-426E-40DD-AFC4-6F175D3DCCD1}">
+              <a14:hiddenFill xmlns:a14="http://schemas.microsoft.com/office/drawing/2010/main">
+                <a:solidFill>
+                  <a:srgbClr val="FFFFFF"/>
+                </a:solidFill>
+              </a14:hiddenFill>
+            </a:ext>
+            <a:ext uri="{91240B29-F687-4F45-9708-019B960494DF}">
+              <a14:hiddenLine xmlns:a14="http://schemas.microsoft.com/office/drawing/2010/main" w="9525">
+                <a:solidFill>
+                  <a:srgbClr val="000000"/>
+                </a:solidFill>
+                <a:miter lim="800000"/>
+                <a:headEnd/>
+                <a:tailEnd/>
+              </a14:hiddenLine>
+            </a:ext>
+          </a:extLst>
+        </p:spPr>
+        <p:txBody>
+          <a:bodyPr lIns="0" tIns="0" rIns="0" bIns="0" anchorCtr="1">
+            <a:spAutoFit/>
+          </a:bodyPr>
+          <a:lstStyle>
+            <a:lvl1pPr marL="11113">
+              <a:spcAft>
+                <a:spcPts val="1413"/>
+              </a:spcAft>
+              <a:buChar char="•"/>
+              <a:defRPr sz="2400">
+                <a:solidFill>
+                  <a:srgbClr val="000000"/>
+                </a:solidFill>
+                <a:latin typeface="Times New Roman" pitchFamily="18" charset="0"/>
+                <a:ea typeface="Microsoft YaHei" pitchFamily="34" charset="-122"/>
+              </a:defRPr>
+            </a:lvl1pPr>
+            <a:lvl2pPr marL="685800" indent="-228600">
+              <a:spcAft>
+                <a:spcPts val="1413"/>
+              </a:spcAft>
+              <a:buSzPct val="75000"/>
+              <a:buFont typeface="StarSymbol"/>
+              <a:buChar char="–"/>
+              <a:defRPr sz="2400">
+                <a:solidFill>
+                  <a:srgbClr val="000000"/>
+                </a:solidFill>
+                <a:latin typeface="Times New Roman" pitchFamily="18" charset="0"/>
+                <a:ea typeface="Microsoft YaHei" pitchFamily="34" charset="-122"/>
+              </a:defRPr>
+            </a:lvl2pPr>
+            <a:lvl3pPr marL="1143000" indent="-228600">
+              <a:spcAft>
+                <a:spcPts val="1413"/>
+              </a:spcAft>
+              <a:buSzPct val="75000"/>
+              <a:buFont typeface="StarSymbol"/>
+              <a:buChar char="●"/>
+              <a:defRPr sz="2400">
+                <a:solidFill>
+                  <a:srgbClr val="000000"/>
+                </a:solidFill>
+                <a:latin typeface="Times New Roman" pitchFamily="18" charset="0"/>
+                <a:ea typeface="Microsoft YaHei" pitchFamily="34" charset="-122"/>
+              </a:defRPr>
+            </a:lvl3pPr>
+            <a:lvl4pPr marL="1600200" indent="-228600">
+              <a:spcAft>
+                <a:spcPts val="1413"/>
+              </a:spcAft>
+              <a:buSzPct val="75000"/>
+              <a:buFont typeface="StarSymbol"/>
+              <a:buChar char="–"/>
+              <a:defRPr sz="2400">
+                <a:solidFill>
+                  <a:srgbClr val="000000"/>
+                </a:solidFill>
+                <a:latin typeface="Times New Roman" pitchFamily="18" charset="0"/>
+                <a:ea typeface="Microsoft YaHei" pitchFamily="34" charset="-122"/>
+              </a:defRPr>
+            </a:lvl4pPr>
+            <a:lvl5pPr marL="2057400" indent="-228600">
+              <a:spcAft>
+                <a:spcPts val="1413"/>
+              </a:spcAft>
+              <a:buSzPct val="75000"/>
+              <a:buFont typeface="StarSymbol"/>
+              <a:buChar char="●"/>
+              <a:defRPr sz="2400">
+                <a:solidFill>
+                  <a:srgbClr val="000000"/>
+                </a:solidFill>
+                <a:latin typeface="Times New Roman" pitchFamily="18" charset="0"/>
+                <a:ea typeface="Microsoft YaHei" pitchFamily="34" charset="-122"/>
+              </a:defRPr>
+            </a:lvl5pPr>
+            <a:lvl6pPr marL="2514600" indent="-228600" eaLnBrk="0" fontAlgn="base" hangingPunct="0">
+              <a:spcBef>
+                <a:spcPct val="0"/>
+              </a:spcBef>
+              <a:spcAft>
+                <a:spcPts val="1413"/>
+              </a:spcAft>
+              <a:buSzPct val="75000"/>
+              <a:buFont typeface="StarSymbol"/>
+              <a:buChar char="●"/>
+              <a:defRPr sz="2400">
+                <a:solidFill>
+                  <a:srgbClr val="000000"/>
+                </a:solidFill>
+                <a:latin typeface="Times New Roman" pitchFamily="18" charset="0"/>
+                <a:ea typeface="Microsoft YaHei" pitchFamily="34" charset="-122"/>
+              </a:defRPr>
+            </a:lvl6pPr>
+            <a:lvl7pPr marL="2971800" indent="-228600" eaLnBrk="0" fontAlgn="base" hangingPunct="0">
+              <a:spcBef>
+                <a:spcPct val="0"/>
+              </a:spcBef>
+              <a:spcAft>
+                <a:spcPts val="1413"/>
+              </a:spcAft>
+              <a:buSzPct val="75000"/>
+              <a:buFont typeface="StarSymbol"/>
+              <a:buChar char="●"/>
+              <a:defRPr sz="2400">
+                <a:solidFill>
+                  <a:srgbClr val="000000"/>
+                </a:solidFill>
+                <a:latin typeface="Times New Roman" pitchFamily="18" charset="0"/>
+                <a:ea typeface="Microsoft YaHei" pitchFamily="34" charset="-122"/>
+              </a:defRPr>
+            </a:lvl7pPr>
+            <a:lvl8pPr marL="3429000" indent="-228600" eaLnBrk="0" fontAlgn="base" hangingPunct="0">
+              <a:spcBef>
+                <a:spcPct val="0"/>
+              </a:spcBef>
+              <a:spcAft>
+                <a:spcPts val="1413"/>
+              </a:spcAft>
+              <a:buSzPct val="75000"/>
+              <a:buFont typeface="StarSymbol"/>
+              <a:buChar char="●"/>
+              <a:defRPr sz="2400">
+                <a:solidFill>
+                  <a:srgbClr val="000000"/>
+                </a:solidFill>
+                <a:latin typeface="Times New Roman" pitchFamily="18" charset="0"/>
+                <a:ea typeface="Microsoft YaHei" pitchFamily="34" charset="-122"/>
+              </a:defRPr>
+            </a:lvl8pPr>
+            <a:lvl9pPr marL="3886200" indent="-228600" eaLnBrk="0" fontAlgn="base" hangingPunct="0">
+              <a:spcBef>
+                <a:spcPct val="0"/>
+              </a:spcBef>
+              <a:spcAft>
+                <a:spcPts val="1413"/>
+              </a:spcAft>
+              <a:buSzPct val="75000"/>
+              <a:buFont typeface="StarSymbol"/>
+              <a:buChar char="●"/>
+              <a:defRPr sz="2400">
+                <a:solidFill>
+                  <a:srgbClr val="000000"/>
+                </a:solidFill>
+                <a:latin typeface="Times New Roman" pitchFamily="18" charset="0"/>
+                <a:ea typeface="Microsoft YaHei" pitchFamily="34" charset="-122"/>
+              </a:defRPr>
+            </a:lvl9pPr>
+          </a:lstStyle>
+          <a:p>
+            <a:pPr algn="ctr" eaLnBrk="1">
+              <a:spcAft>
+                <a:spcPct val="0"/>
+              </a:spcAft>
+              <a:buFontTx/>
+              <a:buNone/>
+            </a:pPr>
+            <a:r>
+              <a:rPr lang="en-US" altLang="en-US" sz="3600" dirty="0">
+                <a:solidFill>
+                  <a:srgbClr val="FFFFFF"/>
+                </a:solidFill>
+                <a:latin typeface="Tahoma" pitchFamily="34" charset="0"/>
+                <a:cs typeface="Tahoma" pitchFamily="34" charset="0"/>
+              </a:rPr>
+              <a:t>Possibilistic Uncertainty (TODO 3)</a:t>
+            </a:r>
+            <a:endParaRPr lang="en-US" altLang="en-US" sz="2800" dirty="0">
+              <a:solidFill>
+                <a:srgbClr val="FFFFFF"/>
+              </a:solidFill>
+              <a:latin typeface="Tahoma" pitchFamily="34" charset="0"/>
+              <a:cs typeface="Tahoma" pitchFamily="34" charset="0"/>
+            </a:endParaRPr>
+          </a:p>
+        </p:txBody>
+      </p:sp>
+    </p:spTree>
+    <p:extLst>
+      <p:ext uri="{BB962C8B-B14F-4D97-AF65-F5344CB8AC3E}">
+        <p14:creationId xmlns:p14="http://schemas.microsoft.com/office/powerpoint/2010/main" val="2463423989"/>
+      </p:ext>
+    </p:extLst>
+  </p:cSld>
+  <p:clrMapOvr>
+    <a:masterClrMapping/>
+  </p:clrMapOvr>
+  <p:transition spd="slow"/>
+</p:sld>
+</file>
+
+<file path=ppt/slides/slide6.xml><?xml version="1.0" encoding="utf-8"?>
+<p:sld xmlns:a="http://schemas.openxmlformats.org/drawingml/2006/main" xmlns:r="http://schemas.openxmlformats.org/officeDocument/2006/relationships" xmlns:p="http://schemas.openxmlformats.org/presentationml/2006/main">
+  <p:cSld>
+    <p:spTree>
+      <p:nvGrpSpPr>
+        <p:cNvPr id="1" name="">
+          <a:extLst>
+            <a:ext uri="{FF2B5EF4-FFF2-40B4-BE49-F238E27FC236}">
+              <a16:creationId xmlns:a16="http://schemas.microsoft.com/office/drawing/2014/main" id="{0A165520-1FF8-1A85-0108-2FAAE8D71776}"/>
+            </a:ext>
+          </a:extLst>
+        </p:cNvPr>
+        <p:cNvGrpSpPr/>
+        <p:nvPr/>
+      </p:nvGrpSpPr>
+      <p:grpSpPr>
+        <a:xfrm>
+          <a:off x="0" y="0"/>
+          <a:ext cx="0" cy="0"/>
+          <a:chOff x="0" y="0"/>
+          <a:chExt cx="0" cy="0"/>
+        </a:xfrm>
+      </p:grpSpPr>
+      <p:sp>
+        <p:nvSpPr>
+          <p:cNvPr id="4098" name="object 5">
+            <a:extLst>
+              <a:ext uri="{FF2B5EF4-FFF2-40B4-BE49-F238E27FC236}">
+                <a16:creationId xmlns:a16="http://schemas.microsoft.com/office/drawing/2014/main" id="{FBDC4476-F642-A3A8-2C70-4F673BA0ACA6}"/>
+              </a:ext>
+            </a:extLst>
+          </p:cNvPr>
+          <p:cNvSpPr>
+            <a:spLocks/>
+          </p:cNvSpPr>
+          <p:nvPr/>
+        </p:nvSpPr>
+        <p:spPr bwMode="auto">
+          <a:xfrm>
+            <a:off x="303213" y="104775"/>
+            <a:ext cx="8662987" cy="812800"/>
+          </a:xfrm>
+          <a:custGeom>
+            <a:avLst/>
+            <a:gdLst>
+              <a:gd name="T0" fmla="*/ 0 w 21600"/>
+              <a:gd name="T1" fmla="*/ 0 h 21600"/>
+              <a:gd name="T2" fmla="*/ 2147483647 w 21600"/>
+              <a:gd name="T3" fmla="*/ 0 h 21600"/>
+              <a:gd name="T4" fmla="*/ 2147483647 w 21600"/>
+              <a:gd name="T5" fmla="*/ 2147483647 h 21600"/>
+              <a:gd name="T6" fmla="*/ 0 w 21600"/>
+              <a:gd name="T7" fmla="*/ 2147483647 h 21600"/>
+              <a:gd name="T8" fmla="*/ 0 w 21600"/>
+              <a:gd name="T9" fmla="*/ 0 h 21600"/>
+              <a:gd name="T10" fmla="*/ 0 60000 65536"/>
+              <a:gd name="T11" fmla="*/ 0 60000 65536"/>
+              <a:gd name="T12" fmla="*/ 0 60000 65536"/>
+              <a:gd name="T13" fmla="*/ 0 60000 65536"/>
+              <a:gd name="T14" fmla="*/ 0 60000 65536"/>
+              <a:gd name="T15" fmla="*/ 0 w 21600"/>
+              <a:gd name="T16" fmla="*/ 0 h 21600"/>
+              <a:gd name="T17" fmla="*/ 21600 w 21600"/>
+              <a:gd name="T18" fmla="*/ 21600 h 21600"/>
+            </a:gdLst>
+            <a:ahLst/>
+            <a:cxnLst>
+              <a:cxn ang="T10">
+                <a:pos x="T0" y="T1"/>
+              </a:cxn>
+              <a:cxn ang="T11">
+                <a:pos x="T2" y="T3"/>
+              </a:cxn>
+              <a:cxn ang="T12">
+                <a:pos x="T4" y="T5"/>
+              </a:cxn>
+              <a:cxn ang="T13">
+                <a:pos x="T6" y="T7"/>
+              </a:cxn>
+              <a:cxn ang="T14">
+                <a:pos x="T8" y="T9"/>
+              </a:cxn>
+            </a:cxnLst>
+            <a:rect l="T15" t="T16" r="T17" b="T18"/>
+            <a:pathLst>
+              <a:path w="21600" h="21600">
+                <a:moveTo>
+                  <a:pt x="0" y="0"/>
+                </a:moveTo>
+                <a:lnTo>
+                  <a:pt x="21600" y="0"/>
+                </a:lnTo>
+                <a:lnTo>
+                  <a:pt x="21600" y="21600"/>
+                </a:lnTo>
+                <a:lnTo>
+                  <a:pt x="0" y="21600"/>
+                </a:lnTo>
+                <a:lnTo>
+                  <a:pt x="0" y="0"/>
+                </a:lnTo>
+                <a:close/>
+              </a:path>
+            </a:pathLst>
+          </a:custGeom>
+          <a:blipFill dpi="0" rotWithShape="1">
+            <a:blip r:embed="rId2"/>
+            <a:srcRect/>
+            <a:stretch>
+              <a:fillRect/>
+            </a:stretch>
+          </a:blipFill>
+          <a:ln>
+            <a:noFill/>
+          </a:ln>
+          <a:extLst>
+            <a:ext uri="{91240B29-F687-4F45-9708-019B960494DF}">
+              <a14:hiddenLine xmlns:a14="http://schemas.microsoft.com/office/drawing/2010/main" w="9525">
+                <a:solidFill>
+                  <a:srgbClr val="000000"/>
+                </a:solidFill>
+                <a:round/>
+                <a:headEnd/>
+                <a:tailEnd/>
+              </a14:hiddenLine>
+            </a:ext>
+          </a:extLst>
+        </p:spPr>
+        <p:txBody>
+          <a:bodyPr lIns="0" tIns="0" rIns="0" bIns="0"/>
+          <a:lstStyle/>
+          <a:p>
+            <a:endParaRPr lang="en-US"/>
+          </a:p>
+        </p:txBody>
+      </p:sp>
+      <p:sp>
+        <p:nvSpPr>
+          <p:cNvPr id="4100" name="object 7">
+            <a:extLst>
+              <a:ext uri="{FF2B5EF4-FFF2-40B4-BE49-F238E27FC236}">
+                <a16:creationId xmlns:a16="http://schemas.microsoft.com/office/drawing/2014/main" id="{52399D72-F2F3-0340-5CCC-EAA73C1E5910}"/>
+              </a:ext>
+            </a:extLst>
+          </p:cNvPr>
+          <p:cNvSpPr txBox="1">
+            <a:spLocks noChangeArrowheads="1"/>
+          </p:cNvSpPr>
+          <p:nvPr/>
+        </p:nvSpPr>
+        <p:spPr bwMode="auto">
+          <a:xfrm>
+            <a:off x="588963" y="238125"/>
+            <a:ext cx="8091487" cy="553998"/>
+          </a:xfrm>
+          <a:prstGeom prst="rect">
+            <a:avLst/>
+          </a:prstGeom>
+          <a:noFill/>
+          <a:ln>
+            <a:noFill/>
+          </a:ln>
+          <a:extLst>
+            <a:ext uri="{909E8E84-426E-40DD-AFC4-6F175D3DCCD1}">
+              <a14:hiddenFill xmlns:a14="http://schemas.microsoft.com/office/drawing/2010/main">
+                <a:solidFill>
+                  <a:srgbClr val="FFFFFF"/>
+                </a:solidFill>
+              </a14:hiddenFill>
+            </a:ext>
+            <a:ext uri="{91240B29-F687-4F45-9708-019B960494DF}">
+              <a14:hiddenLine xmlns:a14="http://schemas.microsoft.com/office/drawing/2010/main" w="9525">
+                <a:solidFill>
+                  <a:srgbClr val="000000"/>
+                </a:solidFill>
+                <a:miter lim="800000"/>
+                <a:headEnd/>
+                <a:tailEnd/>
+              </a14:hiddenLine>
+            </a:ext>
+          </a:extLst>
+        </p:spPr>
+        <p:txBody>
+          <a:bodyPr lIns="0" tIns="0" rIns="0" bIns="0" anchorCtr="1">
+            <a:spAutoFit/>
+          </a:bodyPr>
+          <a:lstStyle>
+            <a:lvl1pPr marL="11113">
+              <a:spcAft>
+                <a:spcPts val="1413"/>
+              </a:spcAft>
+              <a:buChar char="•"/>
+              <a:defRPr sz="2400">
+                <a:solidFill>
+                  <a:srgbClr val="000000"/>
+                </a:solidFill>
+                <a:latin typeface="Times New Roman" pitchFamily="18" charset="0"/>
+                <a:ea typeface="Microsoft YaHei" pitchFamily="34" charset="-122"/>
+              </a:defRPr>
+            </a:lvl1pPr>
+            <a:lvl2pPr marL="685800" indent="-228600">
+              <a:spcAft>
+                <a:spcPts val="1413"/>
+              </a:spcAft>
+              <a:buSzPct val="75000"/>
+              <a:buFont typeface="StarSymbol"/>
+              <a:buChar char="–"/>
+              <a:defRPr sz="2400">
+                <a:solidFill>
+                  <a:srgbClr val="000000"/>
+                </a:solidFill>
+                <a:latin typeface="Times New Roman" pitchFamily="18" charset="0"/>
+                <a:ea typeface="Microsoft YaHei" pitchFamily="34" charset="-122"/>
+              </a:defRPr>
+            </a:lvl2pPr>
+            <a:lvl3pPr marL="1143000" indent="-228600">
+              <a:spcAft>
+                <a:spcPts val="1413"/>
+              </a:spcAft>
+              <a:buSzPct val="75000"/>
+              <a:buFont typeface="StarSymbol"/>
+              <a:buChar char="●"/>
+              <a:defRPr sz="2400">
+                <a:solidFill>
+                  <a:srgbClr val="000000"/>
+                </a:solidFill>
+                <a:latin typeface="Times New Roman" pitchFamily="18" charset="0"/>
+                <a:ea typeface="Microsoft YaHei" pitchFamily="34" charset="-122"/>
+              </a:defRPr>
+            </a:lvl3pPr>
+            <a:lvl4pPr marL="1600200" indent="-228600">
+              <a:spcAft>
+                <a:spcPts val="1413"/>
+              </a:spcAft>
+              <a:buSzPct val="75000"/>
+              <a:buFont typeface="StarSymbol"/>
+              <a:buChar char="–"/>
+              <a:defRPr sz="2400">
+                <a:solidFill>
+                  <a:srgbClr val="000000"/>
+                </a:solidFill>
+                <a:latin typeface="Times New Roman" pitchFamily="18" charset="0"/>
+                <a:ea typeface="Microsoft YaHei" pitchFamily="34" charset="-122"/>
+              </a:defRPr>
+            </a:lvl4pPr>
+            <a:lvl5pPr marL="2057400" indent="-228600">
+              <a:spcAft>
+                <a:spcPts val="1413"/>
+              </a:spcAft>
+              <a:buSzPct val="75000"/>
+              <a:buFont typeface="StarSymbol"/>
+              <a:buChar char="●"/>
+              <a:defRPr sz="2400">
+                <a:solidFill>
+                  <a:srgbClr val="000000"/>
+                </a:solidFill>
+                <a:latin typeface="Times New Roman" pitchFamily="18" charset="0"/>
+                <a:ea typeface="Microsoft YaHei" pitchFamily="34" charset="-122"/>
+              </a:defRPr>
+            </a:lvl5pPr>
+            <a:lvl6pPr marL="2514600" indent="-228600" eaLnBrk="0" fontAlgn="base" hangingPunct="0">
+              <a:spcBef>
+                <a:spcPct val="0"/>
+              </a:spcBef>
+              <a:spcAft>
+                <a:spcPts val="1413"/>
+              </a:spcAft>
+              <a:buSzPct val="75000"/>
+              <a:buFont typeface="StarSymbol"/>
+              <a:buChar char="●"/>
+              <a:defRPr sz="2400">
+                <a:solidFill>
+                  <a:srgbClr val="000000"/>
+                </a:solidFill>
+                <a:latin typeface="Times New Roman" pitchFamily="18" charset="0"/>
+                <a:ea typeface="Microsoft YaHei" pitchFamily="34" charset="-122"/>
+              </a:defRPr>
+            </a:lvl6pPr>
+            <a:lvl7pPr marL="2971800" indent="-228600" eaLnBrk="0" fontAlgn="base" hangingPunct="0">
+              <a:spcBef>
+                <a:spcPct val="0"/>
+              </a:spcBef>
+              <a:spcAft>
+                <a:spcPts val="1413"/>
+              </a:spcAft>
+              <a:buSzPct val="75000"/>
+              <a:buFont typeface="StarSymbol"/>
+              <a:buChar char="●"/>
+              <a:defRPr sz="2400">
+                <a:solidFill>
+                  <a:srgbClr val="000000"/>
+                </a:solidFill>
+                <a:latin typeface="Times New Roman" pitchFamily="18" charset="0"/>
+                <a:ea typeface="Microsoft YaHei" pitchFamily="34" charset="-122"/>
+              </a:defRPr>
+            </a:lvl7pPr>
+            <a:lvl8pPr marL="3429000" indent="-228600" eaLnBrk="0" fontAlgn="base" hangingPunct="0">
+              <a:spcBef>
+                <a:spcPct val="0"/>
+              </a:spcBef>
+              <a:spcAft>
+                <a:spcPts val="1413"/>
+              </a:spcAft>
+              <a:buSzPct val="75000"/>
+              <a:buFont typeface="StarSymbol"/>
+              <a:buChar char="●"/>
+              <a:defRPr sz="2400">
+                <a:solidFill>
+                  <a:srgbClr val="000000"/>
+                </a:solidFill>
+                <a:latin typeface="Times New Roman" pitchFamily="18" charset="0"/>
+                <a:ea typeface="Microsoft YaHei" pitchFamily="34" charset="-122"/>
+              </a:defRPr>
+            </a:lvl8pPr>
+            <a:lvl9pPr marL="3886200" indent="-228600" eaLnBrk="0" fontAlgn="base" hangingPunct="0">
+              <a:spcBef>
+                <a:spcPct val="0"/>
+              </a:spcBef>
+              <a:spcAft>
+                <a:spcPts val="1413"/>
+              </a:spcAft>
+              <a:buSzPct val="75000"/>
+              <a:buFont typeface="StarSymbol"/>
+              <a:buChar char="●"/>
+              <a:defRPr sz="2400">
+                <a:solidFill>
+                  <a:srgbClr val="000000"/>
+                </a:solidFill>
+                <a:latin typeface="Times New Roman" pitchFamily="18" charset="0"/>
+                <a:ea typeface="Microsoft YaHei" pitchFamily="34" charset="-122"/>
+              </a:defRPr>
+            </a:lvl9pPr>
+          </a:lstStyle>
+          <a:p>
+            <a:pPr algn="ctr" eaLnBrk="1">
+              <a:spcAft>
+                <a:spcPct val="0"/>
+              </a:spcAft>
+              <a:buFontTx/>
+              <a:buNone/>
+            </a:pPr>
+            <a:r>
+              <a:rPr lang="en-US" altLang="en-US" sz="3600" dirty="0">
+                <a:solidFill>
+                  <a:srgbClr val="FFFFFF"/>
+                </a:solidFill>
+                <a:latin typeface="Tahoma" pitchFamily="34" charset="0"/>
+                <a:cs typeface="Tahoma" pitchFamily="34" charset="0"/>
+              </a:rPr>
+              <a:t>Quality Attributes (TODO 4)</a:t>
+            </a:r>
+            <a:endParaRPr lang="en-US" altLang="en-US" sz="2800" dirty="0">
+              <a:solidFill>
+                <a:srgbClr val="FFFFFF"/>
+              </a:solidFill>
+              <a:latin typeface="Tahoma" pitchFamily="34" charset="0"/>
+              <a:cs typeface="Tahoma" pitchFamily="34" charset="0"/>
+            </a:endParaRPr>
+          </a:p>
+        </p:txBody>
+      </p:sp>
+    </p:spTree>
+    <p:extLst>
+      <p:ext uri="{BB962C8B-B14F-4D97-AF65-F5344CB8AC3E}">
+        <p14:creationId xmlns:p14="http://schemas.microsoft.com/office/powerpoint/2010/main" val="1147643109"/>
+      </p:ext>
+    </p:extLst>
+  </p:cSld>
+  <p:clrMapOvr>
+    <a:masterClrMapping/>
+  </p:clrMapOvr>
+  <p:transition spd="slow"/>
+</p:sld>
+</file>
+
+<file path=ppt/slides/slide7.xml><?xml version="1.0" encoding="utf-8"?>
 <p:sld xmlns:a="http://schemas.openxmlformats.org/drawingml/2006/main" xmlns:r="http://schemas.openxmlformats.org/officeDocument/2006/relationships" xmlns:p="http://schemas.openxmlformats.org/presentationml/2006/main">
   <p:cSld>
     <p:spTree>

--- a/A-D2.pptx
+++ b/A-D2.pptx
@@ -6,16 +6,18 @@
     <p:sldMasterId id="2147483660" r:id="rId2"/>
   </p:sldMasterIdLst>
   <p:notesMasterIdLst>
-    <p:notesMasterId r:id="rId10"/>
+    <p:notesMasterId r:id="rId12"/>
   </p:notesMasterIdLst>
   <p:sldIdLst>
     <p:sldId id="273" r:id="rId3"/>
     <p:sldId id="285" r:id="rId4"/>
     <p:sldId id="288" r:id="rId5"/>
     <p:sldId id="290" r:id="rId6"/>
-    <p:sldId id="289" r:id="rId7"/>
-    <p:sldId id="291" r:id="rId8"/>
-    <p:sldId id="286" r:id="rId9"/>
+    <p:sldId id="292" r:id="rId7"/>
+    <p:sldId id="293" r:id="rId8"/>
+    <p:sldId id="289" r:id="rId9"/>
+    <p:sldId id="291" r:id="rId10"/>
+    <p:sldId id="286" r:id="rId11"/>
   </p:sldIdLst>
   <p:sldSz cx="9144000" cy="6858000" type="screen4x3"/>
   <p:notesSz cx="7772400" cy="10058400"/>
@@ -152,7 +154,7 @@
   <p:extLst>
     <p:ext uri="{EFAFB233-063F-42B5-8137-9DF3F51BA10A}">
       <p15:sldGuideLst xmlns:p15="http://schemas.microsoft.com/office/powerpoint/2012/main">
-        <p15:guide id="1" orient="horz" pos="2137" userDrawn="1">
+        <p15:guide id="1" orient="horz" pos="2160" userDrawn="1">
           <p15:clr>
             <a:srgbClr val="A4A3A4"/>
           </p15:clr>
@@ -9969,7 +9971,7 @@
                 <a:latin typeface="Tahoma" pitchFamily="34" charset="0"/>
                 <a:cs typeface="Tahoma" pitchFamily="34" charset="0"/>
               </a:rPr>
-              <a:t> has agreed to accept in-code documentation and grant those marks, but not all of them were given back as of yet (I will talk with my TA or the professor about that soon). Other marks were lost for a lack of modularity, but I recently pointed out to my TA that modularity had not been taught before the D1 submission date. That leaves the code testing, where I performed very poorly due to not having documented my testing sessions. Any testing I perform will be thoroughly documented in some way (e.g. test cases). Besides that, I successfully completed the assignment and do not have any parts of my expert system to modify.</a:t>
+              <a:t> has agreed to accept in-code documentation and grant those marks. Other marks were initially lost for a lack of modularity, but I pointed out to my TA that modularity had not been taught before the D1 submission date. I performed very poorly in testing due to not having documented any of my tests. A major part of my expert system that must change is the lack of interactivity, as brought up to me in the D1 demo feedback. I will thus allow users to interact with my expert system directly through the CLI rather than by expecting them to add or remove facts from the database.</a:t>
             </a:r>
           </a:p>
         </p:txBody>
@@ -10660,6 +10662,162 @@
           </a:p>
         </p:txBody>
       </p:sp>
+      <p:sp>
+        <p:nvSpPr>
+          <p:cNvPr id="3" name="TextBox 2">
+            <a:extLst>
+              <a:ext uri="{FF2B5EF4-FFF2-40B4-BE49-F238E27FC236}">
+                <a16:creationId xmlns:a16="http://schemas.microsoft.com/office/drawing/2014/main" id="{68D39ADB-6086-2F36-C088-2317CD76FD6A}"/>
+              </a:ext>
+            </a:extLst>
+          </p:cNvPr>
+          <p:cNvSpPr txBox="1"/>
+          <p:nvPr/>
+        </p:nvSpPr>
+        <p:spPr>
+          <a:xfrm>
+            <a:off x="303213" y="1050925"/>
+            <a:ext cx="8662987" cy="1754326"/>
+          </a:xfrm>
+          <a:prstGeom prst="rect">
+            <a:avLst/>
+          </a:prstGeom>
+          <a:noFill/>
+        </p:spPr>
+        <p:txBody>
+          <a:bodyPr wrap="square">
+            <a:spAutoFit/>
+          </a:bodyPr>
+          <a:lstStyle/>
+          <a:p>
+            <a:pPr algn="just" eaLnBrk="1">
+              <a:spcAft>
+                <a:spcPct val="0"/>
+              </a:spcAft>
+              <a:buFontTx/>
+              <a:buNone/>
+            </a:pPr>
+            <a:r>
+              <a:rPr lang="en-US" altLang="en-US" sz="1800" dirty="0">
+                <a:solidFill>
+                  <a:srgbClr val="1C1C1C"/>
+                </a:solidFill>
+                <a:latin typeface="Tahoma" pitchFamily="34" charset="0"/>
+                <a:cs typeface="Tahoma" pitchFamily="34" charset="0"/>
+              </a:rPr>
+              <a:t>Certainty Factors were added to each economic indicator. Those that are largely based on measurements (the GDP Deflator, the Unemployment Rate, and the Real GDP Growth Rate) are almost certainly correct (CF 0.8), whereas those that are based on potential or expected values (the Expected Inflation</a:t>
+            </a:r>
+            <a:r>
+              <a:rPr lang="en-US" altLang="en-US" dirty="0">
+                <a:solidFill>
+                  <a:srgbClr val="1C1C1C"/>
+                </a:solidFill>
+                <a:latin typeface="Tahoma" pitchFamily="34" charset="0"/>
+                <a:cs typeface="Tahoma" pitchFamily="34" charset="0"/>
+              </a:rPr>
+              <a:t> and the Potential GDP Growth Rate) are estimated and thus probably (but not certainly) correct. Those are only default values.</a:t>
+            </a:r>
+          </a:p>
+        </p:txBody>
+      </p:sp>
+      <p:pic>
+        <p:nvPicPr>
+          <p:cNvPr id="4" name="Picture 3">
+            <a:extLst>
+              <a:ext uri="{FF2B5EF4-FFF2-40B4-BE49-F238E27FC236}">
+                <a16:creationId xmlns:a16="http://schemas.microsoft.com/office/drawing/2014/main" id="{549897DF-6393-C1F2-0C42-4911E2EA22A3}"/>
+              </a:ext>
+            </a:extLst>
+          </p:cNvPr>
+          <p:cNvPicPr>
+            <a:picLocks noChangeAspect="1"/>
+          </p:cNvPicPr>
+          <p:nvPr/>
+        </p:nvPicPr>
+        <p:blipFill>
+          <a:blip r:embed="rId3"/>
+          <a:stretch>
+            <a:fillRect/>
+          </a:stretch>
+        </p:blipFill>
+        <p:spPr>
+          <a:xfrm>
+            <a:off x="4634706" y="2348111"/>
+            <a:ext cx="4602563" cy="2492830"/>
+          </a:xfrm>
+          <a:prstGeom prst="rect">
+            <a:avLst/>
+          </a:prstGeom>
+        </p:spPr>
+      </p:pic>
+      <p:pic>
+        <p:nvPicPr>
+          <p:cNvPr id="5" name="Picture 4">
+            <a:extLst>
+              <a:ext uri="{FF2B5EF4-FFF2-40B4-BE49-F238E27FC236}">
+                <a16:creationId xmlns:a16="http://schemas.microsoft.com/office/drawing/2014/main" id="{8EC6DCD0-FE9A-0C2B-FE04-0930F073A79E}"/>
+              </a:ext>
+            </a:extLst>
+          </p:cNvPr>
+          <p:cNvPicPr>
+            <a:picLocks noChangeAspect="1"/>
+          </p:cNvPicPr>
+          <p:nvPr/>
+        </p:nvPicPr>
+        <p:blipFill>
+          <a:blip r:embed="rId4"/>
+          <a:stretch>
+            <a:fillRect/>
+          </a:stretch>
+        </p:blipFill>
+        <p:spPr>
+          <a:xfrm>
+            <a:off x="-170330" y="4329748"/>
+            <a:ext cx="6714566" cy="2359033"/>
+          </a:xfrm>
+          <a:prstGeom prst="rect">
+            <a:avLst/>
+          </a:prstGeom>
+        </p:spPr>
+      </p:pic>
+      <p:sp>
+        <p:nvSpPr>
+          <p:cNvPr id="7" name="TextBox 6">
+            <a:extLst>
+              <a:ext uri="{FF2B5EF4-FFF2-40B4-BE49-F238E27FC236}">
+                <a16:creationId xmlns:a16="http://schemas.microsoft.com/office/drawing/2014/main" id="{2828E816-2551-5585-EF72-11A7CDE24AF5}"/>
+              </a:ext>
+            </a:extLst>
+          </p:cNvPr>
+          <p:cNvSpPr txBox="1"/>
+          <p:nvPr/>
+        </p:nvSpPr>
+        <p:spPr>
+          <a:xfrm>
+            <a:off x="303213" y="3105834"/>
+            <a:ext cx="4706470" cy="646331"/>
+          </a:xfrm>
+          <a:prstGeom prst="rect">
+            <a:avLst/>
+          </a:prstGeom>
+          <a:noFill/>
+        </p:spPr>
+        <p:txBody>
+          <a:bodyPr wrap="square">
+            <a:spAutoFit/>
+          </a:bodyPr>
+          <a:lstStyle/>
+          <a:p>
+            <a:r>
+              <a:rPr lang="en-US" dirty="0">
+                <a:hlinkClick r:id="rId5"/>
+              </a:rPr>
+              <a:t>https://github.com/Mikachupichu/central-banking-expert-system/tree/TODO2</a:t>
+            </a:r>
+            <a:endParaRPr lang="en-US" dirty="0"/>
+          </a:p>
+        </p:txBody>
+      </p:sp>
     </p:spTree>
     <p:extLst>
       <p:ext uri="{BB962C8B-B14F-4D97-AF65-F5344CB8AC3E}">
@@ -10682,7 +10840,7 @@
         <p:cNvPr id="1" name="">
           <a:extLst>
             <a:ext uri="{FF2B5EF4-FFF2-40B4-BE49-F238E27FC236}">
-              <a16:creationId xmlns:a16="http://schemas.microsoft.com/office/drawing/2014/main" id="{6FA8E1D0-A4F8-7B9C-3CFB-85346560FA48}"/>
+              <a16:creationId xmlns:a16="http://schemas.microsoft.com/office/drawing/2014/main" id="{7AA24CA9-CE45-E262-195E-AB8E00A10438}"/>
             </a:ext>
           </a:extLst>
         </p:cNvPr>
@@ -10702,7 +10860,7 @@
           <p:cNvPr id="4098" name="object 5">
             <a:extLst>
               <a:ext uri="{FF2B5EF4-FFF2-40B4-BE49-F238E27FC236}">
-                <a16:creationId xmlns:a16="http://schemas.microsoft.com/office/drawing/2014/main" id="{1CDA658B-1B1A-8FC7-724B-EC088FA992A2}"/>
+                <a16:creationId xmlns:a16="http://schemas.microsoft.com/office/drawing/2014/main" id="{50AB2024-B930-6292-267E-030BD2FC1D26}"/>
               </a:ext>
             </a:extLst>
           </p:cNvPr>
@@ -10815,7 +10973,7 @@
           <p:cNvPr id="4100" name="object 7">
             <a:extLst>
               <a:ext uri="{FF2B5EF4-FFF2-40B4-BE49-F238E27FC236}">
-                <a16:creationId xmlns:a16="http://schemas.microsoft.com/office/drawing/2014/main" id="{17686FD2-BE8E-4BE6-ED78-6F2C3B20CC5E}"/>
+                <a16:creationId xmlns:a16="http://schemas.microsoft.com/office/drawing/2014/main" id="{57350CE9-8A83-6208-F2C3-88E936D74B00}"/>
               </a:ext>
             </a:extLst>
           </p:cNvPr>
@@ -11023,7 +11181,7 @@
                 <a:latin typeface="Tahoma" pitchFamily="34" charset="0"/>
                 <a:cs typeface="Tahoma" pitchFamily="34" charset="0"/>
               </a:rPr>
-              <a:t>Possibilistic Uncertainty (TODO 3)</a:t>
+              <a:t>Probabilistic Uncertainty (TODO 2)</a:t>
             </a:r>
             <a:endParaRPr lang="en-US" altLang="en-US" sz="2800" dirty="0">
               <a:solidFill>
@@ -11035,10 +11193,121 @@
           </a:p>
         </p:txBody>
       </p:sp>
+      <p:sp>
+        <p:nvSpPr>
+          <p:cNvPr id="3" name="TextBox 2">
+            <a:extLst>
+              <a:ext uri="{FF2B5EF4-FFF2-40B4-BE49-F238E27FC236}">
+                <a16:creationId xmlns:a16="http://schemas.microsoft.com/office/drawing/2014/main" id="{9A1AED0B-4FEA-6106-FC75-6E38586319AE}"/>
+              </a:ext>
+            </a:extLst>
+          </p:cNvPr>
+          <p:cNvSpPr txBox="1"/>
+          <p:nvPr/>
+        </p:nvSpPr>
+        <p:spPr>
+          <a:xfrm>
+            <a:off x="303213" y="1050925"/>
+            <a:ext cx="8662987" cy="5170646"/>
+          </a:xfrm>
+          <a:prstGeom prst="rect">
+            <a:avLst/>
+          </a:prstGeom>
+          <a:noFill/>
+        </p:spPr>
+        <p:txBody>
+          <a:bodyPr wrap="square">
+            <a:spAutoFit/>
+          </a:bodyPr>
+          <a:lstStyle/>
+          <a:p>
+            <a:pPr algn="just" eaLnBrk="1"/>
+            <a:r>
+              <a:rPr lang="en-US" altLang="en-US" sz="1500" dirty="0">
+                <a:solidFill>
+                  <a:srgbClr val="1C1C1C"/>
+                </a:solidFill>
+                <a:latin typeface="Tahoma" pitchFamily="34" charset="0"/>
+                <a:cs typeface="Tahoma" pitchFamily="34" charset="0"/>
+              </a:rPr>
+              <a:t>Certainty Factors were also added to multiple rules. Inflation classification rules (high-inflation, low-inflation, and ideal-inflation) can be used with confidence. ideal-inflation classification is definitely correct (1.0) because it is purely based on the chosen ideal inflation rate. Whether an inflation rate is too far from the perfect value to be considered too low or too high relies slightly on judgement and situational properties. Thus, high-inflation and low-inflation are almost certainly correct (0.8). The same logic applies for unemployment classification rules (high-unemployment, low-unemployment, and ideal-unemployment, with 0.8, 0.8 and 1.0 respectively).</a:t>
+            </a:r>
+          </a:p>
+          <a:p>
+            <a:pPr algn="just" eaLnBrk="1"/>
+            <a:endParaRPr lang="en-US" altLang="en-US" sz="1500" dirty="0">
+              <a:solidFill>
+                <a:srgbClr val="1C1C1C"/>
+              </a:solidFill>
+              <a:latin typeface="Tahoma" pitchFamily="34" charset="0"/>
+              <a:cs typeface="Tahoma" pitchFamily="34" charset="0"/>
+            </a:endParaRPr>
+          </a:p>
+          <a:p>
+            <a:pPr algn="just" eaLnBrk="1"/>
+            <a:r>
+              <a:rPr lang="en-US" altLang="en-US" sz="1500" dirty="0">
+                <a:solidFill>
+                  <a:srgbClr val="1C1C1C"/>
+                </a:solidFill>
+                <a:latin typeface="Tahoma" pitchFamily="34" charset="0"/>
+                <a:cs typeface="Tahoma" pitchFamily="34" charset="0"/>
+              </a:rPr>
+              <a:t>Output gap rules purely follow a formula (Output Gap = Real GDP Growth Rate – Potential GDP Growth Rate); there is absolutely zero uncertainty about them as long as the inputs are correct. Thus, all output gap rules (positive-output-gap, negative-output-gap, and zero-output-gap) are definitely correct (1.0).</a:t>
+            </a:r>
+          </a:p>
+          <a:p>
+            <a:pPr algn="just" eaLnBrk="1"/>
+            <a:endParaRPr lang="en-US" altLang="en-US" sz="1500" dirty="0">
+              <a:solidFill>
+                <a:srgbClr val="1C1C1C"/>
+              </a:solidFill>
+              <a:latin typeface="Tahoma" pitchFamily="34" charset="0"/>
+              <a:cs typeface="Tahoma" pitchFamily="34" charset="0"/>
+            </a:endParaRPr>
+          </a:p>
+          <a:p>
+            <a:pPr algn="just" eaLnBrk="1"/>
+            <a:r>
+              <a:rPr lang="en-US" altLang="en-US" sz="1500" dirty="0">
+                <a:solidFill>
+                  <a:srgbClr val="1C1C1C"/>
+                </a:solidFill>
+                <a:latin typeface="Tahoma" pitchFamily="34" charset="0"/>
+                <a:cs typeface="Tahoma" pitchFamily="34" charset="0"/>
+              </a:rPr>
+              <a:t>Future inflation estimation rules (high-future-inflation, low-future-inflation, and ideal-future-inflation) are using heuristics to estimate whether future inflation will be high. Thus, they are probable (0.6) or almost certain (0.8; for whether the future inflation is ideal, for the same reason as for inflation and unemployment classification rules).</a:t>
+            </a:r>
+          </a:p>
+          <a:p>
+            <a:pPr algn="just" eaLnBrk="1"/>
+            <a:endParaRPr lang="en-US" altLang="en-US" sz="1500" dirty="0">
+              <a:solidFill>
+                <a:srgbClr val="1C1C1C"/>
+              </a:solidFill>
+              <a:latin typeface="Tahoma" pitchFamily="34" charset="0"/>
+              <a:cs typeface="Tahoma" pitchFamily="34" charset="0"/>
+            </a:endParaRPr>
+          </a:p>
+          <a:p>
+            <a:pPr algn="just" eaLnBrk="1"/>
+            <a:r>
+              <a:rPr lang="en-US" altLang="en-US" sz="1500" dirty="0">
+                <a:solidFill>
+                  <a:srgbClr val="1C1C1C"/>
+                </a:solidFill>
+                <a:latin typeface="Tahoma" pitchFamily="34" charset="0"/>
+                <a:cs typeface="Tahoma" pitchFamily="34" charset="0"/>
+              </a:rPr>
+              <a:t>Lastly, decisions to change the interest rates (increase-interest-rate, lower-interest-rate, and maintain-interest-rate) are principally based on definitive logic (that excessively high inflation warrants rate increases for example) but with a small amount of judgment (to decide how to deal with conflicts between current and future inflation). Thus, they are all almost certain (0.8).</a:t>
+            </a:r>
+          </a:p>
+        </p:txBody>
+      </p:sp>
     </p:spTree>
     <p:extLst>
       <p:ext uri="{BB962C8B-B14F-4D97-AF65-F5344CB8AC3E}">
-        <p14:creationId xmlns:p14="http://schemas.microsoft.com/office/powerpoint/2010/main" val="2463423989"/>
+        <p14:creationId xmlns:p14="http://schemas.microsoft.com/office/powerpoint/2010/main" val="1176370183"/>
       </p:ext>
     </p:extLst>
   </p:cSld>
@@ -11057,7 +11326,7 @@
         <p:cNvPr id="1" name="">
           <a:extLst>
             <a:ext uri="{FF2B5EF4-FFF2-40B4-BE49-F238E27FC236}">
-              <a16:creationId xmlns:a16="http://schemas.microsoft.com/office/drawing/2014/main" id="{0A165520-1FF8-1A85-0108-2FAAE8D71776}"/>
+              <a16:creationId xmlns:a16="http://schemas.microsoft.com/office/drawing/2014/main" id="{27E291A7-234E-2989-0ADF-7D4260EB1FFF}"/>
             </a:ext>
           </a:extLst>
         </p:cNvPr>
@@ -11077,7 +11346,7 @@
           <p:cNvPr id="4098" name="object 5">
             <a:extLst>
               <a:ext uri="{FF2B5EF4-FFF2-40B4-BE49-F238E27FC236}">
-                <a16:creationId xmlns:a16="http://schemas.microsoft.com/office/drawing/2014/main" id="{FBDC4476-F642-A3A8-2C70-4F673BA0ACA6}"/>
+                <a16:creationId xmlns:a16="http://schemas.microsoft.com/office/drawing/2014/main" id="{4407C6E3-7862-8308-54DE-E3F08D03D957}"/>
               </a:ext>
             </a:extLst>
           </p:cNvPr>
@@ -11190,7 +11459,7 @@
           <p:cNvPr id="4100" name="object 7">
             <a:extLst>
               <a:ext uri="{FF2B5EF4-FFF2-40B4-BE49-F238E27FC236}">
-                <a16:creationId xmlns:a16="http://schemas.microsoft.com/office/drawing/2014/main" id="{52399D72-F2F3-0340-5CCC-EAA73C1E5910}"/>
+                <a16:creationId xmlns:a16="http://schemas.microsoft.com/office/drawing/2014/main" id="{19FEF0A6-D8B8-783B-94F2-DB8573960088}"/>
               </a:ext>
             </a:extLst>
           </p:cNvPr>
@@ -11398,6 +11667,840 @@
                 <a:latin typeface="Tahoma" pitchFamily="34" charset="0"/>
                 <a:cs typeface="Tahoma" pitchFamily="34" charset="0"/>
               </a:rPr>
+              <a:t>Probabilistic Uncertainty (TODO 2)</a:t>
+            </a:r>
+            <a:endParaRPr lang="en-US" altLang="en-US" sz="2800" dirty="0">
+              <a:solidFill>
+                <a:srgbClr val="FFFFFF"/>
+              </a:solidFill>
+              <a:latin typeface="Tahoma" pitchFamily="34" charset="0"/>
+              <a:cs typeface="Tahoma" pitchFamily="34" charset="0"/>
+            </a:endParaRPr>
+          </a:p>
+        </p:txBody>
+      </p:sp>
+      <p:sp>
+        <p:nvSpPr>
+          <p:cNvPr id="3" name="TextBox 2">
+            <a:extLst>
+              <a:ext uri="{FF2B5EF4-FFF2-40B4-BE49-F238E27FC236}">
+                <a16:creationId xmlns:a16="http://schemas.microsoft.com/office/drawing/2014/main" id="{2347492B-8C15-D49C-1590-C3B61B64561B}"/>
+              </a:ext>
+            </a:extLst>
+          </p:cNvPr>
+          <p:cNvSpPr txBox="1"/>
+          <p:nvPr/>
+        </p:nvSpPr>
+        <p:spPr>
+          <a:xfrm>
+            <a:off x="303213" y="1050925"/>
+            <a:ext cx="8662987" cy="2031325"/>
+          </a:xfrm>
+          <a:prstGeom prst="rect">
+            <a:avLst/>
+          </a:prstGeom>
+          <a:noFill/>
+        </p:spPr>
+        <p:txBody>
+          <a:bodyPr wrap="square">
+            <a:spAutoFit/>
+          </a:bodyPr>
+          <a:lstStyle/>
+          <a:p>
+            <a:pPr algn="just" eaLnBrk="1"/>
+            <a:r>
+              <a:rPr lang="en-US" altLang="en-US" dirty="0">
+                <a:solidFill>
+                  <a:srgbClr val="1C1C1C"/>
+                </a:solidFill>
+                <a:latin typeface="Tahoma" pitchFamily="34" charset="0"/>
+                <a:cs typeface="Tahoma" pitchFamily="34" charset="0"/>
+              </a:rPr>
+              <a:t>A new rule was added, which identifies stagflation: a major economic crisis caused by a combination of high inflation, high unemployment, and zero or negative real GDP growth. While central banks tend to be squarely focused on inflation, they do step in as lenders of last resort in cases of catastrophic economic crises. Since this rule simply uses a rule of thumb (it is not a mathematical formula) and the degree to which growth has to be low (negative, or around zero) depends on some degree of judgement. Thus, the rule is probable (0.6).</a:t>
+            </a:r>
+          </a:p>
+        </p:txBody>
+      </p:sp>
+    </p:spTree>
+    <p:extLst>
+      <p:ext uri="{BB962C8B-B14F-4D97-AF65-F5344CB8AC3E}">
+        <p14:creationId xmlns:p14="http://schemas.microsoft.com/office/powerpoint/2010/main" val="2971936642"/>
+      </p:ext>
+    </p:extLst>
+  </p:cSld>
+  <p:clrMapOvr>
+    <a:masterClrMapping/>
+  </p:clrMapOvr>
+  <p:transition spd="slow"/>
+</p:sld>
+</file>
+
+<file path=ppt/slides/slide7.xml><?xml version="1.0" encoding="utf-8"?>
+<p:sld xmlns:a="http://schemas.openxmlformats.org/drawingml/2006/main" xmlns:r="http://schemas.openxmlformats.org/officeDocument/2006/relationships" xmlns:p="http://schemas.openxmlformats.org/presentationml/2006/main">
+  <p:cSld>
+    <p:spTree>
+      <p:nvGrpSpPr>
+        <p:cNvPr id="1" name="">
+          <a:extLst>
+            <a:ext uri="{FF2B5EF4-FFF2-40B4-BE49-F238E27FC236}">
+              <a16:creationId xmlns:a16="http://schemas.microsoft.com/office/drawing/2014/main" id="{6FA8E1D0-A4F8-7B9C-3CFB-85346560FA48}"/>
+            </a:ext>
+          </a:extLst>
+        </p:cNvPr>
+        <p:cNvGrpSpPr/>
+        <p:nvPr/>
+      </p:nvGrpSpPr>
+      <p:grpSpPr>
+        <a:xfrm>
+          <a:off x="0" y="0"/>
+          <a:ext cx="0" cy="0"/>
+          <a:chOff x="0" y="0"/>
+          <a:chExt cx="0" cy="0"/>
+        </a:xfrm>
+      </p:grpSpPr>
+      <p:sp>
+        <p:nvSpPr>
+          <p:cNvPr id="4098" name="object 5">
+            <a:extLst>
+              <a:ext uri="{FF2B5EF4-FFF2-40B4-BE49-F238E27FC236}">
+                <a16:creationId xmlns:a16="http://schemas.microsoft.com/office/drawing/2014/main" id="{1CDA658B-1B1A-8FC7-724B-EC088FA992A2}"/>
+              </a:ext>
+            </a:extLst>
+          </p:cNvPr>
+          <p:cNvSpPr>
+            <a:spLocks/>
+          </p:cNvSpPr>
+          <p:nvPr/>
+        </p:nvSpPr>
+        <p:spPr bwMode="auto">
+          <a:xfrm>
+            <a:off x="303213" y="104775"/>
+            <a:ext cx="8662987" cy="812800"/>
+          </a:xfrm>
+          <a:custGeom>
+            <a:avLst/>
+            <a:gdLst>
+              <a:gd name="T0" fmla="*/ 0 w 21600"/>
+              <a:gd name="T1" fmla="*/ 0 h 21600"/>
+              <a:gd name="T2" fmla="*/ 2147483647 w 21600"/>
+              <a:gd name="T3" fmla="*/ 0 h 21600"/>
+              <a:gd name="T4" fmla="*/ 2147483647 w 21600"/>
+              <a:gd name="T5" fmla="*/ 2147483647 h 21600"/>
+              <a:gd name="T6" fmla="*/ 0 w 21600"/>
+              <a:gd name="T7" fmla="*/ 2147483647 h 21600"/>
+              <a:gd name="T8" fmla="*/ 0 w 21600"/>
+              <a:gd name="T9" fmla="*/ 0 h 21600"/>
+              <a:gd name="T10" fmla="*/ 0 60000 65536"/>
+              <a:gd name="T11" fmla="*/ 0 60000 65536"/>
+              <a:gd name="T12" fmla="*/ 0 60000 65536"/>
+              <a:gd name="T13" fmla="*/ 0 60000 65536"/>
+              <a:gd name="T14" fmla="*/ 0 60000 65536"/>
+              <a:gd name="T15" fmla="*/ 0 w 21600"/>
+              <a:gd name="T16" fmla="*/ 0 h 21600"/>
+              <a:gd name="T17" fmla="*/ 21600 w 21600"/>
+              <a:gd name="T18" fmla="*/ 21600 h 21600"/>
+            </a:gdLst>
+            <a:ahLst/>
+            <a:cxnLst>
+              <a:cxn ang="T10">
+                <a:pos x="T0" y="T1"/>
+              </a:cxn>
+              <a:cxn ang="T11">
+                <a:pos x="T2" y="T3"/>
+              </a:cxn>
+              <a:cxn ang="T12">
+                <a:pos x="T4" y="T5"/>
+              </a:cxn>
+              <a:cxn ang="T13">
+                <a:pos x="T6" y="T7"/>
+              </a:cxn>
+              <a:cxn ang="T14">
+                <a:pos x="T8" y="T9"/>
+              </a:cxn>
+            </a:cxnLst>
+            <a:rect l="T15" t="T16" r="T17" b="T18"/>
+            <a:pathLst>
+              <a:path w="21600" h="21600">
+                <a:moveTo>
+                  <a:pt x="0" y="0"/>
+                </a:moveTo>
+                <a:lnTo>
+                  <a:pt x="21600" y="0"/>
+                </a:lnTo>
+                <a:lnTo>
+                  <a:pt x="21600" y="21600"/>
+                </a:lnTo>
+                <a:lnTo>
+                  <a:pt x="0" y="21600"/>
+                </a:lnTo>
+                <a:lnTo>
+                  <a:pt x="0" y="0"/>
+                </a:lnTo>
+                <a:close/>
+              </a:path>
+            </a:pathLst>
+          </a:custGeom>
+          <a:blipFill dpi="0" rotWithShape="1">
+            <a:blip r:embed="rId2"/>
+            <a:srcRect/>
+            <a:stretch>
+              <a:fillRect/>
+            </a:stretch>
+          </a:blipFill>
+          <a:ln>
+            <a:noFill/>
+          </a:ln>
+          <a:extLst>
+            <a:ext uri="{91240B29-F687-4F45-9708-019B960494DF}">
+              <a14:hiddenLine xmlns:a14="http://schemas.microsoft.com/office/drawing/2010/main" w="9525">
+                <a:solidFill>
+                  <a:srgbClr val="000000"/>
+                </a:solidFill>
+                <a:round/>
+                <a:headEnd/>
+                <a:tailEnd/>
+              </a14:hiddenLine>
+            </a:ext>
+          </a:extLst>
+        </p:spPr>
+        <p:txBody>
+          <a:bodyPr lIns="0" tIns="0" rIns="0" bIns="0"/>
+          <a:lstStyle/>
+          <a:p>
+            <a:endParaRPr lang="en-US"/>
+          </a:p>
+        </p:txBody>
+      </p:sp>
+      <p:sp>
+        <p:nvSpPr>
+          <p:cNvPr id="4100" name="object 7">
+            <a:extLst>
+              <a:ext uri="{FF2B5EF4-FFF2-40B4-BE49-F238E27FC236}">
+                <a16:creationId xmlns:a16="http://schemas.microsoft.com/office/drawing/2014/main" id="{17686FD2-BE8E-4BE6-ED78-6F2C3B20CC5E}"/>
+              </a:ext>
+            </a:extLst>
+          </p:cNvPr>
+          <p:cNvSpPr txBox="1">
+            <a:spLocks noChangeArrowheads="1"/>
+          </p:cNvSpPr>
+          <p:nvPr/>
+        </p:nvSpPr>
+        <p:spPr bwMode="auto">
+          <a:xfrm>
+            <a:off x="588963" y="238125"/>
+            <a:ext cx="8091487" cy="553998"/>
+          </a:xfrm>
+          <a:prstGeom prst="rect">
+            <a:avLst/>
+          </a:prstGeom>
+          <a:noFill/>
+          <a:ln>
+            <a:noFill/>
+          </a:ln>
+          <a:extLst>
+            <a:ext uri="{909E8E84-426E-40DD-AFC4-6F175D3DCCD1}">
+              <a14:hiddenFill xmlns:a14="http://schemas.microsoft.com/office/drawing/2010/main">
+                <a:solidFill>
+                  <a:srgbClr val="FFFFFF"/>
+                </a:solidFill>
+              </a14:hiddenFill>
+            </a:ext>
+            <a:ext uri="{91240B29-F687-4F45-9708-019B960494DF}">
+              <a14:hiddenLine xmlns:a14="http://schemas.microsoft.com/office/drawing/2010/main" w="9525">
+                <a:solidFill>
+                  <a:srgbClr val="000000"/>
+                </a:solidFill>
+                <a:miter lim="800000"/>
+                <a:headEnd/>
+                <a:tailEnd/>
+              </a14:hiddenLine>
+            </a:ext>
+          </a:extLst>
+        </p:spPr>
+        <p:txBody>
+          <a:bodyPr lIns="0" tIns="0" rIns="0" bIns="0" anchorCtr="1">
+            <a:spAutoFit/>
+          </a:bodyPr>
+          <a:lstStyle>
+            <a:lvl1pPr marL="11113">
+              <a:spcAft>
+                <a:spcPts val="1413"/>
+              </a:spcAft>
+              <a:buChar char="•"/>
+              <a:defRPr sz="2400">
+                <a:solidFill>
+                  <a:srgbClr val="000000"/>
+                </a:solidFill>
+                <a:latin typeface="Times New Roman" pitchFamily="18" charset="0"/>
+                <a:ea typeface="Microsoft YaHei" pitchFamily="34" charset="-122"/>
+              </a:defRPr>
+            </a:lvl1pPr>
+            <a:lvl2pPr marL="685800" indent="-228600">
+              <a:spcAft>
+                <a:spcPts val="1413"/>
+              </a:spcAft>
+              <a:buSzPct val="75000"/>
+              <a:buFont typeface="StarSymbol"/>
+              <a:buChar char="–"/>
+              <a:defRPr sz="2400">
+                <a:solidFill>
+                  <a:srgbClr val="000000"/>
+                </a:solidFill>
+                <a:latin typeface="Times New Roman" pitchFamily="18" charset="0"/>
+                <a:ea typeface="Microsoft YaHei" pitchFamily="34" charset="-122"/>
+              </a:defRPr>
+            </a:lvl2pPr>
+            <a:lvl3pPr marL="1143000" indent="-228600">
+              <a:spcAft>
+                <a:spcPts val="1413"/>
+              </a:spcAft>
+              <a:buSzPct val="75000"/>
+              <a:buFont typeface="StarSymbol"/>
+              <a:buChar char="●"/>
+              <a:defRPr sz="2400">
+                <a:solidFill>
+                  <a:srgbClr val="000000"/>
+                </a:solidFill>
+                <a:latin typeface="Times New Roman" pitchFamily="18" charset="0"/>
+                <a:ea typeface="Microsoft YaHei" pitchFamily="34" charset="-122"/>
+              </a:defRPr>
+            </a:lvl3pPr>
+            <a:lvl4pPr marL="1600200" indent="-228600">
+              <a:spcAft>
+                <a:spcPts val="1413"/>
+              </a:spcAft>
+              <a:buSzPct val="75000"/>
+              <a:buFont typeface="StarSymbol"/>
+              <a:buChar char="–"/>
+              <a:defRPr sz="2400">
+                <a:solidFill>
+                  <a:srgbClr val="000000"/>
+                </a:solidFill>
+                <a:latin typeface="Times New Roman" pitchFamily="18" charset="0"/>
+                <a:ea typeface="Microsoft YaHei" pitchFamily="34" charset="-122"/>
+              </a:defRPr>
+            </a:lvl4pPr>
+            <a:lvl5pPr marL="2057400" indent="-228600">
+              <a:spcAft>
+                <a:spcPts val="1413"/>
+              </a:spcAft>
+              <a:buSzPct val="75000"/>
+              <a:buFont typeface="StarSymbol"/>
+              <a:buChar char="●"/>
+              <a:defRPr sz="2400">
+                <a:solidFill>
+                  <a:srgbClr val="000000"/>
+                </a:solidFill>
+                <a:latin typeface="Times New Roman" pitchFamily="18" charset="0"/>
+                <a:ea typeface="Microsoft YaHei" pitchFamily="34" charset="-122"/>
+              </a:defRPr>
+            </a:lvl5pPr>
+            <a:lvl6pPr marL="2514600" indent="-228600" eaLnBrk="0" fontAlgn="base" hangingPunct="0">
+              <a:spcBef>
+                <a:spcPct val="0"/>
+              </a:spcBef>
+              <a:spcAft>
+                <a:spcPts val="1413"/>
+              </a:spcAft>
+              <a:buSzPct val="75000"/>
+              <a:buFont typeface="StarSymbol"/>
+              <a:buChar char="●"/>
+              <a:defRPr sz="2400">
+                <a:solidFill>
+                  <a:srgbClr val="000000"/>
+                </a:solidFill>
+                <a:latin typeface="Times New Roman" pitchFamily="18" charset="0"/>
+                <a:ea typeface="Microsoft YaHei" pitchFamily="34" charset="-122"/>
+              </a:defRPr>
+            </a:lvl6pPr>
+            <a:lvl7pPr marL="2971800" indent="-228600" eaLnBrk="0" fontAlgn="base" hangingPunct="0">
+              <a:spcBef>
+                <a:spcPct val="0"/>
+              </a:spcBef>
+              <a:spcAft>
+                <a:spcPts val="1413"/>
+              </a:spcAft>
+              <a:buSzPct val="75000"/>
+              <a:buFont typeface="StarSymbol"/>
+              <a:buChar char="●"/>
+              <a:defRPr sz="2400">
+                <a:solidFill>
+                  <a:srgbClr val="000000"/>
+                </a:solidFill>
+                <a:latin typeface="Times New Roman" pitchFamily="18" charset="0"/>
+                <a:ea typeface="Microsoft YaHei" pitchFamily="34" charset="-122"/>
+              </a:defRPr>
+            </a:lvl7pPr>
+            <a:lvl8pPr marL="3429000" indent="-228600" eaLnBrk="0" fontAlgn="base" hangingPunct="0">
+              <a:spcBef>
+                <a:spcPct val="0"/>
+              </a:spcBef>
+              <a:spcAft>
+                <a:spcPts val="1413"/>
+              </a:spcAft>
+              <a:buSzPct val="75000"/>
+              <a:buFont typeface="StarSymbol"/>
+              <a:buChar char="●"/>
+              <a:defRPr sz="2400">
+                <a:solidFill>
+                  <a:srgbClr val="000000"/>
+                </a:solidFill>
+                <a:latin typeface="Times New Roman" pitchFamily="18" charset="0"/>
+                <a:ea typeface="Microsoft YaHei" pitchFamily="34" charset="-122"/>
+              </a:defRPr>
+            </a:lvl8pPr>
+            <a:lvl9pPr marL="3886200" indent="-228600" eaLnBrk="0" fontAlgn="base" hangingPunct="0">
+              <a:spcBef>
+                <a:spcPct val="0"/>
+              </a:spcBef>
+              <a:spcAft>
+                <a:spcPts val="1413"/>
+              </a:spcAft>
+              <a:buSzPct val="75000"/>
+              <a:buFont typeface="StarSymbol"/>
+              <a:buChar char="●"/>
+              <a:defRPr sz="2400">
+                <a:solidFill>
+                  <a:srgbClr val="000000"/>
+                </a:solidFill>
+                <a:latin typeface="Times New Roman" pitchFamily="18" charset="0"/>
+                <a:ea typeface="Microsoft YaHei" pitchFamily="34" charset="-122"/>
+              </a:defRPr>
+            </a:lvl9pPr>
+          </a:lstStyle>
+          <a:p>
+            <a:pPr algn="ctr" eaLnBrk="1">
+              <a:spcAft>
+                <a:spcPct val="0"/>
+              </a:spcAft>
+              <a:buFontTx/>
+              <a:buNone/>
+            </a:pPr>
+            <a:r>
+              <a:rPr lang="en-US" altLang="en-US" sz="3600" dirty="0">
+                <a:solidFill>
+                  <a:srgbClr val="FFFFFF"/>
+                </a:solidFill>
+                <a:latin typeface="Tahoma" pitchFamily="34" charset="0"/>
+                <a:cs typeface="Tahoma" pitchFamily="34" charset="0"/>
+              </a:rPr>
+              <a:t>Possibilistic Uncertainty (TODO 3)</a:t>
+            </a:r>
+            <a:endParaRPr lang="en-US" altLang="en-US" sz="2800" dirty="0">
+              <a:solidFill>
+                <a:srgbClr val="FFFFFF"/>
+              </a:solidFill>
+              <a:latin typeface="Tahoma" pitchFamily="34" charset="0"/>
+              <a:cs typeface="Tahoma" pitchFamily="34" charset="0"/>
+            </a:endParaRPr>
+          </a:p>
+        </p:txBody>
+      </p:sp>
+      <p:sp>
+        <p:nvSpPr>
+          <p:cNvPr id="6" name="TextBox 5">
+            <a:extLst>
+              <a:ext uri="{FF2B5EF4-FFF2-40B4-BE49-F238E27FC236}">
+                <a16:creationId xmlns:a16="http://schemas.microsoft.com/office/drawing/2014/main" id="{90224D56-B61A-9C64-19C0-39283CD67E60}"/>
+              </a:ext>
+            </a:extLst>
+          </p:cNvPr>
+          <p:cNvSpPr txBox="1"/>
+          <p:nvPr/>
+        </p:nvSpPr>
+        <p:spPr>
+          <a:xfrm>
+            <a:off x="303213" y="1050925"/>
+            <a:ext cx="8662987" cy="3416320"/>
+          </a:xfrm>
+          <a:prstGeom prst="rect">
+            <a:avLst/>
+          </a:prstGeom>
+          <a:noFill/>
+        </p:spPr>
+        <p:txBody>
+          <a:bodyPr wrap="square">
+            <a:spAutoFit/>
+          </a:bodyPr>
+          <a:lstStyle/>
+          <a:p>
+            <a:pPr algn="just" eaLnBrk="1"/>
+            <a:r>
+              <a:rPr lang="en-US" altLang="en-US" dirty="0">
+                <a:solidFill>
+                  <a:srgbClr val="1C1C1C"/>
+                </a:solidFill>
+                <a:latin typeface="Tahoma" pitchFamily="34" charset="0"/>
+                <a:cs typeface="Tahoma" pitchFamily="34" charset="0"/>
+              </a:rPr>
+              <a:t>Indicators were replaced by standalone fuzzy facts (with their own templates), each with a fuzzy membership function. Fuzziness values were also assigned, in addition to certainty factors. Changes in inflation, real GDP growth rates and unemployment are significant, even minimal ones. Thus, small fuzziness values of 0.1, 0.1 and 0.2 were respectively assigned. Potential GDP growth rate is more conceptual and thus matters a bit less strictly, and expected inflation is obtained from consumer sentiment, which is a bit of a loose indicator. Both received fuzziness values of 0.3. Almost every rule had to be modified or replaced to accommodate the use of fuzzy facts. Some rules were completely deleted: they tried to categorize number values into linguistic ones, which was redundant (fuzzy facts do this automatically). The latter considerably improved interest rate decisions, which are based on multiple input factors that may be contradicting one another.</a:t>
+            </a:r>
+          </a:p>
+        </p:txBody>
+      </p:sp>
+    </p:spTree>
+    <p:extLst>
+      <p:ext uri="{BB962C8B-B14F-4D97-AF65-F5344CB8AC3E}">
+        <p14:creationId xmlns:p14="http://schemas.microsoft.com/office/powerpoint/2010/main" val="2463423989"/>
+      </p:ext>
+    </p:extLst>
+  </p:cSld>
+  <p:clrMapOvr>
+    <a:masterClrMapping/>
+  </p:clrMapOvr>
+  <p:transition spd="slow"/>
+</p:sld>
+</file>
+
+<file path=ppt/slides/slide8.xml><?xml version="1.0" encoding="utf-8"?>
+<p:sld xmlns:a="http://schemas.openxmlformats.org/drawingml/2006/main" xmlns:r="http://schemas.openxmlformats.org/officeDocument/2006/relationships" xmlns:p="http://schemas.openxmlformats.org/presentationml/2006/main">
+  <p:cSld>
+    <p:spTree>
+      <p:nvGrpSpPr>
+        <p:cNvPr id="1" name="">
+          <a:extLst>
+            <a:ext uri="{FF2B5EF4-FFF2-40B4-BE49-F238E27FC236}">
+              <a16:creationId xmlns:a16="http://schemas.microsoft.com/office/drawing/2014/main" id="{0A165520-1FF8-1A85-0108-2FAAE8D71776}"/>
+            </a:ext>
+          </a:extLst>
+        </p:cNvPr>
+        <p:cNvGrpSpPr/>
+        <p:nvPr/>
+      </p:nvGrpSpPr>
+      <p:grpSpPr>
+        <a:xfrm>
+          <a:off x="0" y="0"/>
+          <a:ext cx="0" cy="0"/>
+          <a:chOff x="0" y="0"/>
+          <a:chExt cx="0" cy="0"/>
+        </a:xfrm>
+      </p:grpSpPr>
+      <p:sp>
+        <p:nvSpPr>
+          <p:cNvPr id="4098" name="object 5">
+            <a:extLst>
+              <a:ext uri="{FF2B5EF4-FFF2-40B4-BE49-F238E27FC236}">
+                <a16:creationId xmlns:a16="http://schemas.microsoft.com/office/drawing/2014/main" id="{FBDC4476-F642-A3A8-2C70-4F673BA0ACA6}"/>
+              </a:ext>
+            </a:extLst>
+          </p:cNvPr>
+          <p:cNvSpPr>
+            <a:spLocks/>
+          </p:cNvSpPr>
+          <p:nvPr/>
+        </p:nvSpPr>
+        <p:spPr bwMode="auto">
+          <a:xfrm>
+            <a:off x="303213" y="104775"/>
+            <a:ext cx="8662987" cy="812800"/>
+          </a:xfrm>
+          <a:custGeom>
+            <a:avLst/>
+            <a:gdLst>
+              <a:gd name="T0" fmla="*/ 0 w 21600"/>
+              <a:gd name="T1" fmla="*/ 0 h 21600"/>
+              <a:gd name="T2" fmla="*/ 2147483647 w 21600"/>
+              <a:gd name="T3" fmla="*/ 0 h 21600"/>
+              <a:gd name="T4" fmla="*/ 2147483647 w 21600"/>
+              <a:gd name="T5" fmla="*/ 2147483647 h 21600"/>
+              <a:gd name="T6" fmla="*/ 0 w 21600"/>
+              <a:gd name="T7" fmla="*/ 2147483647 h 21600"/>
+              <a:gd name="T8" fmla="*/ 0 w 21600"/>
+              <a:gd name="T9" fmla="*/ 0 h 21600"/>
+              <a:gd name="T10" fmla="*/ 0 60000 65536"/>
+              <a:gd name="T11" fmla="*/ 0 60000 65536"/>
+              <a:gd name="T12" fmla="*/ 0 60000 65536"/>
+              <a:gd name="T13" fmla="*/ 0 60000 65536"/>
+              <a:gd name="T14" fmla="*/ 0 60000 65536"/>
+              <a:gd name="T15" fmla="*/ 0 w 21600"/>
+              <a:gd name="T16" fmla="*/ 0 h 21600"/>
+              <a:gd name="T17" fmla="*/ 21600 w 21600"/>
+              <a:gd name="T18" fmla="*/ 21600 h 21600"/>
+            </a:gdLst>
+            <a:ahLst/>
+            <a:cxnLst>
+              <a:cxn ang="T10">
+                <a:pos x="T0" y="T1"/>
+              </a:cxn>
+              <a:cxn ang="T11">
+                <a:pos x="T2" y="T3"/>
+              </a:cxn>
+              <a:cxn ang="T12">
+                <a:pos x="T4" y="T5"/>
+              </a:cxn>
+              <a:cxn ang="T13">
+                <a:pos x="T6" y="T7"/>
+              </a:cxn>
+              <a:cxn ang="T14">
+                <a:pos x="T8" y="T9"/>
+              </a:cxn>
+            </a:cxnLst>
+            <a:rect l="T15" t="T16" r="T17" b="T18"/>
+            <a:pathLst>
+              <a:path w="21600" h="21600">
+                <a:moveTo>
+                  <a:pt x="0" y="0"/>
+                </a:moveTo>
+                <a:lnTo>
+                  <a:pt x="21600" y="0"/>
+                </a:lnTo>
+                <a:lnTo>
+                  <a:pt x="21600" y="21600"/>
+                </a:lnTo>
+                <a:lnTo>
+                  <a:pt x="0" y="21600"/>
+                </a:lnTo>
+                <a:lnTo>
+                  <a:pt x="0" y="0"/>
+                </a:lnTo>
+                <a:close/>
+              </a:path>
+            </a:pathLst>
+          </a:custGeom>
+          <a:blipFill dpi="0" rotWithShape="1">
+            <a:blip r:embed="rId2"/>
+            <a:srcRect/>
+            <a:stretch>
+              <a:fillRect/>
+            </a:stretch>
+          </a:blipFill>
+          <a:ln>
+            <a:noFill/>
+          </a:ln>
+          <a:extLst>
+            <a:ext uri="{91240B29-F687-4F45-9708-019B960494DF}">
+              <a14:hiddenLine xmlns:a14="http://schemas.microsoft.com/office/drawing/2010/main" w="9525">
+                <a:solidFill>
+                  <a:srgbClr val="000000"/>
+                </a:solidFill>
+                <a:round/>
+                <a:headEnd/>
+                <a:tailEnd/>
+              </a14:hiddenLine>
+            </a:ext>
+          </a:extLst>
+        </p:spPr>
+        <p:txBody>
+          <a:bodyPr lIns="0" tIns="0" rIns="0" bIns="0"/>
+          <a:lstStyle/>
+          <a:p>
+            <a:endParaRPr lang="en-US"/>
+          </a:p>
+        </p:txBody>
+      </p:sp>
+      <p:sp>
+        <p:nvSpPr>
+          <p:cNvPr id="4100" name="object 7">
+            <a:extLst>
+              <a:ext uri="{FF2B5EF4-FFF2-40B4-BE49-F238E27FC236}">
+                <a16:creationId xmlns:a16="http://schemas.microsoft.com/office/drawing/2014/main" id="{52399D72-F2F3-0340-5CCC-EAA73C1E5910}"/>
+              </a:ext>
+            </a:extLst>
+          </p:cNvPr>
+          <p:cNvSpPr txBox="1">
+            <a:spLocks noChangeArrowheads="1"/>
+          </p:cNvSpPr>
+          <p:nvPr/>
+        </p:nvSpPr>
+        <p:spPr bwMode="auto">
+          <a:xfrm>
+            <a:off x="588963" y="238125"/>
+            <a:ext cx="8091487" cy="553998"/>
+          </a:xfrm>
+          <a:prstGeom prst="rect">
+            <a:avLst/>
+          </a:prstGeom>
+          <a:noFill/>
+          <a:ln>
+            <a:noFill/>
+          </a:ln>
+          <a:extLst>
+            <a:ext uri="{909E8E84-426E-40DD-AFC4-6F175D3DCCD1}">
+              <a14:hiddenFill xmlns:a14="http://schemas.microsoft.com/office/drawing/2010/main">
+                <a:solidFill>
+                  <a:srgbClr val="FFFFFF"/>
+                </a:solidFill>
+              </a14:hiddenFill>
+            </a:ext>
+            <a:ext uri="{91240B29-F687-4F45-9708-019B960494DF}">
+              <a14:hiddenLine xmlns:a14="http://schemas.microsoft.com/office/drawing/2010/main" w="9525">
+                <a:solidFill>
+                  <a:srgbClr val="000000"/>
+                </a:solidFill>
+                <a:miter lim="800000"/>
+                <a:headEnd/>
+                <a:tailEnd/>
+              </a14:hiddenLine>
+            </a:ext>
+          </a:extLst>
+        </p:spPr>
+        <p:txBody>
+          <a:bodyPr lIns="0" tIns="0" rIns="0" bIns="0" anchorCtr="1">
+            <a:spAutoFit/>
+          </a:bodyPr>
+          <a:lstStyle>
+            <a:lvl1pPr marL="11113">
+              <a:spcAft>
+                <a:spcPts val="1413"/>
+              </a:spcAft>
+              <a:buChar char="•"/>
+              <a:defRPr sz="2400">
+                <a:solidFill>
+                  <a:srgbClr val="000000"/>
+                </a:solidFill>
+                <a:latin typeface="Times New Roman" pitchFamily="18" charset="0"/>
+                <a:ea typeface="Microsoft YaHei" pitchFamily="34" charset="-122"/>
+              </a:defRPr>
+            </a:lvl1pPr>
+            <a:lvl2pPr marL="685800" indent="-228600">
+              <a:spcAft>
+                <a:spcPts val="1413"/>
+              </a:spcAft>
+              <a:buSzPct val="75000"/>
+              <a:buFont typeface="StarSymbol"/>
+              <a:buChar char="–"/>
+              <a:defRPr sz="2400">
+                <a:solidFill>
+                  <a:srgbClr val="000000"/>
+                </a:solidFill>
+                <a:latin typeface="Times New Roman" pitchFamily="18" charset="0"/>
+                <a:ea typeface="Microsoft YaHei" pitchFamily="34" charset="-122"/>
+              </a:defRPr>
+            </a:lvl2pPr>
+            <a:lvl3pPr marL="1143000" indent="-228600">
+              <a:spcAft>
+                <a:spcPts val="1413"/>
+              </a:spcAft>
+              <a:buSzPct val="75000"/>
+              <a:buFont typeface="StarSymbol"/>
+              <a:buChar char="●"/>
+              <a:defRPr sz="2400">
+                <a:solidFill>
+                  <a:srgbClr val="000000"/>
+                </a:solidFill>
+                <a:latin typeface="Times New Roman" pitchFamily="18" charset="0"/>
+                <a:ea typeface="Microsoft YaHei" pitchFamily="34" charset="-122"/>
+              </a:defRPr>
+            </a:lvl3pPr>
+            <a:lvl4pPr marL="1600200" indent="-228600">
+              <a:spcAft>
+                <a:spcPts val="1413"/>
+              </a:spcAft>
+              <a:buSzPct val="75000"/>
+              <a:buFont typeface="StarSymbol"/>
+              <a:buChar char="–"/>
+              <a:defRPr sz="2400">
+                <a:solidFill>
+                  <a:srgbClr val="000000"/>
+                </a:solidFill>
+                <a:latin typeface="Times New Roman" pitchFamily="18" charset="0"/>
+                <a:ea typeface="Microsoft YaHei" pitchFamily="34" charset="-122"/>
+              </a:defRPr>
+            </a:lvl4pPr>
+            <a:lvl5pPr marL="2057400" indent="-228600">
+              <a:spcAft>
+                <a:spcPts val="1413"/>
+              </a:spcAft>
+              <a:buSzPct val="75000"/>
+              <a:buFont typeface="StarSymbol"/>
+              <a:buChar char="●"/>
+              <a:defRPr sz="2400">
+                <a:solidFill>
+                  <a:srgbClr val="000000"/>
+                </a:solidFill>
+                <a:latin typeface="Times New Roman" pitchFamily="18" charset="0"/>
+                <a:ea typeface="Microsoft YaHei" pitchFamily="34" charset="-122"/>
+              </a:defRPr>
+            </a:lvl5pPr>
+            <a:lvl6pPr marL="2514600" indent="-228600" eaLnBrk="0" fontAlgn="base" hangingPunct="0">
+              <a:spcBef>
+                <a:spcPct val="0"/>
+              </a:spcBef>
+              <a:spcAft>
+                <a:spcPts val="1413"/>
+              </a:spcAft>
+              <a:buSzPct val="75000"/>
+              <a:buFont typeface="StarSymbol"/>
+              <a:buChar char="●"/>
+              <a:defRPr sz="2400">
+                <a:solidFill>
+                  <a:srgbClr val="000000"/>
+                </a:solidFill>
+                <a:latin typeface="Times New Roman" pitchFamily="18" charset="0"/>
+                <a:ea typeface="Microsoft YaHei" pitchFamily="34" charset="-122"/>
+              </a:defRPr>
+            </a:lvl6pPr>
+            <a:lvl7pPr marL="2971800" indent="-228600" eaLnBrk="0" fontAlgn="base" hangingPunct="0">
+              <a:spcBef>
+                <a:spcPct val="0"/>
+              </a:spcBef>
+              <a:spcAft>
+                <a:spcPts val="1413"/>
+              </a:spcAft>
+              <a:buSzPct val="75000"/>
+              <a:buFont typeface="StarSymbol"/>
+              <a:buChar char="●"/>
+              <a:defRPr sz="2400">
+                <a:solidFill>
+                  <a:srgbClr val="000000"/>
+                </a:solidFill>
+                <a:latin typeface="Times New Roman" pitchFamily="18" charset="0"/>
+                <a:ea typeface="Microsoft YaHei" pitchFamily="34" charset="-122"/>
+              </a:defRPr>
+            </a:lvl7pPr>
+            <a:lvl8pPr marL="3429000" indent="-228600" eaLnBrk="0" fontAlgn="base" hangingPunct="0">
+              <a:spcBef>
+                <a:spcPct val="0"/>
+              </a:spcBef>
+              <a:spcAft>
+                <a:spcPts val="1413"/>
+              </a:spcAft>
+              <a:buSzPct val="75000"/>
+              <a:buFont typeface="StarSymbol"/>
+              <a:buChar char="●"/>
+              <a:defRPr sz="2400">
+                <a:solidFill>
+                  <a:srgbClr val="000000"/>
+                </a:solidFill>
+                <a:latin typeface="Times New Roman" pitchFamily="18" charset="0"/>
+                <a:ea typeface="Microsoft YaHei" pitchFamily="34" charset="-122"/>
+              </a:defRPr>
+            </a:lvl8pPr>
+            <a:lvl9pPr marL="3886200" indent="-228600" eaLnBrk="0" fontAlgn="base" hangingPunct="0">
+              <a:spcBef>
+                <a:spcPct val="0"/>
+              </a:spcBef>
+              <a:spcAft>
+                <a:spcPts val="1413"/>
+              </a:spcAft>
+              <a:buSzPct val="75000"/>
+              <a:buFont typeface="StarSymbol"/>
+              <a:buChar char="●"/>
+              <a:defRPr sz="2400">
+                <a:solidFill>
+                  <a:srgbClr val="000000"/>
+                </a:solidFill>
+                <a:latin typeface="Times New Roman" pitchFamily="18" charset="0"/>
+                <a:ea typeface="Microsoft YaHei" pitchFamily="34" charset="-122"/>
+              </a:defRPr>
+            </a:lvl9pPr>
+          </a:lstStyle>
+          <a:p>
+            <a:pPr algn="ctr" eaLnBrk="1">
+              <a:spcAft>
+                <a:spcPct val="0"/>
+              </a:spcAft>
+              <a:buFontTx/>
+              <a:buNone/>
+            </a:pPr>
+            <a:r>
+              <a:rPr lang="en-US" altLang="en-US" sz="3600" dirty="0">
+                <a:solidFill>
+                  <a:srgbClr val="FFFFFF"/>
+                </a:solidFill>
+                <a:latin typeface="Tahoma" pitchFamily="34" charset="0"/>
+                <a:cs typeface="Tahoma" pitchFamily="34" charset="0"/>
+              </a:rPr>
               <a:t>Quality Attributes (TODO 4)</a:t>
             </a:r>
             <a:endParaRPr lang="en-US" altLang="en-US" sz="2800" dirty="0">
@@ -11424,7 +12527,7 @@
 </p:sld>
 </file>
 
-<file path=ppt/slides/slide7.xml><?xml version="1.0" encoding="utf-8"?>
+<file path=ppt/slides/slide9.xml><?xml version="1.0" encoding="utf-8"?>
 <p:sld xmlns:a="http://schemas.openxmlformats.org/drawingml/2006/main" xmlns:r="http://schemas.openxmlformats.org/officeDocument/2006/relationships" xmlns:p="http://schemas.openxmlformats.org/presentationml/2006/main">
   <p:cSld>
     <p:spTree>

--- a/A-D2.pptx
+++ b/A-D2.pptx
@@ -6,7 +6,7 @@
     <p:sldMasterId id="2147483660" r:id="rId2"/>
   </p:sldMasterIdLst>
   <p:notesMasterIdLst>
-    <p:notesMasterId r:id="rId12"/>
+    <p:notesMasterId r:id="rId13"/>
   </p:notesMasterIdLst>
   <p:sldIdLst>
     <p:sldId id="273" r:id="rId3"/>
@@ -17,7 +17,8 @@
     <p:sldId id="293" r:id="rId8"/>
     <p:sldId id="289" r:id="rId9"/>
     <p:sldId id="291" r:id="rId10"/>
-    <p:sldId id="286" r:id="rId11"/>
+    <p:sldId id="294" r:id="rId11"/>
+    <p:sldId id="286" r:id="rId12"/>
   </p:sldIdLst>
   <p:sldSz cx="9144000" cy="6858000" type="screen4x3"/>
   <p:notesSz cx="7772400" cy="10058400"/>
@@ -8952,7 +8953,7 @@
 </p:sld>
 </file>
 
-<file path=ppt/slides/slide2.xml><?xml version="1.0" encoding="utf-8"?>
+<file path=ppt/slides/slide10.xml><?xml version="1.0" encoding="utf-8"?>
 <p:sld xmlns:a="http://schemas.openxmlformats.org/drawingml/2006/main" xmlns:r="http://schemas.openxmlformats.org/officeDocument/2006/relationships" xmlns:p="http://schemas.openxmlformats.org/presentationml/2006/main">
   <p:cSld>
     <p:spTree>
@@ -8971,7 +8972,7 @@
       </p:grpSpPr>
       <p:sp>
         <p:nvSpPr>
-          <p:cNvPr id="4098" name="object 5"/>
+          <p:cNvPr id="5122" name="object 5"/>
           <p:cNvSpPr>
             <a:spLocks/>
           </p:cNvSpPr>
@@ -9087,7 +9088,7 @@
         <p:spPr bwMode="auto">
           <a:xfrm>
             <a:off x="303213" y="1336675"/>
-            <a:ext cx="8662987" cy="398463"/>
+            <a:ext cx="8662987" cy="1014203"/>
           </a:xfrm>
           <a:prstGeom prst="rect">
             <a:avLst/>
@@ -9276,14 +9277,778 @@
               <a:buNone/>
             </a:pPr>
             <a:r>
-              <a:rPr lang="en-US" altLang="en-US" sz="2000">
+              <a:rPr lang="en-US" altLang="en-US" sz="2000" dirty="0">
                 <a:solidFill>
                   <a:srgbClr val="1C1C1C"/>
                 </a:solidFill>
                 <a:latin typeface="Tahoma" pitchFamily="34" charset="0"/>
                 <a:cs typeface="Tahoma" pitchFamily="34" charset="0"/>
               </a:rPr>
-              <a:t>Add Items</a:t>
+              <a:t>In conclusion, the central banking expert system was improved significantly by including certainty factors and fuzziness, as well as by supporting various quality attributes.</a:t>
+            </a:r>
+          </a:p>
+        </p:txBody>
+      </p:sp>
+      <p:sp>
+        <p:nvSpPr>
+          <p:cNvPr id="5124" name="object 7"/>
+          <p:cNvSpPr txBox="1">
+            <a:spLocks noChangeArrowheads="1"/>
+          </p:cNvSpPr>
+          <p:nvPr/>
+        </p:nvSpPr>
+        <p:spPr bwMode="auto">
+          <a:xfrm>
+            <a:off x="588963" y="238125"/>
+            <a:ext cx="8091487" cy="554038"/>
+          </a:xfrm>
+          <a:prstGeom prst="rect">
+            <a:avLst/>
+          </a:prstGeom>
+          <a:noFill/>
+          <a:ln>
+            <a:noFill/>
+          </a:ln>
+          <a:extLst>
+            <a:ext uri="{909E8E84-426E-40DD-AFC4-6F175D3DCCD1}">
+              <a14:hiddenFill xmlns:a14="http://schemas.microsoft.com/office/drawing/2010/main">
+                <a:solidFill>
+                  <a:srgbClr val="FFFFFF"/>
+                </a:solidFill>
+              </a14:hiddenFill>
+            </a:ext>
+            <a:ext uri="{91240B29-F687-4F45-9708-019B960494DF}">
+              <a14:hiddenLine xmlns:a14="http://schemas.microsoft.com/office/drawing/2010/main" w="9525">
+                <a:solidFill>
+                  <a:srgbClr val="000000"/>
+                </a:solidFill>
+                <a:miter lim="800000"/>
+                <a:headEnd/>
+                <a:tailEnd/>
+              </a14:hiddenLine>
+            </a:ext>
+          </a:extLst>
+        </p:spPr>
+        <p:txBody>
+          <a:bodyPr lIns="0" tIns="0" rIns="0" bIns="0" anchorCtr="1">
+            <a:spAutoFit/>
+          </a:bodyPr>
+          <a:lstStyle>
+            <a:lvl1pPr marL="11113">
+              <a:spcAft>
+                <a:spcPts val="1413"/>
+              </a:spcAft>
+              <a:buChar char="•"/>
+              <a:defRPr sz="2400">
+                <a:solidFill>
+                  <a:srgbClr val="000000"/>
+                </a:solidFill>
+                <a:latin typeface="Times New Roman" pitchFamily="18" charset="0"/>
+                <a:ea typeface="Microsoft YaHei" pitchFamily="34" charset="-122"/>
+              </a:defRPr>
+            </a:lvl1pPr>
+            <a:lvl2pPr marL="685800" indent="-228600">
+              <a:spcAft>
+                <a:spcPts val="1413"/>
+              </a:spcAft>
+              <a:buSzPct val="75000"/>
+              <a:buFont typeface="StarSymbol"/>
+              <a:buChar char="–"/>
+              <a:defRPr sz="2400">
+                <a:solidFill>
+                  <a:srgbClr val="000000"/>
+                </a:solidFill>
+                <a:latin typeface="Times New Roman" pitchFamily="18" charset="0"/>
+                <a:ea typeface="Microsoft YaHei" pitchFamily="34" charset="-122"/>
+              </a:defRPr>
+            </a:lvl2pPr>
+            <a:lvl3pPr marL="1143000" indent="-228600">
+              <a:spcAft>
+                <a:spcPts val="1413"/>
+              </a:spcAft>
+              <a:buSzPct val="75000"/>
+              <a:buFont typeface="StarSymbol"/>
+              <a:buChar char="●"/>
+              <a:defRPr sz="2400">
+                <a:solidFill>
+                  <a:srgbClr val="000000"/>
+                </a:solidFill>
+                <a:latin typeface="Times New Roman" pitchFamily="18" charset="0"/>
+                <a:ea typeface="Microsoft YaHei" pitchFamily="34" charset="-122"/>
+              </a:defRPr>
+            </a:lvl3pPr>
+            <a:lvl4pPr marL="1600200" indent="-228600">
+              <a:spcAft>
+                <a:spcPts val="1413"/>
+              </a:spcAft>
+              <a:buSzPct val="75000"/>
+              <a:buFont typeface="StarSymbol"/>
+              <a:buChar char="–"/>
+              <a:defRPr sz="2400">
+                <a:solidFill>
+                  <a:srgbClr val="000000"/>
+                </a:solidFill>
+                <a:latin typeface="Times New Roman" pitchFamily="18" charset="0"/>
+                <a:ea typeface="Microsoft YaHei" pitchFamily="34" charset="-122"/>
+              </a:defRPr>
+            </a:lvl4pPr>
+            <a:lvl5pPr marL="2057400" indent="-228600">
+              <a:spcAft>
+                <a:spcPts val="1413"/>
+              </a:spcAft>
+              <a:buSzPct val="75000"/>
+              <a:buFont typeface="StarSymbol"/>
+              <a:buChar char="●"/>
+              <a:defRPr sz="2400">
+                <a:solidFill>
+                  <a:srgbClr val="000000"/>
+                </a:solidFill>
+                <a:latin typeface="Times New Roman" pitchFamily="18" charset="0"/>
+                <a:ea typeface="Microsoft YaHei" pitchFamily="34" charset="-122"/>
+              </a:defRPr>
+            </a:lvl5pPr>
+            <a:lvl6pPr marL="2514600" indent="-228600" eaLnBrk="0" fontAlgn="base" hangingPunct="0">
+              <a:spcBef>
+                <a:spcPct val="0"/>
+              </a:spcBef>
+              <a:spcAft>
+                <a:spcPts val="1413"/>
+              </a:spcAft>
+              <a:buSzPct val="75000"/>
+              <a:buFont typeface="StarSymbol"/>
+              <a:buChar char="●"/>
+              <a:defRPr sz="2400">
+                <a:solidFill>
+                  <a:srgbClr val="000000"/>
+                </a:solidFill>
+                <a:latin typeface="Times New Roman" pitchFamily="18" charset="0"/>
+                <a:ea typeface="Microsoft YaHei" pitchFamily="34" charset="-122"/>
+              </a:defRPr>
+            </a:lvl6pPr>
+            <a:lvl7pPr marL="2971800" indent="-228600" eaLnBrk="0" fontAlgn="base" hangingPunct="0">
+              <a:spcBef>
+                <a:spcPct val="0"/>
+              </a:spcBef>
+              <a:spcAft>
+                <a:spcPts val="1413"/>
+              </a:spcAft>
+              <a:buSzPct val="75000"/>
+              <a:buFont typeface="StarSymbol"/>
+              <a:buChar char="●"/>
+              <a:defRPr sz="2400">
+                <a:solidFill>
+                  <a:srgbClr val="000000"/>
+                </a:solidFill>
+                <a:latin typeface="Times New Roman" pitchFamily="18" charset="0"/>
+                <a:ea typeface="Microsoft YaHei" pitchFamily="34" charset="-122"/>
+              </a:defRPr>
+            </a:lvl7pPr>
+            <a:lvl8pPr marL="3429000" indent="-228600" eaLnBrk="0" fontAlgn="base" hangingPunct="0">
+              <a:spcBef>
+                <a:spcPct val="0"/>
+              </a:spcBef>
+              <a:spcAft>
+                <a:spcPts val="1413"/>
+              </a:spcAft>
+              <a:buSzPct val="75000"/>
+              <a:buFont typeface="StarSymbol"/>
+              <a:buChar char="●"/>
+              <a:defRPr sz="2400">
+                <a:solidFill>
+                  <a:srgbClr val="000000"/>
+                </a:solidFill>
+                <a:latin typeface="Times New Roman" pitchFamily="18" charset="0"/>
+                <a:ea typeface="Microsoft YaHei" pitchFamily="34" charset="-122"/>
+              </a:defRPr>
+            </a:lvl8pPr>
+            <a:lvl9pPr marL="3886200" indent="-228600" eaLnBrk="0" fontAlgn="base" hangingPunct="0">
+              <a:spcBef>
+                <a:spcPct val="0"/>
+              </a:spcBef>
+              <a:spcAft>
+                <a:spcPts val="1413"/>
+              </a:spcAft>
+              <a:buSzPct val="75000"/>
+              <a:buFont typeface="StarSymbol"/>
+              <a:buChar char="●"/>
+              <a:defRPr sz="2400">
+                <a:solidFill>
+                  <a:srgbClr val="000000"/>
+                </a:solidFill>
+                <a:latin typeface="Times New Roman" pitchFamily="18" charset="0"/>
+                <a:ea typeface="Microsoft YaHei" pitchFamily="34" charset="-122"/>
+              </a:defRPr>
+            </a:lvl9pPr>
+          </a:lstStyle>
+          <a:p>
+            <a:pPr algn="ctr" eaLnBrk="1">
+              <a:spcAft>
+                <a:spcPct val="0"/>
+              </a:spcAft>
+              <a:buFontTx/>
+              <a:buNone/>
+            </a:pPr>
+            <a:r>
+              <a:rPr lang="en-US" altLang="en-US" sz="3600">
+                <a:solidFill>
+                  <a:srgbClr val="FFFFFF"/>
+                </a:solidFill>
+                <a:latin typeface="Tahoma" pitchFamily="34" charset="0"/>
+                <a:cs typeface="Tahoma" pitchFamily="34" charset="0"/>
+              </a:rPr>
+              <a:t>Conclusion</a:t>
+            </a:r>
+            <a:endParaRPr lang="en-US" altLang="en-US" sz="2800">
+              <a:solidFill>
+                <a:srgbClr val="FFFFFF"/>
+              </a:solidFill>
+              <a:latin typeface="Tahoma" pitchFamily="34" charset="0"/>
+              <a:cs typeface="Tahoma" pitchFamily="34" charset="0"/>
+            </a:endParaRPr>
+          </a:p>
+        </p:txBody>
+      </p:sp>
+      <p:sp>
+        <p:nvSpPr>
+          <p:cNvPr id="3" name="TextBox 2">
+            <a:extLst>
+              <a:ext uri="{FF2B5EF4-FFF2-40B4-BE49-F238E27FC236}">
+                <a16:creationId xmlns:a16="http://schemas.microsoft.com/office/drawing/2014/main" id="{74D0059A-0651-3F4B-A851-83483B38DF91}"/>
+              </a:ext>
+            </a:extLst>
+          </p:cNvPr>
+          <p:cNvSpPr txBox="1"/>
+          <p:nvPr/>
+        </p:nvSpPr>
+        <p:spPr>
+          <a:xfrm>
+            <a:off x="2286000" y="3110317"/>
+            <a:ext cx="4572000" cy="646331"/>
+          </a:xfrm>
+          <a:prstGeom prst="rect">
+            <a:avLst/>
+          </a:prstGeom>
+          <a:noFill/>
+        </p:spPr>
+        <p:txBody>
+          <a:bodyPr wrap="square">
+            <a:spAutoFit/>
+          </a:bodyPr>
+          <a:lstStyle/>
+          <a:p>
+            <a:r>
+              <a:rPr lang="en-US" dirty="0">
+                <a:hlinkClick r:id="rId3"/>
+              </a:rPr>
+              <a:t>https://github.com/Mikachupichu/central-banking-expert-system/tree/main</a:t>
+            </a:r>
+            <a:endParaRPr lang="en-US" dirty="0"/>
+          </a:p>
+        </p:txBody>
+      </p:sp>
+    </p:spTree>
+  </p:cSld>
+  <p:clrMapOvr>
+    <a:masterClrMapping/>
+  </p:clrMapOvr>
+  <p:transition spd="slow"/>
+  <p:timing>
+    <p:tnLst>
+      <p:par>
+        <p:cTn id="1" dur="indefinite" restart="never" nodeType="tmRoot">
+          <p:childTnLst>
+            <p:seq concurrent="1" nextAc="seek">
+              <p:cTn id="2" dur="indefinite" nodeType="mainSeq">
+                <p:childTnLst>
+                  <p:par>
+                    <p:cTn id="3" fill="hold" nodeType="clickPar">
+                      <p:stCondLst>
+                        <p:cond delay="indefinite"/>
+                      </p:stCondLst>
+                      <p:childTnLst>
+                        <p:par>
+                          <p:cTn id="4" fill="hold" nodeType="withGroup">
+                            <p:stCondLst>
+                              <p:cond delay="0"/>
+                            </p:stCondLst>
+                            <p:childTnLst>
+                              <p:par>
+                                <p:cTn id="5" presetID="4" presetClass="entr" presetSubtype="16" fill="hold" grpId="0" nodeType="clickEffect">
+                                  <p:stCondLst>
+                                    <p:cond delay="0"/>
+                                  </p:stCondLst>
+                                  <p:childTnLst>
+                                    <p:set>
+                                      <p:cBhvr>
+                                        <p:cTn id="6" dur="1" fill="hold">
+                                          <p:stCondLst>
+                                            <p:cond delay="0"/>
+                                          </p:stCondLst>
+                                        </p:cTn>
+                                        <p:tgtEl>
+                                          <p:spTgt spid="5"/>
+                                        </p:tgtEl>
+                                        <p:attrNameLst>
+                                          <p:attrName>style.visibility</p:attrName>
+                                        </p:attrNameLst>
+                                      </p:cBhvr>
+                                      <p:to>
+                                        <p:strVal val="visible"/>
+                                      </p:to>
+                                    </p:set>
+                                    <p:animEffect transition="in" filter="box(in)">
+                                      <p:cBhvr>
+                                        <p:cTn id="7" dur="500"/>
+                                        <p:tgtEl>
+                                          <p:spTgt spid="5"/>
+                                        </p:tgtEl>
+                                      </p:cBhvr>
+                                    </p:animEffect>
+                                  </p:childTnLst>
+                                </p:cTn>
+                              </p:par>
+                            </p:childTnLst>
+                          </p:cTn>
+                        </p:par>
+                      </p:childTnLst>
+                    </p:cTn>
+                  </p:par>
+                </p:childTnLst>
+              </p:cTn>
+              <p:prevCondLst>
+                <p:cond evt="onPrev" delay="0">
+                  <p:tgtEl>
+                    <p:sldTgt/>
+                  </p:tgtEl>
+                </p:cond>
+              </p:prevCondLst>
+              <p:nextCondLst>
+                <p:cond evt="onNext" delay="0">
+                  <p:tgtEl>
+                    <p:sldTgt/>
+                  </p:tgtEl>
+                </p:cond>
+              </p:nextCondLst>
+            </p:seq>
+          </p:childTnLst>
+        </p:cTn>
+      </p:par>
+    </p:tnLst>
+    <p:bldLst>
+      <p:bldP spid="5" grpId="0" autoUpdateAnimBg="0"/>
+    </p:bldLst>
+  </p:timing>
+</p:sld>
+</file>
+
+<file path=ppt/slides/slide2.xml><?xml version="1.0" encoding="utf-8"?>
+<p:sld xmlns:a="http://schemas.openxmlformats.org/drawingml/2006/main" xmlns:r="http://schemas.openxmlformats.org/officeDocument/2006/relationships" xmlns:p="http://schemas.openxmlformats.org/presentationml/2006/main">
+  <p:cSld>
+    <p:spTree>
+      <p:nvGrpSpPr>
+        <p:cNvPr id="1" name=""/>
+        <p:cNvGrpSpPr/>
+        <p:nvPr/>
+      </p:nvGrpSpPr>
+      <p:grpSpPr>
+        <a:xfrm>
+          <a:off x="0" y="0"/>
+          <a:ext cx="0" cy="0"/>
+          <a:chOff x="0" y="0"/>
+          <a:chExt cx="0" cy="0"/>
+        </a:xfrm>
+      </p:grpSpPr>
+      <p:sp>
+        <p:nvSpPr>
+          <p:cNvPr id="4098" name="object 5"/>
+          <p:cNvSpPr>
+            <a:spLocks/>
+          </p:cNvSpPr>
+          <p:nvPr/>
+        </p:nvSpPr>
+        <p:spPr bwMode="auto">
+          <a:xfrm>
+            <a:off x="303213" y="104775"/>
+            <a:ext cx="8662987" cy="812800"/>
+          </a:xfrm>
+          <a:custGeom>
+            <a:avLst/>
+            <a:gdLst>
+              <a:gd name="T0" fmla="*/ 0 w 21600"/>
+              <a:gd name="T1" fmla="*/ 0 h 21600"/>
+              <a:gd name="T2" fmla="*/ 2147483647 w 21600"/>
+              <a:gd name="T3" fmla="*/ 0 h 21600"/>
+              <a:gd name="T4" fmla="*/ 2147483647 w 21600"/>
+              <a:gd name="T5" fmla="*/ 2147483647 h 21600"/>
+              <a:gd name="T6" fmla="*/ 0 w 21600"/>
+              <a:gd name="T7" fmla="*/ 2147483647 h 21600"/>
+              <a:gd name="T8" fmla="*/ 0 w 21600"/>
+              <a:gd name="T9" fmla="*/ 0 h 21600"/>
+              <a:gd name="T10" fmla="*/ 0 60000 65536"/>
+              <a:gd name="T11" fmla="*/ 0 60000 65536"/>
+              <a:gd name="T12" fmla="*/ 0 60000 65536"/>
+              <a:gd name="T13" fmla="*/ 0 60000 65536"/>
+              <a:gd name="T14" fmla="*/ 0 60000 65536"/>
+              <a:gd name="T15" fmla="*/ 0 w 21600"/>
+              <a:gd name="T16" fmla="*/ 0 h 21600"/>
+              <a:gd name="T17" fmla="*/ 21600 w 21600"/>
+              <a:gd name="T18" fmla="*/ 21600 h 21600"/>
+            </a:gdLst>
+            <a:ahLst/>
+            <a:cxnLst>
+              <a:cxn ang="T10">
+                <a:pos x="T0" y="T1"/>
+              </a:cxn>
+              <a:cxn ang="T11">
+                <a:pos x="T2" y="T3"/>
+              </a:cxn>
+              <a:cxn ang="T12">
+                <a:pos x="T4" y="T5"/>
+              </a:cxn>
+              <a:cxn ang="T13">
+                <a:pos x="T6" y="T7"/>
+              </a:cxn>
+              <a:cxn ang="T14">
+                <a:pos x="T8" y="T9"/>
+              </a:cxn>
+            </a:cxnLst>
+            <a:rect l="T15" t="T16" r="T17" b="T18"/>
+            <a:pathLst>
+              <a:path w="21600" h="21600">
+                <a:moveTo>
+                  <a:pt x="0" y="0"/>
+                </a:moveTo>
+                <a:lnTo>
+                  <a:pt x="21600" y="0"/>
+                </a:lnTo>
+                <a:lnTo>
+                  <a:pt x="21600" y="21600"/>
+                </a:lnTo>
+                <a:lnTo>
+                  <a:pt x="0" y="21600"/>
+                </a:lnTo>
+                <a:lnTo>
+                  <a:pt x="0" y="0"/>
+                </a:lnTo>
+                <a:close/>
+              </a:path>
+            </a:pathLst>
+          </a:custGeom>
+          <a:blipFill dpi="0" rotWithShape="1">
+            <a:blip r:embed="rId2"/>
+            <a:srcRect/>
+            <a:stretch>
+              <a:fillRect/>
+            </a:stretch>
+          </a:blipFill>
+          <a:ln>
+            <a:noFill/>
+          </a:ln>
+          <a:extLst>
+            <a:ext uri="{91240B29-F687-4F45-9708-019B960494DF}">
+              <a14:hiddenLine xmlns:a14="http://schemas.microsoft.com/office/drawing/2010/main" w="9525">
+                <a:solidFill>
+                  <a:srgbClr val="000000"/>
+                </a:solidFill>
+                <a:round/>
+                <a:headEnd/>
+                <a:tailEnd/>
+              </a14:hiddenLine>
+            </a:ext>
+          </a:extLst>
+        </p:spPr>
+        <p:txBody>
+          <a:bodyPr lIns="0" tIns="0" rIns="0" bIns="0"/>
+          <a:lstStyle/>
+          <a:p>
+            <a:endParaRPr lang="en-US"/>
+          </a:p>
+        </p:txBody>
+      </p:sp>
+      <p:sp>
+        <p:nvSpPr>
+          <p:cNvPr id="5" name="TextBox 6"/>
+          <p:cNvSpPr txBox="1">
+            <a:spLocks noChangeArrowheads="1"/>
+          </p:cNvSpPr>
+          <p:nvPr/>
+        </p:nvSpPr>
+        <p:spPr bwMode="auto">
+          <a:xfrm>
+            <a:off x="303213" y="1336675"/>
+            <a:ext cx="8662987" cy="1629756"/>
+          </a:xfrm>
+          <a:prstGeom prst="rect">
+            <a:avLst/>
+          </a:prstGeom>
+          <a:noFill/>
+          <a:ln>
+            <a:noFill/>
+          </a:ln>
+          <a:extLst>
+            <a:ext uri="{909E8E84-426E-40DD-AFC4-6F175D3DCCD1}">
+              <a14:hiddenFill xmlns:a14="http://schemas.microsoft.com/office/drawing/2010/main">
+                <a:solidFill>
+                  <a:srgbClr val="FFFFFF"/>
+                </a:solidFill>
+              </a14:hiddenFill>
+            </a:ext>
+            <a:ext uri="{91240B29-F687-4F45-9708-019B960494DF}">
+              <a14:hiddenLine xmlns:a14="http://schemas.microsoft.com/office/drawing/2010/main" w="9525">
+                <a:solidFill>
+                  <a:srgbClr val="000000"/>
+                </a:solidFill>
+                <a:miter lim="800000"/>
+                <a:headEnd/>
+                <a:tailEnd/>
+              </a14:hiddenLine>
+            </a:ext>
+          </a:extLst>
+        </p:spPr>
+        <p:txBody>
+          <a:bodyPr lIns="90004" tIns="44997" rIns="90004" bIns="44997">
+            <a:spAutoFit/>
+          </a:bodyPr>
+          <a:lstStyle>
+            <a:lvl1pPr>
+              <a:spcAft>
+                <a:spcPts val="1413"/>
+              </a:spcAft>
+              <a:buChar char="•"/>
+              <a:defRPr sz="2400">
+                <a:solidFill>
+                  <a:srgbClr val="000000"/>
+                </a:solidFill>
+                <a:latin typeface="Times New Roman" pitchFamily="18" charset="0"/>
+                <a:ea typeface="Microsoft YaHei" pitchFamily="34" charset="-122"/>
+              </a:defRPr>
+            </a:lvl1pPr>
+            <a:lvl2pPr marL="742950" indent="-285750">
+              <a:spcAft>
+                <a:spcPts val="1413"/>
+              </a:spcAft>
+              <a:buSzPct val="75000"/>
+              <a:buFont typeface="StarSymbol"/>
+              <a:buChar char="–"/>
+              <a:defRPr sz="2400">
+                <a:solidFill>
+                  <a:srgbClr val="000000"/>
+                </a:solidFill>
+                <a:latin typeface="Times New Roman" pitchFamily="18" charset="0"/>
+                <a:ea typeface="Microsoft YaHei" pitchFamily="34" charset="-122"/>
+              </a:defRPr>
+            </a:lvl2pPr>
+            <a:lvl3pPr marL="1143000" indent="-228600">
+              <a:spcAft>
+                <a:spcPts val="1413"/>
+              </a:spcAft>
+              <a:buSzPct val="75000"/>
+              <a:buFont typeface="StarSymbol"/>
+              <a:buChar char="●"/>
+              <a:defRPr sz="2400">
+                <a:solidFill>
+                  <a:srgbClr val="000000"/>
+                </a:solidFill>
+                <a:latin typeface="Times New Roman" pitchFamily="18" charset="0"/>
+                <a:ea typeface="Microsoft YaHei" pitchFamily="34" charset="-122"/>
+              </a:defRPr>
+            </a:lvl3pPr>
+            <a:lvl4pPr marL="1600200" indent="-228600">
+              <a:spcAft>
+                <a:spcPts val="1413"/>
+              </a:spcAft>
+              <a:buSzPct val="75000"/>
+              <a:buFont typeface="StarSymbol"/>
+              <a:buChar char="–"/>
+              <a:defRPr sz="2400">
+                <a:solidFill>
+                  <a:srgbClr val="000000"/>
+                </a:solidFill>
+                <a:latin typeface="Times New Roman" pitchFamily="18" charset="0"/>
+                <a:ea typeface="Microsoft YaHei" pitchFamily="34" charset="-122"/>
+              </a:defRPr>
+            </a:lvl4pPr>
+            <a:lvl5pPr marL="2057400" indent="-228600">
+              <a:spcAft>
+                <a:spcPts val="1413"/>
+              </a:spcAft>
+              <a:buSzPct val="75000"/>
+              <a:buFont typeface="StarSymbol"/>
+              <a:buChar char="●"/>
+              <a:defRPr sz="2400">
+                <a:solidFill>
+                  <a:srgbClr val="000000"/>
+                </a:solidFill>
+                <a:latin typeface="Times New Roman" pitchFamily="18" charset="0"/>
+                <a:ea typeface="Microsoft YaHei" pitchFamily="34" charset="-122"/>
+              </a:defRPr>
+            </a:lvl5pPr>
+            <a:lvl6pPr marL="2514600" indent="-228600" eaLnBrk="0" fontAlgn="base" hangingPunct="0">
+              <a:spcBef>
+                <a:spcPct val="0"/>
+              </a:spcBef>
+              <a:spcAft>
+                <a:spcPts val="1413"/>
+              </a:spcAft>
+              <a:buSzPct val="75000"/>
+              <a:buFont typeface="StarSymbol"/>
+              <a:buChar char="●"/>
+              <a:defRPr sz="2400">
+                <a:solidFill>
+                  <a:srgbClr val="000000"/>
+                </a:solidFill>
+                <a:latin typeface="Times New Roman" pitchFamily="18" charset="0"/>
+                <a:ea typeface="Microsoft YaHei" pitchFamily="34" charset="-122"/>
+              </a:defRPr>
+            </a:lvl6pPr>
+            <a:lvl7pPr marL="2971800" indent="-228600" eaLnBrk="0" fontAlgn="base" hangingPunct="0">
+              <a:spcBef>
+                <a:spcPct val="0"/>
+              </a:spcBef>
+              <a:spcAft>
+                <a:spcPts val="1413"/>
+              </a:spcAft>
+              <a:buSzPct val="75000"/>
+              <a:buFont typeface="StarSymbol"/>
+              <a:buChar char="●"/>
+              <a:defRPr sz="2400">
+                <a:solidFill>
+                  <a:srgbClr val="000000"/>
+                </a:solidFill>
+                <a:latin typeface="Times New Roman" pitchFamily="18" charset="0"/>
+                <a:ea typeface="Microsoft YaHei" pitchFamily="34" charset="-122"/>
+              </a:defRPr>
+            </a:lvl7pPr>
+            <a:lvl8pPr marL="3429000" indent="-228600" eaLnBrk="0" fontAlgn="base" hangingPunct="0">
+              <a:spcBef>
+                <a:spcPct val="0"/>
+              </a:spcBef>
+              <a:spcAft>
+                <a:spcPts val="1413"/>
+              </a:spcAft>
+              <a:buSzPct val="75000"/>
+              <a:buFont typeface="StarSymbol"/>
+              <a:buChar char="●"/>
+              <a:defRPr sz="2400">
+                <a:solidFill>
+                  <a:srgbClr val="000000"/>
+                </a:solidFill>
+                <a:latin typeface="Times New Roman" pitchFamily="18" charset="0"/>
+                <a:ea typeface="Microsoft YaHei" pitchFamily="34" charset="-122"/>
+              </a:defRPr>
+            </a:lvl8pPr>
+            <a:lvl9pPr marL="3886200" indent="-228600" eaLnBrk="0" fontAlgn="base" hangingPunct="0">
+              <a:spcBef>
+                <a:spcPct val="0"/>
+              </a:spcBef>
+              <a:spcAft>
+                <a:spcPts val="1413"/>
+              </a:spcAft>
+              <a:buSzPct val="75000"/>
+              <a:buFont typeface="StarSymbol"/>
+              <a:buChar char="●"/>
+              <a:defRPr sz="2400">
+                <a:solidFill>
+                  <a:srgbClr val="000000"/>
+                </a:solidFill>
+                <a:latin typeface="Times New Roman" pitchFamily="18" charset="0"/>
+                <a:ea typeface="Microsoft YaHei" pitchFamily="34" charset="-122"/>
+              </a:defRPr>
+            </a:lvl9pPr>
+          </a:lstStyle>
+          <a:p>
+            <a:pPr marL="457200" indent="-457200" algn="just" eaLnBrk="1">
+              <a:spcAft>
+                <a:spcPct val="0"/>
+              </a:spcAft>
+              <a:buFont typeface="+mj-lt"/>
+              <a:buAutoNum type="arabicPeriod"/>
+            </a:pPr>
+            <a:r>
+              <a:rPr lang="en-US" altLang="en-US" sz="2000" dirty="0">
+                <a:solidFill>
+                  <a:srgbClr val="1C1C1C"/>
+                </a:solidFill>
+                <a:latin typeface="Tahoma" pitchFamily="34" charset="0"/>
+                <a:cs typeface="Tahoma" pitchFamily="34" charset="0"/>
+              </a:rPr>
+              <a:t>Lessons Learned from D1 (TODO 1)</a:t>
+            </a:r>
+          </a:p>
+          <a:p>
+            <a:pPr marL="457200" indent="-457200" algn="just" eaLnBrk="1">
+              <a:spcAft>
+                <a:spcPct val="0"/>
+              </a:spcAft>
+              <a:buFont typeface="+mj-lt"/>
+              <a:buAutoNum type="arabicPeriod"/>
+            </a:pPr>
+            <a:r>
+              <a:rPr lang="en-US" altLang="en-US" sz="2000" dirty="0">
+                <a:solidFill>
+                  <a:srgbClr val="1C1C1C"/>
+                </a:solidFill>
+                <a:latin typeface="Tahoma" pitchFamily="34" charset="0"/>
+                <a:cs typeface="Tahoma" pitchFamily="34" charset="0"/>
+              </a:rPr>
+              <a:t>Probabilistic Uncertainty (TODO 2)</a:t>
+            </a:r>
+          </a:p>
+          <a:p>
+            <a:pPr marL="457200" indent="-457200" algn="just" eaLnBrk="1">
+              <a:spcAft>
+                <a:spcPct val="0"/>
+              </a:spcAft>
+              <a:buFont typeface="+mj-lt"/>
+              <a:buAutoNum type="arabicPeriod"/>
+            </a:pPr>
+            <a:r>
+              <a:rPr lang="en-US" altLang="en-US" sz="2000" dirty="0">
+                <a:solidFill>
+                  <a:srgbClr val="1C1C1C"/>
+                </a:solidFill>
+                <a:latin typeface="Tahoma" pitchFamily="34" charset="0"/>
+                <a:cs typeface="Tahoma" pitchFamily="34" charset="0"/>
+              </a:rPr>
+              <a:t>Possibilistic Uncertainty (TODO 3)</a:t>
+            </a:r>
+          </a:p>
+          <a:p>
+            <a:pPr marL="457200" indent="-457200" algn="just" eaLnBrk="1">
+              <a:spcAft>
+                <a:spcPct val="0"/>
+              </a:spcAft>
+              <a:buFont typeface="+mj-lt"/>
+              <a:buAutoNum type="arabicPeriod"/>
+            </a:pPr>
+            <a:r>
+              <a:rPr lang="en-US" altLang="en-US" sz="2000" dirty="0">
+                <a:solidFill>
+                  <a:srgbClr val="1C1C1C"/>
+                </a:solidFill>
+                <a:latin typeface="Tahoma" pitchFamily="34" charset="0"/>
+                <a:cs typeface="Tahoma" pitchFamily="34" charset="0"/>
+              </a:rPr>
+              <a:t>Quality Attributes (TODO 4)</a:t>
+            </a:r>
+          </a:p>
+          <a:p>
+            <a:pPr marL="457200" indent="-457200" algn="just" eaLnBrk="1">
+              <a:spcAft>
+                <a:spcPct val="0"/>
+              </a:spcAft>
+              <a:buFont typeface="+mj-lt"/>
+              <a:buAutoNum type="arabicPeriod"/>
+            </a:pPr>
+            <a:r>
+              <a:rPr lang="en-US" altLang="en-US" sz="2000" dirty="0">
+                <a:solidFill>
+                  <a:srgbClr val="1C1C1C"/>
+                </a:solidFill>
+                <a:latin typeface="Tahoma" pitchFamily="34" charset="0"/>
+                <a:cs typeface="Tahoma" pitchFamily="34" charset="0"/>
+              </a:rPr>
+              <a:t>Conclusion</a:t>
             </a:r>
           </a:p>
         </p:txBody>
@@ -9755,7 +10520,7 @@
         <p:spPr bwMode="auto">
           <a:xfrm>
             <a:off x="303213" y="1336675"/>
-            <a:ext cx="8662987" cy="3476415"/>
+            <a:ext cx="8662987" cy="1629756"/>
           </a:xfrm>
           <a:prstGeom prst="rect">
             <a:avLst/>
@@ -9951,27 +10716,7 @@
                 <a:latin typeface="Tahoma" pitchFamily="34" charset="0"/>
                 <a:cs typeface="Tahoma" pitchFamily="34" charset="0"/>
               </a:rPr>
-              <a:t>Most of the marks I lost were related to a lack of documentation in the PowerPoint. My work was instead documented as code comments. Professor </a:t>
-            </a:r>
-            <a:r>
-              <a:rPr lang="en-US" altLang="en-US" sz="2000" dirty="0" err="1">
-                <a:solidFill>
-                  <a:srgbClr val="1C1C1C"/>
-                </a:solidFill>
-                <a:latin typeface="Tahoma" pitchFamily="34" charset="0"/>
-                <a:cs typeface="Tahoma" pitchFamily="34" charset="0"/>
-              </a:rPr>
-              <a:t>Kamthan</a:t>
-            </a:r>
-            <a:r>
-              <a:rPr lang="en-US" altLang="en-US" sz="2000" dirty="0">
-                <a:solidFill>
-                  <a:srgbClr val="1C1C1C"/>
-                </a:solidFill>
-                <a:latin typeface="Tahoma" pitchFamily="34" charset="0"/>
-                <a:cs typeface="Tahoma" pitchFamily="34" charset="0"/>
-              </a:rPr>
-              <a:t> has agreed to accept in-code documentation and grant those marks. Other marks were initially lost for a lack of modularity, but I pointed out to my TA that modularity had not been taught before the D1 submission date. I performed very poorly in testing due to not having documented any of my tests. A major part of my expert system that must change is the lack of interactivity, as brought up to me in the D1 demo feedback. I will thus allow users to interact with my expert system directly through the CLI rather than by expecting them to add or remove facts from the database.</a:t>
+              <a:t>Although I performed very well and received a good grade, a major part of my expert system that must change is the lack of interactivity, as brought up to me in the D1 demo feedback. I will thus allow users to interact with my expert system directly through the CLI rather than by expecting them to add, modify or remove facts from the database.</a:t>
             </a:r>
           </a:p>
         </p:txBody>
@@ -12138,6 +12883,74 @@
           </a:p>
         </p:txBody>
       </p:sp>
+      <p:pic>
+        <p:nvPicPr>
+          <p:cNvPr id="7" name="Picture 6">
+            <a:extLst>
+              <a:ext uri="{FF2B5EF4-FFF2-40B4-BE49-F238E27FC236}">
+                <a16:creationId xmlns:a16="http://schemas.microsoft.com/office/drawing/2014/main" id="{01D23C6C-35F9-DD1C-62AB-267EAAF4241F}"/>
+              </a:ext>
+            </a:extLst>
+          </p:cNvPr>
+          <p:cNvPicPr>
+            <a:picLocks noChangeAspect="1"/>
+          </p:cNvPicPr>
+          <p:nvPr/>
+        </p:nvPicPr>
+        <p:blipFill>
+          <a:blip r:embed="rId3"/>
+          <a:stretch>
+            <a:fillRect/>
+          </a:stretch>
+        </p:blipFill>
+        <p:spPr>
+          <a:xfrm>
+            <a:off x="588963" y="4467245"/>
+            <a:ext cx="3527612" cy="2479873"/>
+          </a:xfrm>
+          <a:prstGeom prst="rect">
+            <a:avLst/>
+          </a:prstGeom>
+        </p:spPr>
+      </p:pic>
+      <p:sp>
+        <p:nvSpPr>
+          <p:cNvPr id="9" name="TextBox 8">
+            <a:extLst>
+              <a:ext uri="{FF2B5EF4-FFF2-40B4-BE49-F238E27FC236}">
+                <a16:creationId xmlns:a16="http://schemas.microsoft.com/office/drawing/2014/main" id="{BFF84538-DA5E-DDD9-DC8D-56752AD5B7A3}"/>
+              </a:ext>
+            </a:extLst>
+          </p:cNvPr>
+          <p:cNvSpPr txBox="1"/>
+          <p:nvPr/>
+        </p:nvSpPr>
+        <p:spPr>
+          <a:xfrm>
+            <a:off x="4394200" y="4737685"/>
+            <a:ext cx="4572000" cy="646331"/>
+          </a:xfrm>
+          <a:prstGeom prst="rect">
+            <a:avLst/>
+          </a:prstGeom>
+          <a:noFill/>
+        </p:spPr>
+        <p:txBody>
+          <a:bodyPr wrap="square">
+            <a:spAutoFit/>
+          </a:bodyPr>
+          <a:lstStyle/>
+          <a:p>
+            <a:r>
+              <a:rPr lang="en-US" dirty="0">
+                <a:hlinkClick r:id="rId4"/>
+              </a:rPr>
+              <a:t>https://github.com/Mikachupichu/central-banking-expert-system/tree/TODO3</a:t>
+            </a:r>
+            <a:endParaRPr lang="en-US" dirty="0"/>
+          </a:p>
+        </p:txBody>
+      </p:sp>
     </p:spTree>
     <p:extLst>
       <p:ext uri="{BB962C8B-B14F-4D97-AF65-F5344CB8AC3E}">
@@ -12513,6 +13326,161 @@
           </a:p>
         </p:txBody>
       </p:sp>
+      <p:sp>
+        <p:nvSpPr>
+          <p:cNvPr id="3" name="TextBox 2">
+            <a:extLst>
+              <a:ext uri="{FF2B5EF4-FFF2-40B4-BE49-F238E27FC236}">
+                <a16:creationId xmlns:a16="http://schemas.microsoft.com/office/drawing/2014/main" id="{B1486129-C845-2327-6107-5FB23DD2695A}"/>
+              </a:ext>
+            </a:extLst>
+          </p:cNvPr>
+          <p:cNvSpPr txBox="1"/>
+          <p:nvPr/>
+        </p:nvSpPr>
+        <p:spPr>
+          <a:xfrm>
+            <a:off x="303213" y="917575"/>
+            <a:ext cx="8662987" cy="5262979"/>
+          </a:xfrm>
+          <a:prstGeom prst="rect">
+            <a:avLst/>
+          </a:prstGeom>
+          <a:noFill/>
+        </p:spPr>
+        <p:txBody>
+          <a:bodyPr wrap="square">
+            <a:spAutoFit/>
+          </a:bodyPr>
+          <a:lstStyle/>
+          <a:p>
+            <a:pPr marL="342900" indent="-342900" algn="just" eaLnBrk="1">
+              <a:buAutoNum type="arabicPeriod"/>
+            </a:pPr>
+            <a:r>
+              <a:rPr lang="en-US" altLang="en-US" sz="1600" dirty="0">
+                <a:solidFill>
+                  <a:srgbClr val="1C1C1C"/>
+                </a:solidFill>
+                <a:latin typeface="Tahoma" pitchFamily="34" charset="0"/>
+                <a:cs typeface="Tahoma" pitchFamily="34" charset="0"/>
+              </a:rPr>
+              <a:t>Correctness</a:t>
+            </a:r>
+          </a:p>
+          <a:p>
+            <a:pPr marL="800100" lvl="1" indent="-342900" algn="just" eaLnBrk="1">
+              <a:buFont typeface="Courier New" panose="02070309020205020404" pitchFamily="49" charset="0"/>
+              <a:buChar char="o"/>
+            </a:pPr>
+            <a:r>
+              <a:rPr lang="en-US" altLang="en-US" sz="1600" dirty="0">
+                <a:solidFill>
+                  <a:srgbClr val="1C1C1C"/>
+                </a:solidFill>
+                <a:latin typeface="Tahoma" pitchFamily="34" charset="0"/>
+                <a:cs typeface="Tahoma" pitchFamily="34" charset="0"/>
+              </a:rPr>
+              <a:t>Rules must accurately represent central banking knowledge. For example, an economics student relying and trusting my expert system must not be taught incorrect information that may negatively impact his grades.</a:t>
+            </a:r>
+          </a:p>
+          <a:p>
+            <a:pPr marL="800100" lvl="1" indent="-342900" algn="just" eaLnBrk="1">
+              <a:buFont typeface="Courier New" panose="02070309020205020404" pitchFamily="49" charset="0"/>
+              <a:buChar char="o"/>
+            </a:pPr>
+            <a:r>
+              <a:rPr lang="en-US" altLang="en-US" sz="1600" dirty="0">
+                <a:solidFill>
+                  <a:srgbClr val="1C1C1C"/>
+                </a:solidFill>
+                <a:latin typeface="Tahoma" pitchFamily="34" charset="0"/>
+                <a:cs typeface="Tahoma" pitchFamily="34" charset="0"/>
+              </a:rPr>
+              <a:t>All theory behind all rules is cited and references authoritative and academic sources throughout my code, ensuring correctness. Comments above each rule and at the very bottom of the knowledgebase are used for this purpose. Limitations of the expert system are acknowledged in the D1 documentation slides.</a:t>
+            </a:r>
+          </a:p>
+          <a:p>
+            <a:pPr marL="800100" lvl="1" indent="-342900" algn="just" eaLnBrk="1">
+              <a:buFont typeface="Courier New" panose="02070309020205020404" pitchFamily="49" charset="0"/>
+              <a:buChar char="o"/>
+            </a:pPr>
+            <a:r>
+              <a:rPr lang="en-US" altLang="en-US" sz="1600" dirty="0">
+                <a:solidFill>
+                  <a:srgbClr val="1C1C1C"/>
+                </a:solidFill>
+                <a:latin typeface="Tahoma" pitchFamily="34" charset="0"/>
+                <a:cs typeface="Tahoma" pitchFamily="34" charset="0"/>
+              </a:rPr>
+              <a:t>Consequently, knowledge is accurately represented using rules. The impact of these guidelines are highly positive.</a:t>
+            </a:r>
+          </a:p>
+          <a:p>
+            <a:pPr marL="342900" indent="-342900" algn="just" eaLnBrk="1">
+              <a:buAutoNum type="arabicPeriod"/>
+            </a:pPr>
+            <a:r>
+              <a:rPr lang="en-US" altLang="en-US" sz="1600" dirty="0">
+                <a:solidFill>
+                  <a:srgbClr val="1C1C1C"/>
+                </a:solidFill>
+                <a:latin typeface="Tahoma" pitchFamily="34" charset="0"/>
+                <a:cs typeface="Tahoma" pitchFamily="34" charset="0"/>
+              </a:rPr>
+              <a:t>Consistency</a:t>
+            </a:r>
+          </a:p>
+          <a:p>
+            <a:pPr marL="800100" lvl="1" indent="-342900" algn="just" eaLnBrk="1">
+              <a:buFont typeface="Courier New" panose="02070309020205020404" pitchFamily="49" charset="0"/>
+              <a:buChar char="o"/>
+            </a:pPr>
+            <a:r>
+              <a:rPr lang="en-US" altLang="en-US" sz="1600" dirty="0">
+                <a:solidFill>
+                  <a:srgbClr val="1C1C1C"/>
+                </a:solidFill>
+                <a:latin typeface="Tahoma" pitchFamily="34" charset="0"/>
+                <a:cs typeface="Tahoma" pitchFamily="34" charset="0"/>
+              </a:rPr>
+              <a:t>Rules must not contradict each other, as that would render the expert system less trustworthy.</a:t>
+            </a:r>
+          </a:p>
+          <a:p>
+            <a:pPr marL="800100" lvl="1" indent="-342900" algn="just" eaLnBrk="1">
+              <a:buFont typeface="Courier New" panose="02070309020205020404" pitchFamily="49" charset="0"/>
+              <a:buChar char="o"/>
+            </a:pPr>
+            <a:r>
+              <a:rPr lang="en-US" altLang="en-US" sz="1600" dirty="0">
+                <a:solidFill>
+                  <a:srgbClr val="1C1C1C"/>
+                </a:solidFill>
+                <a:latin typeface="Tahoma" pitchFamily="34" charset="0"/>
+                <a:cs typeface="Tahoma" pitchFamily="34" charset="0"/>
+              </a:rPr>
+              <a:t>There are no repeating terms (concepts) between different contexts. Moreover, any potential contradictions are handled by the use of fuzziness (when fact assertions conflict), salience (in setup rules to ensure all rules are fired and facts are asserted before reaching the conclusion rule, thus preventing it from firing multiple times due to changing information), and stop facts (when the conclusion fires, to avoid repeats).</a:t>
+            </a:r>
+          </a:p>
+          <a:p>
+            <a:pPr marL="800100" lvl="1" indent="-342900" algn="just" eaLnBrk="1">
+              <a:buFont typeface="Courier New" panose="02070309020205020404" pitchFamily="49" charset="0"/>
+              <a:buChar char="o"/>
+            </a:pPr>
+            <a:r>
+              <a:rPr lang="en-US" altLang="en-US" sz="1600" dirty="0">
+                <a:solidFill>
+                  <a:srgbClr val="1C1C1C"/>
+                </a:solidFill>
+                <a:latin typeface="Tahoma" pitchFamily="34" charset="0"/>
+                <a:cs typeface="Tahoma" pitchFamily="34" charset="0"/>
+              </a:rPr>
+              <a:t>The effect of such consistency is positive, as users can safely rely on the expert system’s answers.</a:t>
+            </a:r>
+          </a:p>
+        </p:txBody>
+      </p:sp>
     </p:spTree>
     <p:extLst>
       <p:ext uri="{BB962C8B-B14F-4D97-AF65-F5344CB8AC3E}">
@@ -12532,7 +13500,13 @@
   <p:cSld>
     <p:spTree>
       <p:nvGrpSpPr>
-        <p:cNvPr id="1" name=""/>
+        <p:cNvPr id="1" name="">
+          <a:extLst>
+            <a:ext uri="{FF2B5EF4-FFF2-40B4-BE49-F238E27FC236}">
+              <a16:creationId xmlns:a16="http://schemas.microsoft.com/office/drawing/2014/main" id="{B94AB586-D102-2193-D1D4-331851D40A9C}"/>
+            </a:ext>
+          </a:extLst>
+        </p:cNvPr>
         <p:cNvGrpSpPr/>
         <p:nvPr/>
       </p:nvGrpSpPr>
@@ -12546,7 +13520,13 @@
       </p:grpSpPr>
       <p:sp>
         <p:nvSpPr>
-          <p:cNvPr id="5122" name="object 5"/>
+          <p:cNvPr id="4098" name="object 5">
+            <a:extLst>
+              <a:ext uri="{FF2B5EF4-FFF2-40B4-BE49-F238E27FC236}">
+                <a16:creationId xmlns:a16="http://schemas.microsoft.com/office/drawing/2014/main" id="{2D80E69F-08A1-16F0-4A18-95518FA7418F}"/>
+              </a:ext>
+            </a:extLst>
+          </p:cNvPr>
           <p:cNvSpPr>
             <a:spLocks/>
           </p:cNvSpPr>
@@ -12653,7 +13633,13 @@
       </p:sp>
       <p:sp>
         <p:nvSpPr>
-          <p:cNvPr id="5" name="TextBox 6"/>
+          <p:cNvPr id="4100" name="object 7">
+            <a:extLst>
+              <a:ext uri="{FF2B5EF4-FFF2-40B4-BE49-F238E27FC236}">
+                <a16:creationId xmlns:a16="http://schemas.microsoft.com/office/drawing/2014/main" id="{EE475F07-7181-E422-EB2E-BF14D374D4D3}"/>
+              </a:ext>
+            </a:extLst>
+          </p:cNvPr>
           <p:cNvSpPr txBox="1">
             <a:spLocks noChangeArrowheads="1"/>
           </p:cNvSpPr>
@@ -12661,8 +13647,8 @@
         </p:nvSpPr>
         <p:spPr bwMode="auto">
           <a:xfrm>
-            <a:off x="303213" y="1336675"/>
-            <a:ext cx="8662987" cy="398463"/>
+            <a:off x="588963" y="238125"/>
+            <a:ext cx="8091487" cy="553998"/>
           </a:xfrm>
           <a:prstGeom prst="rect">
             <a:avLst/>
@@ -12692,11 +13678,11 @@
           </a:extLst>
         </p:spPr>
         <p:txBody>
-          <a:bodyPr lIns="90004" tIns="44997" rIns="90004" bIns="44997">
+          <a:bodyPr lIns="0" tIns="0" rIns="0" bIns="0" anchorCtr="1">
             <a:spAutoFit/>
           </a:bodyPr>
           <a:lstStyle>
-            <a:lvl1pPr>
+            <a:lvl1pPr marL="11113">
               <a:spcAft>
                 <a:spcPts val="1413"/>
               </a:spcAft>
@@ -12709,7 +13695,7 @@
                 <a:ea typeface="Microsoft YaHei" pitchFamily="34" charset="-122"/>
               </a:defRPr>
             </a:lvl1pPr>
-            <a:lvl2pPr marL="742950" indent="-285750">
+            <a:lvl2pPr marL="685800" indent="-228600">
               <a:spcAft>
                 <a:spcPts val="1413"/>
               </a:spcAft>
@@ -12843,218 +13829,6 @@
             </a:lvl9pPr>
           </a:lstStyle>
           <a:p>
-            <a:pPr algn="just" eaLnBrk="1">
-              <a:spcAft>
-                <a:spcPct val="0"/>
-              </a:spcAft>
-              <a:buFontTx/>
-              <a:buNone/>
-            </a:pPr>
-            <a:r>
-              <a:rPr lang="en-US" altLang="en-US" sz="2000">
-                <a:solidFill>
-                  <a:srgbClr val="1C1C1C"/>
-                </a:solidFill>
-                <a:latin typeface="Tahoma" pitchFamily="34" charset="0"/>
-                <a:cs typeface="Tahoma" pitchFamily="34" charset="0"/>
-              </a:rPr>
-              <a:t>Add Text</a:t>
-            </a:r>
-          </a:p>
-        </p:txBody>
-      </p:sp>
-      <p:sp>
-        <p:nvSpPr>
-          <p:cNvPr id="5124" name="object 7"/>
-          <p:cNvSpPr txBox="1">
-            <a:spLocks noChangeArrowheads="1"/>
-          </p:cNvSpPr>
-          <p:nvPr/>
-        </p:nvSpPr>
-        <p:spPr bwMode="auto">
-          <a:xfrm>
-            <a:off x="588963" y="238125"/>
-            <a:ext cx="8091487" cy="554038"/>
-          </a:xfrm>
-          <a:prstGeom prst="rect">
-            <a:avLst/>
-          </a:prstGeom>
-          <a:noFill/>
-          <a:ln>
-            <a:noFill/>
-          </a:ln>
-          <a:extLst>
-            <a:ext uri="{909E8E84-426E-40DD-AFC4-6F175D3DCCD1}">
-              <a14:hiddenFill xmlns:a14="http://schemas.microsoft.com/office/drawing/2010/main">
-                <a:solidFill>
-                  <a:srgbClr val="FFFFFF"/>
-                </a:solidFill>
-              </a14:hiddenFill>
-            </a:ext>
-            <a:ext uri="{91240B29-F687-4F45-9708-019B960494DF}">
-              <a14:hiddenLine xmlns:a14="http://schemas.microsoft.com/office/drawing/2010/main" w="9525">
-                <a:solidFill>
-                  <a:srgbClr val="000000"/>
-                </a:solidFill>
-                <a:miter lim="800000"/>
-                <a:headEnd/>
-                <a:tailEnd/>
-              </a14:hiddenLine>
-            </a:ext>
-          </a:extLst>
-        </p:spPr>
-        <p:txBody>
-          <a:bodyPr lIns="0" tIns="0" rIns="0" bIns="0" anchorCtr="1">
-            <a:spAutoFit/>
-          </a:bodyPr>
-          <a:lstStyle>
-            <a:lvl1pPr marL="11113">
-              <a:spcAft>
-                <a:spcPts val="1413"/>
-              </a:spcAft>
-              <a:buChar char="•"/>
-              <a:defRPr sz="2400">
-                <a:solidFill>
-                  <a:srgbClr val="000000"/>
-                </a:solidFill>
-                <a:latin typeface="Times New Roman" pitchFamily="18" charset="0"/>
-                <a:ea typeface="Microsoft YaHei" pitchFamily="34" charset="-122"/>
-              </a:defRPr>
-            </a:lvl1pPr>
-            <a:lvl2pPr marL="685800" indent="-228600">
-              <a:spcAft>
-                <a:spcPts val="1413"/>
-              </a:spcAft>
-              <a:buSzPct val="75000"/>
-              <a:buFont typeface="StarSymbol"/>
-              <a:buChar char="–"/>
-              <a:defRPr sz="2400">
-                <a:solidFill>
-                  <a:srgbClr val="000000"/>
-                </a:solidFill>
-                <a:latin typeface="Times New Roman" pitchFamily="18" charset="0"/>
-                <a:ea typeface="Microsoft YaHei" pitchFamily="34" charset="-122"/>
-              </a:defRPr>
-            </a:lvl2pPr>
-            <a:lvl3pPr marL="1143000" indent="-228600">
-              <a:spcAft>
-                <a:spcPts val="1413"/>
-              </a:spcAft>
-              <a:buSzPct val="75000"/>
-              <a:buFont typeface="StarSymbol"/>
-              <a:buChar char="●"/>
-              <a:defRPr sz="2400">
-                <a:solidFill>
-                  <a:srgbClr val="000000"/>
-                </a:solidFill>
-                <a:latin typeface="Times New Roman" pitchFamily="18" charset="0"/>
-                <a:ea typeface="Microsoft YaHei" pitchFamily="34" charset="-122"/>
-              </a:defRPr>
-            </a:lvl3pPr>
-            <a:lvl4pPr marL="1600200" indent="-228600">
-              <a:spcAft>
-                <a:spcPts val="1413"/>
-              </a:spcAft>
-              <a:buSzPct val="75000"/>
-              <a:buFont typeface="StarSymbol"/>
-              <a:buChar char="–"/>
-              <a:defRPr sz="2400">
-                <a:solidFill>
-                  <a:srgbClr val="000000"/>
-                </a:solidFill>
-                <a:latin typeface="Times New Roman" pitchFamily="18" charset="0"/>
-                <a:ea typeface="Microsoft YaHei" pitchFamily="34" charset="-122"/>
-              </a:defRPr>
-            </a:lvl4pPr>
-            <a:lvl5pPr marL="2057400" indent="-228600">
-              <a:spcAft>
-                <a:spcPts val="1413"/>
-              </a:spcAft>
-              <a:buSzPct val="75000"/>
-              <a:buFont typeface="StarSymbol"/>
-              <a:buChar char="●"/>
-              <a:defRPr sz="2400">
-                <a:solidFill>
-                  <a:srgbClr val="000000"/>
-                </a:solidFill>
-                <a:latin typeface="Times New Roman" pitchFamily="18" charset="0"/>
-                <a:ea typeface="Microsoft YaHei" pitchFamily="34" charset="-122"/>
-              </a:defRPr>
-            </a:lvl5pPr>
-            <a:lvl6pPr marL="2514600" indent="-228600" eaLnBrk="0" fontAlgn="base" hangingPunct="0">
-              <a:spcBef>
-                <a:spcPct val="0"/>
-              </a:spcBef>
-              <a:spcAft>
-                <a:spcPts val="1413"/>
-              </a:spcAft>
-              <a:buSzPct val="75000"/>
-              <a:buFont typeface="StarSymbol"/>
-              <a:buChar char="●"/>
-              <a:defRPr sz="2400">
-                <a:solidFill>
-                  <a:srgbClr val="000000"/>
-                </a:solidFill>
-                <a:latin typeface="Times New Roman" pitchFamily="18" charset="0"/>
-                <a:ea typeface="Microsoft YaHei" pitchFamily="34" charset="-122"/>
-              </a:defRPr>
-            </a:lvl6pPr>
-            <a:lvl7pPr marL="2971800" indent="-228600" eaLnBrk="0" fontAlgn="base" hangingPunct="0">
-              <a:spcBef>
-                <a:spcPct val="0"/>
-              </a:spcBef>
-              <a:spcAft>
-                <a:spcPts val="1413"/>
-              </a:spcAft>
-              <a:buSzPct val="75000"/>
-              <a:buFont typeface="StarSymbol"/>
-              <a:buChar char="●"/>
-              <a:defRPr sz="2400">
-                <a:solidFill>
-                  <a:srgbClr val="000000"/>
-                </a:solidFill>
-                <a:latin typeface="Times New Roman" pitchFamily="18" charset="0"/>
-                <a:ea typeface="Microsoft YaHei" pitchFamily="34" charset="-122"/>
-              </a:defRPr>
-            </a:lvl7pPr>
-            <a:lvl8pPr marL="3429000" indent="-228600" eaLnBrk="0" fontAlgn="base" hangingPunct="0">
-              <a:spcBef>
-                <a:spcPct val="0"/>
-              </a:spcBef>
-              <a:spcAft>
-                <a:spcPts val="1413"/>
-              </a:spcAft>
-              <a:buSzPct val="75000"/>
-              <a:buFont typeface="StarSymbol"/>
-              <a:buChar char="●"/>
-              <a:defRPr sz="2400">
-                <a:solidFill>
-                  <a:srgbClr val="000000"/>
-                </a:solidFill>
-                <a:latin typeface="Times New Roman" pitchFamily="18" charset="0"/>
-                <a:ea typeface="Microsoft YaHei" pitchFamily="34" charset="-122"/>
-              </a:defRPr>
-            </a:lvl8pPr>
-            <a:lvl9pPr marL="3886200" indent="-228600" eaLnBrk="0" fontAlgn="base" hangingPunct="0">
-              <a:spcBef>
-                <a:spcPct val="0"/>
-              </a:spcBef>
-              <a:spcAft>
-                <a:spcPts val="1413"/>
-              </a:spcAft>
-              <a:buSzPct val="75000"/>
-              <a:buFont typeface="StarSymbol"/>
-              <a:buChar char="●"/>
-              <a:defRPr sz="2400">
-                <a:solidFill>
-                  <a:srgbClr val="000000"/>
-                </a:solidFill>
-                <a:latin typeface="Times New Roman" pitchFamily="18" charset="0"/>
-                <a:ea typeface="Microsoft YaHei" pitchFamily="34" charset="-122"/>
-              </a:defRPr>
-            </a:lvl9pPr>
-          </a:lstStyle>
-          <a:p>
             <a:pPr algn="ctr" eaLnBrk="1">
               <a:spcAft>
                 <a:spcPct val="0"/>
@@ -13063,16 +13837,16 @@
               <a:buNone/>
             </a:pPr>
             <a:r>
-              <a:rPr lang="en-US" altLang="en-US" sz="3600">
+              <a:rPr lang="en-US" altLang="en-US" sz="3600" dirty="0">
                 <a:solidFill>
                   <a:srgbClr val="FFFFFF"/>
                 </a:solidFill>
                 <a:latin typeface="Tahoma" pitchFamily="34" charset="0"/>
                 <a:cs typeface="Tahoma" pitchFamily="34" charset="0"/>
               </a:rPr>
-              <a:t>Conclusion</a:t>
-            </a:r>
-            <a:endParaRPr lang="en-US" altLang="en-US" sz="2800">
+              <a:t>Quality Attributes (TODO 4)</a:t>
+            </a:r>
+            <a:endParaRPr lang="en-US" altLang="en-US" sz="2800" dirty="0">
               <a:solidFill>
                 <a:srgbClr val="FFFFFF"/>
               </a:solidFill>
@@ -13082,98 +13856,367 @@
           </a:p>
         </p:txBody>
       </p:sp>
+      <p:sp>
+        <p:nvSpPr>
+          <p:cNvPr id="3" name="TextBox 2">
+            <a:extLst>
+              <a:ext uri="{FF2B5EF4-FFF2-40B4-BE49-F238E27FC236}">
+                <a16:creationId xmlns:a16="http://schemas.microsoft.com/office/drawing/2014/main" id="{C6E6FDD9-2D49-799E-F950-4228F8EE3C46}"/>
+              </a:ext>
+            </a:extLst>
+          </p:cNvPr>
+          <p:cNvSpPr txBox="1"/>
+          <p:nvPr/>
+        </p:nvSpPr>
+        <p:spPr>
+          <a:xfrm>
+            <a:off x="303213" y="-1960095"/>
+            <a:ext cx="8662987" cy="7848302"/>
+          </a:xfrm>
+          <a:prstGeom prst="rect">
+            <a:avLst/>
+          </a:prstGeom>
+          <a:noFill/>
+        </p:spPr>
+        <p:txBody>
+          <a:bodyPr wrap="square">
+            <a:spAutoFit/>
+          </a:bodyPr>
+          <a:lstStyle/>
+          <a:p>
+            <a:pPr marL="342900" indent="-342900" algn="just" eaLnBrk="1">
+              <a:buFont typeface="+mj-lt"/>
+              <a:buAutoNum type="arabicPeriod"/>
+            </a:pPr>
+            <a:r>
+              <a:rPr lang="en-US" altLang="en-US" dirty="0" err="1">
+                <a:solidFill>
+                  <a:srgbClr val="1C1C1C"/>
+                </a:solidFill>
+                <a:latin typeface="Tahoma" pitchFamily="34" charset="0"/>
+                <a:cs typeface="Tahoma" pitchFamily="34" charset="0"/>
+              </a:rPr>
+              <a:t>Ç</a:t>
+            </a:r>
+            <a:endParaRPr lang="en-US" altLang="en-US" dirty="0">
+              <a:solidFill>
+                <a:srgbClr val="1C1C1C"/>
+              </a:solidFill>
+              <a:latin typeface="Tahoma" pitchFamily="34" charset="0"/>
+              <a:cs typeface="Tahoma" pitchFamily="34" charset="0"/>
+            </a:endParaRPr>
+          </a:p>
+          <a:p>
+            <a:pPr marL="342900" indent="-342900" algn="just" eaLnBrk="1">
+              <a:buFont typeface="+mj-lt"/>
+              <a:buAutoNum type="arabicPeriod"/>
+            </a:pPr>
+            <a:r>
+              <a:rPr lang="en-US" altLang="en-US" dirty="0">
+                <a:solidFill>
+                  <a:srgbClr val="1C1C1C"/>
+                </a:solidFill>
+                <a:latin typeface="Tahoma" pitchFamily="34" charset="0"/>
+                <a:cs typeface="Tahoma" pitchFamily="34" charset="0"/>
+              </a:rPr>
+              <a:t>P</a:t>
+            </a:r>
+          </a:p>
+          <a:p>
+            <a:pPr marL="342900" indent="-342900" algn="just" eaLnBrk="1">
+              <a:buFont typeface="+mj-lt"/>
+              <a:buAutoNum type="arabicPeriod"/>
+            </a:pPr>
+            <a:endParaRPr lang="en-US" altLang="en-US" dirty="0">
+              <a:solidFill>
+                <a:srgbClr val="1C1C1C"/>
+              </a:solidFill>
+              <a:latin typeface="Tahoma" pitchFamily="34" charset="0"/>
+              <a:cs typeface="Tahoma" pitchFamily="34" charset="0"/>
+            </a:endParaRPr>
+          </a:p>
+          <a:p>
+            <a:pPr marL="342900" indent="-342900" algn="just" eaLnBrk="1">
+              <a:buFont typeface="+mj-lt"/>
+              <a:buAutoNum type="arabicPeriod"/>
+            </a:pPr>
+            <a:endParaRPr lang="en-US" altLang="en-US" dirty="0">
+              <a:solidFill>
+                <a:srgbClr val="1C1C1C"/>
+              </a:solidFill>
+              <a:latin typeface="Tahoma" pitchFamily="34" charset="0"/>
+              <a:cs typeface="Tahoma" pitchFamily="34" charset="0"/>
+            </a:endParaRPr>
+          </a:p>
+          <a:p>
+            <a:pPr marL="342900" indent="-342900" algn="just" eaLnBrk="1">
+              <a:buFont typeface="+mj-lt"/>
+              <a:buAutoNum type="arabicPeriod"/>
+            </a:pPr>
+            <a:endParaRPr lang="en-US" altLang="en-US" dirty="0">
+              <a:solidFill>
+                <a:srgbClr val="1C1C1C"/>
+              </a:solidFill>
+              <a:latin typeface="Tahoma" pitchFamily="34" charset="0"/>
+              <a:cs typeface="Tahoma" pitchFamily="34" charset="0"/>
+            </a:endParaRPr>
+          </a:p>
+          <a:p>
+            <a:pPr marL="342900" indent="-342900" algn="just" eaLnBrk="1">
+              <a:buFont typeface="+mj-lt"/>
+              <a:buAutoNum type="arabicPeriod"/>
+            </a:pPr>
+            <a:endParaRPr lang="en-US" altLang="en-US" dirty="0">
+              <a:solidFill>
+                <a:srgbClr val="1C1C1C"/>
+              </a:solidFill>
+              <a:latin typeface="Tahoma" pitchFamily="34" charset="0"/>
+              <a:cs typeface="Tahoma" pitchFamily="34" charset="0"/>
+            </a:endParaRPr>
+          </a:p>
+          <a:p>
+            <a:pPr marL="342900" indent="-342900" algn="just" eaLnBrk="1">
+              <a:buFont typeface="+mj-lt"/>
+              <a:buAutoNum type="arabicPeriod"/>
+            </a:pPr>
+            <a:endParaRPr lang="en-US" altLang="en-US" dirty="0">
+              <a:solidFill>
+                <a:srgbClr val="1C1C1C"/>
+              </a:solidFill>
+              <a:latin typeface="Tahoma" pitchFamily="34" charset="0"/>
+              <a:cs typeface="Tahoma" pitchFamily="34" charset="0"/>
+            </a:endParaRPr>
+          </a:p>
+          <a:p>
+            <a:pPr marL="342900" indent="-342900" algn="just" eaLnBrk="1">
+              <a:buFont typeface="+mj-lt"/>
+              <a:buAutoNum type="arabicPeriod"/>
+            </a:pPr>
+            <a:endParaRPr lang="en-US" altLang="en-US" dirty="0">
+              <a:solidFill>
+                <a:srgbClr val="1C1C1C"/>
+              </a:solidFill>
+              <a:latin typeface="Tahoma" pitchFamily="34" charset="0"/>
+              <a:cs typeface="Tahoma" pitchFamily="34" charset="0"/>
+            </a:endParaRPr>
+          </a:p>
+          <a:p>
+            <a:pPr marL="342900" indent="-342900" algn="just" eaLnBrk="1">
+              <a:buFont typeface="+mj-lt"/>
+              <a:buAutoNum type="arabicPeriod"/>
+            </a:pPr>
+            <a:endParaRPr lang="en-US" altLang="en-US" dirty="0">
+              <a:solidFill>
+                <a:srgbClr val="1C1C1C"/>
+              </a:solidFill>
+              <a:latin typeface="Tahoma" pitchFamily="34" charset="0"/>
+              <a:cs typeface="Tahoma" pitchFamily="34" charset="0"/>
+            </a:endParaRPr>
+          </a:p>
+          <a:p>
+            <a:pPr marL="342900" indent="-342900" algn="just" eaLnBrk="1">
+              <a:buFont typeface="+mj-lt"/>
+              <a:buAutoNum type="arabicPeriod"/>
+            </a:pPr>
+            <a:endParaRPr lang="en-US" altLang="en-US" dirty="0">
+              <a:solidFill>
+                <a:srgbClr val="1C1C1C"/>
+              </a:solidFill>
+              <a:latin typeface="Tahoma" pitchFamily="34" charset="0"/>
+              <a:cs typeface="Tahoma" pitchFamily="34" charset="0"/>
+            </a:endParaRPr>
+          </a:p>
+          <a:p>
+            <a:pPr marL="342900" indent="-342900" algn="just" eaLnBrk="1">
+              <a:buFont typeface="+mj-lt"/>
+              <a:buAutoNum type="arabicPeriod"/>
+            </a:pPr>
+            <a:endParaRPr lang="en-US" altLang="en-US" dirty="0">
+              <a:solidFill>
+                <a:srgbClr val="1C1C1C"/>
+              </a:solidFill>
+              <a:latin typeface="Tahoma" pitchFamily="34" charset="0"/>
+              <a:cs typeface="Tahoma" pitchFamily="34" charset="0"/>
+            </a:endParaRPr>
+          </a:p>
+          <a:p>
+            <a:pPr marL="342900" indent="-342900" algn="just" eaLnBrk="1">
+              <a:buFont typeface="+mj-lt"/>
+              <a:buAutoNum type="arabicPeriod"/>
+            </a:pPr>
+            <a:r>
+              <a:rPr lang="en-US" altLang="en-US" dirty="0">
+                <a:solidFill>
+                  <a:srgbClr val="1C1C1C"/>
+                </a:solidFill>
+                <a:latin typeface="Tahoma" pitchFamily="34" charset="0"/>
+                <a:cs typeface="Tahoma" pitchFamily="34" charset="0"/>
+              </a:rPr>
+              <a:t>Explainability</a:t>
+            </a:r>
+          </a:p>
+          <a:p>
+            <a:pPr marL="800100" lvl="1" indent="-342900" algn="just" eaLnBrk="1">
+              <a:buFont typeface="Courier New" panose="02070309020205020404" pitchFamily="49" charset="0"/>
+              <a:buChar char="o"/>
+            </a:pPr>
+            <a:r>
+              <a:rPr lang="en-US" altLang="en-US" dirty="0">
+                <a:solidFill>
+                  <a:srgbClr val="1C1C1C"/>
+                </a:solidFill>
+                <a:latin typeface="Tahoma" pitchFamily="34" charset="0"/>
+                <a:cs typeface="Tahoma" pitchFamily="34" charset="0"/>
+              </a:rPr>
+              <a:t>Essential for transparency, traceability, justifiability, and credibility.</a:t>
+            </a:r>
+          </a:p>
+          <a:p>
+            <a:pPr marL="800100" lvl="1" indent="-342900" algn="just" eaLnBrk="1">
+              <a:buFont typeface="Courier New" panose="02070309020205020404" pitchFamily="49" charset="0"/>
+              <a:buChar char="o"/>
+            </a:pPr>
+            <a:r>
+              <a:rPr lang="en-US" altLang="en-US" dirty="0">
+                <a:solidFill>
+                  <a:srgbClr val="1C1C1C"/>
+                </a:solidFill>
+                <a:latin typeface="Tahoma" pitchFamily="34" charset="0"/>
+                <a:cs typeface="Tahoma" pitchFamily="34" charset="0"/>
+              </a:rPr>
+              <a:t>Readable and descriptive names are used for each fact and rule, allowing for clear understanding of the system’s reasoning during debug. Some explanations are also printed, and many do so </a:t>
+            </a:r>
+            <a:r>
+              <a:rPr lang="en-US" altLang="en-US">
+                <a:solidFill>
+                  <a:srgbClr val="1C1C1C"/>
+                </a:solidFill>
+                <a:latin typeface="Tahoma" pitchFamily="34" charset="0"/>
+                <a:cs typeface="Tahoma" pitchFamily="34" charset="0"/>
+              </a:rPr>
+              <a:t>through explanation facts.</a:t>
+            </a:r>
+            <a:endParaRPr lang="en-US" altLang="en-US" dirty="0">
+              <a:solidFill>
+                <a:srgbClr val="1C1C1C"/>
+              </a:solidFill>
+              <a:latin typeface="Tahoma" pitchFamily="34" charset="0"/>
+              <a:cs typeface="Tahoma" pitchFamily="34" charset="0"/>
+            </a:endParaRPr>
+          </a:p>
+          <a:p>
+            <a:pPr marL="800100" lvl="1" indent="-342900" algn="just" eaLnBrk="1">
+              <a:buFont typeface="Courier New" panose="02070309020205020404" pitchFamily="49" charset="0"/>
+              <a:buChar char="o"/>
+            </a:pPr>
+            <a:r>
+              <a:rPr lang="en-US" altLang="en-US" dirty="0">
+                <a:solidFill>
+                  <a:srgbClr val="1C1C1C"/>
+                </a:solidFill>
+                <a:latin typeface="Tahoma" pitchFamily="34" charset="0"/>
+                <a:cs typeface="Tahoma" pitchFamily="34" charset="0"/>
+              </a:rPr>
+              <a:t>Explainability is very helpful for users seeking to understand the expert system’s reasoning. Making the system explainable thus has a positive impact.</a:t>
+            </a:r>
+          </a:p>
+          <a:p>
+            <a:pPr marL="342900" indent="-342900" algn="just" eaLnBrk="1">
+              <a:buFont typeface="+mj-lt"/>
+              <a:buAutoNum type="arabicPeriod"/>
+            </a:pPr>
+            <a:r>
+              <a:rPr lang="en-US" altLang="en-US" dirty="0">
+                <a:solidFill>
+                  <a:srgbClr val="1C1C1C"/>
+                </a:solidFill>
+                <a:latin typeface="Tahoma" pitchFamily="34" charset="0"/>
+                <a:cs typeface="Tahoma" pitchFamily="34" charset="0"/>
+              </a:rPr>
+              <a:t>Modifiability</a:t>
+            </a:r>
+          </a:p>
+          <a:p>
+            <a:pPr marL="800100" lvl="1" indent="-342900" algn="just" eaLnBrk="1">
+              <a:buFont typeface="Courier New" panose="02070309020205020404" pitchFamily="49" charset="0"/>
+              <a:buChar char="o"/>
+            </a:pPr>
+            <a:r>
+              <a:rPr lang="en-US" altLang="en-US" dirty="0">
+                <a:solidFill>
+                  <a:srgbClr val="1C1C1C"/>
+                </a:solidFill>
+                <a:latin typeface="Tahoma" pitchFamily="34" charset="0"/>
+                <a:cs typeface="Tahoma" pitchFamily="34" charset="0"/>
+              </a:rPr>
+              <a:t>Important for long-term maintainability.</a:t>
+            </a:r>
+          </a:p>
+          <a:p>
+            <a:pPr marL="800100" lvl="1" indent="-342900" algn="just" eaLnBrk="1">
+              <a:buFont typeface="Courier New" panose="02070309020205020404" pitchFamily="49" charset="0"/>
+              <a:buChar char="o"/>
+            </a:pPr>
+            <a:r>
+              <a:rPr lang="en-US" altLang="en-US" dirty="0">
+                <a:solidFill>
+                  <a:srgbClr val="1C1C1C"/>
+                </a:solidFill>
+                <a:latin typeface="Tahoma" pitchFamily="34" charset="0"/>
+                <a:cs typeface="Tahoma" pitchFamily="34" charset="0"/>
+              </a:rPr>
+              <a:t>Ripple effects when making modifications are prevented: all input fact values can be modified in one place, the </a:t>
+            </a:r>
+            <a:r>
+              <a:rPr lang="en-US" altLang="en-US" dirty="0" err="1">
+                <a:solidFill>
+                  <a:srgbClr val="1C1C1C"/>
+                </a:solidFill>
+                <a:latin typeface="Tahoma" pitchFamily="34" charset="0"/>
+                <a:cs typeface="Tahoma" pitchFamily="34" charset="0"/>
+              </a:rPr>
+              <a:t>factbase</a:t>
+            </a:r>
+            <a:r>
+              <a:rPr lang="en-US" altLang="en-US" dirty="0">
+                <a:solidFill>
+                  <a:srgbClr val="1C1C1C"/>
+                </a:solidFill>
+                <a:latin typeface="Tahoma" pitchFamily="34" charset="0"/>
+                <a:cs typeface="Tahoma" pitchFamily="34" charset="0"/>
+              </a:rPr>
+              <a:t>. This makes the code quick and easy to modify. Salience is correctly used as a meta-rule to separate the setup, the reasoning, and the conclusion from each other.</a:t>
+            </a:r>
+          </a:p>
+          <a:p>
+            <a:pPr marL="800100" lvl="1" indent="-342900" algn="just" eaLnBrk="1">
+              <a:buFont typeface="Courier New" panose="02070309020205020404" pitchFamily="49" charset="0"/>
+              <a:buChar char="o"/>
+            </a:pPr>
+            <a:r>
+              <a:rPr lang="en-US" altLang="en-US" dirty="0">
+                <a:solidFill>
+                  <a:srgbClr val="1C1C1C"/>
+                </a:solidFill>
+                <a:latin typeface="Tahoma" pitchFamily="34" charset="0"/>
+                <a:cs typeface="Tahoma" pitchFamily="34" charset="0"/>
+              </a:rPr>
+              <a:t>Improving modifiability helps support a system’s long-term success, and is thus a positive force of the development process.</a:t>
+            </a:r>
+          </a:p>
+        </p:txBody>
+      </p:sp>
     </p:spTree>
+    <p:extLst>
+      <p:ext uri="{BB962C8B-B14F-4D97-AF65-F5344CB8AC3E}">
+        <p14:creationId xmlns:p14="http://schemas.microsoft.com/office/powerpoint/2010/main" val="1815365387"/>
+      </p:ext>
+    </p:extLst>
   </p:cSld>
   <p:clrMapOvr>
     <a:masterClrMapping/>
   </p:clrMapOvr>
   <p:transition spd="slow"/>
-  <p:timing>
-    <p:tnLst>
-      <p:par>
-        <p:cTn id="1" dur="indefinite" restart="never" nodeType="tmRoot">
-          <p:childTnLst>
-            <p:seq concurrent="1" nextAc="seek">
-              <p:cTn id="2" dur="indefinite" nodeType="mainSeq">
-                <p:childTnLst>
-                  <p:par>
-                    <p:cTn id="3" fill="hold" nodeType="clickPar">
-                      <p:stCondLst>
-                        <p:cond delay="indefinite"/>
-                      </p:stCondLst>
-                      <p:childTnLst>
-                        <p:par>
-                          <p:cTn id="4" fill="hold" nodeType="withGroup">
-                            <p:stCondLst>
-                              <p:cond delay="0"/>
-                            </p:stCondLst>
-                            <p:childTnLst>
-                              <p:par>
-                                <p:cTn id="5" presetID="4" presetClass="entr" presetSubtype="16" fill="hold" grpId="0" nodeType="clickEffect">
-                                  <p:stCondLst>
-                                    <p:cond delay="0"/>
-                                  </p:stCondLst>
-                                  <p:childTnLst>
-                                    <p:set>
-                                      <p:cBhvr>
-                                        <p:cTn id="6" dur="1" fill="hold">
-                                          <p:stCondLst>
-                                            <p:cond delay="0"/>
-                                          </p:stCondLst>
-                                        </p:cTn>
-                                        <p:tgtEl>
-                                          <p:spTgt spid="5"/>
-                                        </p:tgtEl>
-                                        <p:attrNameLst>
-                                          <p:attrName>style.visibility</p:attrName>
-                                        </p:attrNameLst>
-                                      </p:cBhvr>
-                                      <p:to>
-                                        <p:strVal val="visible"/>
-                                      </p:to>
-                                    </p:set>
-                                    <p:animEffect transition="in" filter="box(in)">
-                                      <p:cBhvr>
-                                        <p:cTn id="7" dur="500"/>
-                                        <p:tgtEl>
-                                          <p:spTgt spid="5"/>
-                                        </p:tgtEl>
-                                      </p:cBhvr>
-                                    </p:animEffect>
-                                  </p:childTnLst>
-                                </p:cTn>
-                              </p:par>
-                            </p:childTnLst>
-                          </p:cTn>
-                        </p:par>
-                      </p:childTnLst>
-                    </p:cTn>
-                  </p:par>
-                </p:childTnLst>
-              </p:cTn>
-              <p:prevCondLst>
-                <p:cond evt="onPrev" delay="0">
-                  <p:tgtEl>
-                    <p:sldTgt/>
-                  </p:tgtEl>
-                </p:cond>
-              </p:prevCondLst>
-              <p:nextCondLst>
-                <p:cond evt="onNext" delay="0">
-                  <p:tgtEl>
-                    <p:sldTgt/>
-                  </p:tgtEl>
-                </p:cond>
-              </p:nextCondLst>
-            </p:seq>
-          </p:childTnLst>
-        </p:cTn>
-      </p:par>
-    </p:tnLst>
-    <p:bldLst>
-      <p:bldP spid="5" grpId="0" autoUpdateAnimBg="0"/>
-    </p:bldLst>
-  </p:timing>
 </p:sld>
 </file>
 

--- a/A-D2.pptx
+++ b/A-D2.pptx
@@ -871,7 +871,7 @@
               <a:pPr>
                 <a:defRPr/>
               </a:pPr>
-              <a:t>3/30/26</a:t>
+              <a:t>4/9/26</a:t>
             </a:fld>
             <a:endParaRPr lang="en-US" altLang="en-US"/>
           </a:p>
@@ -1073,7 +1073,7 @@
               <a:pPr>
                 <a:defRPr/>
               </a:pPr>
-              <a:t>3/30/26</a:t>
+              <a:t>4/9/26</a:t>
             </a:fld>
             <a:endParaRPr lang="en-US" altLang="en-US"/>
           </a:p>
@@ -1285,7 +1285,7 @@
               <a:pPr>
                 <a:defRPr/>
               </a:pPr>
-              <a:t>3/30/26</a:t>
+              <a:t>4/9/26</a:t>
             </a:fld>
             <a:endParaRPr lang="en-US" altLang="en-US"/>
           </a:p>
@@ -1505,7 +1505,7 @@
               <a:pPr>
                 <a:defRPr/>
               </a:pPr>
-              <a:t>3/30/26</a:t>
+              <a:t>4/9/26</a:t>
             </a:fld>
             <a:endParaRPr lang="en-US" altLang="en-US"/>
           </a:p>
@@ -1707,7 +1707,7 @@
               <a:pPr>
                 <a:defRPr/>
               </a:pPr>
-              <a:t>3/30/26</a:t>
+              <a:t>4/9/26</a:t>
             </a:fld>
             <a:endParaRPr lang="en-US" altLang="en-US"/>
           </a:p>
@@ -1932,7 +1932,7 @@
               <a:pPr>
                 <a:defRPr/>
               </a:pPr>
-              <a:t>3/30/26</a:t>
+              <a:t>4/9/26</a:t>
             </a:fld>
             <a:endParaRPr lang="en-US" altLang="en-US"/>
           </a:p>
@@ -2251,7 +2251,7 @@
               <a:pPr>
                 <a:defRPr/>
               </a:pPr>
-              <a:t>3/30/26</a:t>
+              <a:t>4/9/26</a:t>
             </a:fld>
             <a:endParaRPr lang="en-US" altLang="en-US"/>
           </a:p>
@@ -2709,7 +2709,7 @@
               <a:pPr>
                 <a:defRPr/>
               </a:pPr>
-              <a:t>3/30/26</a:t>
+              <a:t>4/9/26</a:t>
             </a:fld>
             <a:endParaRPr lang="en-US" altLang="en-US"/>
           </a:p>
@@ -2860,7 +2860,7 @@
               <a:pPr>
                 <a:defRPr/>
               </a:pPr>
-              <a:t>3/30/26</a:t>
+              <a:t>4/9/26</a:t>
             </a:fld>
             <a:endParaRPr lang="en-US" altLang="en-US"/>
           </a:p>
@@ -2989,7 +2989,7 @@
               <a:pPr>
                 <a:defRPr/>
               </a:pPr>
-              <a:t>3/30/26</a:t>
+              <a:t>4/9/26</a:t>
             </a:fld>
             <a:endParaRPr lang="en-US" altLang="en-US"/>
           </a:p>
@@ -3298,7 +3298,7 @@
               <a:pPr>
                 <a:defRPr/>
               </a:pPr>
-              <a:t>3/30/26</a:t>
+              <a:t>4/9/26</a:t>
             </a:fld>
             <a:endParaRPr lang="en-US" altLang="en-US"/>
           </a:p>
@@ -3500,7 +3500,7 @@
               <a:pPr>
                 <a:defRPr/>
               </a:pPr>
-              <a:t>3/30/26</a:t>
+              <a:t>4/9/26</a:t>
             </a:fld>
             <a:endParaRPr lang="en-US" altLang="en-US"/>
           </a:p>
@@ -3787,7 +3787,7 @@
               <a:pPr>
                 <a:defRPr/>
               </a:pPr>
-              <a:t>3/30/26</a:t>
+              <a:t>4/9/26</a:t>
             </a:fld>
             <a:endParaRPr lang="en-US" altLang="en-US"/>
           </a:p>
@@ -3989,7 +3989,7 @@
               <a:pPr>
                 <a:defRPr/>
               </a:pPr>
-              <a:t>3/30/26</a:t>
+              <a:t>4/9/26</a:t>
             </a:fld>
             <a:endParaRPr lang="en-US" altLang="en-US"/>
           </a:p>
@@ -4201,7 +4201,7 @@
               <a:pPr>
                 <a:defRPr/>
               </a:pPr>
-              <a:t>3/30/26</a:t>
+              <a:t>4/9/26</a:t>
             </a:fld>
             <a:endParaRPr lang="en-US" altLang="en-US"/>
           </a:p>
@@ -4469,7 +4469,7 @@
               <a:pPr>
                 <a:defRPr/>
               </a:pPr>
-              <a:t>3/30/26</a:t>
+              <a:t>4/9/26</a:t>
             </a:fld>
             <a:endParaRPr lang="en-US" altLang="en-US"/>
           </a:p>
@@ -4694,7 +4694,7 @@
               <a:pPr>
                 <a:defRPr/>
               </a:pPr>
-              <a:t>3/30/26</a:t>
+              <a:t>4/9/26</a:t>
             </a:fld>
             <a:endParaRPr lang="en-US" altLang="en-US"/>
           </a:p>
@@ -5013,7 +5013,7 @@
               <a:pPr>
                 <a:defRPr/>
               </a:pPr>
-              <a:t>3/30/26</a:t>
+              <a:t>4/9/26</a:t>
             </a:fld>
             <a:endParaRPr lang="en-US" altLang="en-US"/>
           </a:p>
@@ -5471,7 +5471,7 @@
               <a:pPr>
                 <a:defRPr/>
               </a:pPr>
-              <a:t>3/30/26</a:t>
+              <a:t>4/9/26</a:t>
             </a:fld>
             <a:endParaRPr lang="en-US" altLang="en-US"/>
           </a:p>
@@ -5622,7 +5622,7 @@
               <a:pPr>
                 <a:defRPr/>
               </a:pPr>
-              <a:t>3/30/26</a:t>
+              <a:t>4/9/26</a:t>
             </a:fld>
             <a:endParaRPr lang="en-US" altLang="en-US"/>
           </a:p>
@@ -5751,7 +5751,7 @@
               <a:pPr>
                 <a:defRPr/>
               </a:pPr>
-              <a:t>3/30/26</a:t>
+              <a:t>4/9/26</a:t>
             </a:fld>
             <a:endParaRPr lang="en-US" altLang="en-US"/>
           </a:p>
@@ -6060,7 +6060,7 @@
               <a:pPr>
                 <a:defRPr/>
               </a:pPr>
-              <a:t>3/30/26</a:t>
+              <a:t>4/9/26</a:t>
             </a:fld>
             <a:endParaRPr lang="en-US" altLang="en-US"/>
           </a:p>
@@ -6347,7 +6347,7 @@
               <a:pPr>
                 <a:defRPr/>
               </a:pPr>
-              <a:t>3/30/26</a:t>
+              <a:t>4/9/26</a:t>
             </a:fld>
             <a:endParaRPr lang="en-US" altLang="en-US"/>
           </a:p>
@@ -6670,7 +6670,7 @@
               <a:pPr>
                 <a:defRPr/>
               </a:pPr>
-              <a:t>3/30/26</a:t>
+              <a:t>4/9/26</a:t>
             </a:fld>
             <a:endParaRPr lang="en-US" altLang="en-US"/>
           </a:p>
@@ -7766,7 +7766,7 @@
               <a:pPr>
                 <a:defRPr/>
               </a:pPr>
-              <a:t>3/30/26</a:t>
+              <a:t>4/9/26</a:t>
             </a:fld>
             <a:endParaRPr lang="en-US" altLang="en-US"/>
           </a:p>
@@ -10520,7 +10520,7 @@
         <p:spPr bwMode="auto">
           <a:xfrm>
             <a:off x="303213" y="1336675"/>
-            <a:ext cx="8662987" cy="1629756"/>
+            <a:ext cx="8662987" cy="1937532"/>
           </a:xfrm>
           <a:prstGeom prst="rect">
             <a:avLst/>
@@ -10716,7 +10716,7 @@
                 <a:latin typeface="Tahoma" pitchFamily="34" charset="0"/>
                 <a:cs typeface="Tahoma" pitchFamily="34" charset="0"/>
               </a:rPr>
-              <a:t>Although I performed very well and received a good grade, a major part of my expert system that must change is the lack of interactivity, as brought up to me in the D1 demo feedback. I will thus allow users to interact with my expert system directly through the CLI rather than by expecting them to add, modify or remove facts from the database.</a:t>
+              <a:t>Although I performed very well and received a good grade, a major part of my expert system that must change is the lack of interactivity, as brought up to me in the D1 demo feedback. I will thus allow users to interact with my expert system directly through the CLI rather than by expecting them to add, modify or remove facts from the database (aside from those that rarely need to change).</a:t>
             </a:r>
           </a:p>
         </p:txBody>
@@ -12856,7 +12856,7 @@
         <p:spPr>
           <a:xfrm>
             <a:off x="303213" y="1050925"/>
-            <a:ext cx="8662987" cy="3416320"/>
+            <a:ext cx="8662987" cy="3693319"/>
           </a:xfrm>
           <a:prstGeom prst="rect">
             <a:avLst/>
@@ -12878,17 +12878,55 @@
                 <a:latin typeface="Tahoma" pitchFamily="34" charset="0"/>
                 <a:cs typeface="Tahoma" pitchFamily="34" charset="0"/>
               </a:rPr>
-              <a:t>Indicators were replaced by standalone fuzzy facts (with their own templates), each with a fuzzy membership function. Fuzziness values were also assigned, in addition to certainty factors. Changes in inflation, real GDP growth rates and unemployment are significant, even minimal ones. Thus, small fuzziness values of 0.1, 0.1 and 0.2 were respectively assigned. Potential GDP growth rate is more conceptual and thus matters a bit less strictly, and expected inflation is obtained from consumer sentiment, which is a bit of a loose indicator. Both received fuzziness values of 0.3. Almost every rule had to be modified or replaced to accommodate the use of fuzzy facts. Some rules were completely deleted: they tried to categorize number values into linguistic ones, which was redundant (fuzzy facts do this automatically). The latter considerably improved interest rate decisions, which are based on multiple input factors that may be contradicting one another.</a:t>
-            </a:r>
+              <a:t>Indicators were replaced by standalone fuzzy facts (with their own templates), each with a fuzzy membership function. Fuzziness values were also assigned when asserted, in addition to certainty factors. Changes in inflation, real GDP growth rates and unemployment are significant, even minimal ones. Thus, small fuzziness triangles with 0.1, 0.1 and 0.2 half bottom side lengths were respectively assigned. Potential GDP growth rate is more conceptual and thus matters a bit less strictly, and expected inflation is obtained from consumer sentiment, which is a bit of a loose indicator. Both received fuzziness triangles with half bottom side lengths of 0.3. Almost every rule had to be modified or replaced to accommodate the use of fuzzy facts. Some rules were completely deleted: they tried to categorize number values into linguistic ones, which was redundant (fuzzy facts do this automatically). The latter considerably improved interest rate decisions, which are based on multiple input factors that may be contradicting one another.</a:t>
+            </a:r>
+          </a:p>
+        </p:txBody>
+      </p:sp>
+      <p:sp>
+        <p:nvSpPr>
+          <p:cNvPr id="9" name="TextBox 8">
+            <a:extLst>
+              <a:ext uri="{FF2B5EF4-FFF2-40B4-BE49-F238E27FC236}">
+                <a16:creationId xmlns:a16="http://schemas.microsoft.com/office/drawing/2014/main" id="{BFF84538-DA5E-DDD9-DC8D-56752AD5B7A3}"/>
+              </a:ext>
+            </a:extLst>
+          </p:cNvPr>
+          <p:cNvSpPr txBox="1"/>
+          <p:nvPr/>
+        </p:nvSpPr>
+        <p:spPr>
+          <a:xfrm>
+            <a:off x="4394200" y="4877594"/>
+            <a:ext cx="2463800" cy="1200329"/>
+          </a:xfrm>
+          <a:prstGeom prst="rect">
+            <a:avLst/>
+          </a:prstGeom>
+          <a:noFill/>
+        </p:spPr>
+        <p:txBody>
+          <a:bodyPr wrap="square">
+            <a:spAutoFit/>
+          </a:bodyPr>
+          <a:lstStyle/>
+          <a:p>
+            <a:r>
+              <a:rPr lang="en-US" dirty="0">
+                <a:hlinkClick r:id="rId3"/>
+              </a:rPr>
+              <a:t>https://github.com/Mikachupichu/central-banking-expert-system/tree/TODO3</a:t>
+            </a:r>
+            <a:endParaRPr lang="en-US" dirty="0"/>
           </a:p>
         </p:txBody>
       </p:sp>
       <p:pic>
         <p:nvPicPr>
-          <p:cNvPr id="7" name="Picture 6">
+          <p:cNvPr id="2" name="Picture 1">
             <a:extLst>
               <a:ext uri="{FF2B5EF4-FFF2-40B4-BE49-F238E27FC236}">
-                <a16:creationId xmlns:a16="http://schemas.microsoft.com/office/drawing/2014/main" id="{01D23C6C-35F9-DD1C-62AB-267EAAF4241F}"/>
+                <a16:creationId xmlns:a16="http://schemas.microsoft.com/office/drawing/2014/main" id="{3137933F-1BA4-3BB0-B044-AD3E7E135CA0}"/>
               </a:ext>
             </a:extLst>
           </p:cNvPr>
@@ -12898,59 +12936,51 @@
           <p:nvPr/>
         </p:nvPicPr>
         <p:blipFill>
-          <a:blip r:embed="rId3"/>
+          <a:blip r:embed="rId4"/>
           <a:stretch>
             <a:fillRect/>
           </a:stretch>
         </p:blipFill>
         <p:spPr>
           <a:xfrm>
-            <a:off x="588963" y="4467245"/>
-            <a:ext cx="3527612" cy="2479873"/>
+            <a:off x="330200" y="4744244"/>
+            <a:ext cx="4064000" cy="2011925"/>
           </a:xfrm>
           <a:prstGeom prst="rect">
             <a:avLst/>
           </a:prstGeom>
         </p:spPr>
       </p:pic>
-      <p:sp>
-        <p:nvSpPr>
-          <p:cNvPr id="9" name="TextBox 8">
+      <p:pic>
+        <p:nvPicPr>
+          <p:cNvPr id="3" name="Picture 2">
             <a:extLst>
               <a:ext uri="{FF2B5EF4-FFF2-40B4-BE49-F238E27FC236}">
-                <a16:creationId xmlns:a16="http://schemas.microsoft.com/office/drawing/2014/main" id="{BFF84538-DA5E-DDD9-DC8D-56752AD5B7A3}"/>
+                <a16:creationId xmlns:a16="http://schemas.microsoft.com/office/drawing/2014/main" id="{A7C17BB0-045C-E9DC-716F-A087662AE693}"/>
               </a:ext>
             </a:extLst>
           </p:cNvPr>
-          <p:cNvSpPr txBox="1"/>
+          <p:cNvPicPr>
+            <a:picLocks noChangeAspect="1"/>
+          </p:cNvPicPr>
           <p:nvPr/>
-        </p:nvSpPr>
+        </p:nvPicPr>
+        <p:blipFill>
+          <a:blip r:embed="rId5"/>
+          <a:stretch>
+            <a:fillRect/>
+          </a:stretch>
+        </p:blipFill>
         <p:spPr>
           <a:xfrm>
-            <a:off x="4394200" y="4737685"/>
-            <a:ext cx="4572000" cy="646331"/>
+            <a:off x="6858000" y="4314210"/>
+            <a:ext cx="2286000" cy="2537184"/>
           </a:xfrm>
           <a:prstGeom prst="rect">
             <a:avLst/>
           </a:prstGeom>
-          <a:noFill/>
-        </p:spPr>
-        <p:txBody>
-          <a:bodyPr wrap="square">
-            <a:spAutoFit/>
-          </a:bodyPr>
-          <a:lstStyle/>
-          <a:p>
-            <a:r>
-              <a:rPr lang="en-US" dirty="0">
-                <a:hlinkClick r:id="rId4"/>
-              </a:rPr>
-              <a:t>https://github.com/Mikachupichu/central-banking-expert-system/tree/TODO3</a:t>
-            </a:r>
-            <a:endParaRPr lang="en-US" dirty="0"/>
-          </a:p>
-        </p:txBody>
-      </p:sp>
+        </p:spPr>
+      </p:pic>
     </p:spTree>
     <p:extLst>
       <p:ext uri="{BB962C8B-B14F-4D97-AF65-F5344CB8AC3E}">
@@ -14084,25 +14114,8 @@
                 <a:latin typeface="Tahoma" pitchFamily="34" charset="0"/>
                 <a:cs typeface="Tahoma" pitchFamily="34" charset="0"/>
               </a:rPr>
-              <a:t>Readable and descriptive names are used for each fact and rule, allowing for clear understanding of the system’s reasoning during debug. Some explanations are also printed, and many do so </a:t>
-            </a:r>
-            <a:r>
-              <a:rPr lang="en-US" altLang="en-US">
-                <a:solidFill>
-                  <a:srgbClr val="1C1C1C"/>
-                </a:solidFill>
-                <a:latin typeface="Tahoma" pitchFamily="34" charset="0"/>
-                <a:cs typeface="Tahoma" pitchFamily="34" charset="0"/>
-              </a:rPr>
-              <a:t>through explanation facts.</a:t>
-            </a:r>
-            <a:endParaRPr lang="en-US" altLang="en-US" dirty="0">
-              <a:solidFill>
-                <a:srgbClr val="1C1C1C"/>
-              </a:solidFill>
-              <a:latin typeface="Tahoma" pitchFamily="34" charset="0"/>
-              <a:cs typeface="Tahoma" pitchFamily="34" charset="0"/>
-            </a:endParaRPr>
+              <a:t>Readable and descriptive names are used for each fact and rule, allowing for clear understanding of the system’s reasoning during debug. Some explanations are also printed, and many do so through explanation facts.</a:t>
+            </a:r>
           </a:p>
           <a:p>
             <a:pPr marL="800100" lvl="1" indent="-342900" algn="just" eaLnBrk="1">

--- a/A-D2.pptx
+++ b/A-D2.pptx
@@ -871,7 +871,7 @@
               <a:pPr>
                 <a:defRPr/>
               </a:pPr>
-              <a:t>4/9/26</a:t>
+              <a:t>4/12/26</a:t>
             </a:fld>
             <a:endParaRPr lang="en-US" altLang="en-US"/>
           </a:p>
@@ -1073,7 +1073,7 @@
               <a:pPr>
                 <a:defRPr/>
               </a:pPr>
-              <a:t>4/9/26</a:t>
+              <a:t>4/12/26</a:t>
             </a:fld>
             <a:endParaRPr lang="en-US" altLang="en-US"/>
           </a:p>
@@ -1285,7 +1285,7 @@
               <a:pPr>
                 <a:defRPr/>
               </a:pPr>
-              <a:t>4/9/26</a:t>
+              <a:t>4/12/26</a:t>
             </a:fld>
             <a:endParaRPr lang="en-US" altLang="en-US"/>
           </a:p>
@@ -1505,7 +1505,7 @@
               <a:pPr>
                 <a:defRPr/>
               </a:pPr>
-              <a:t>4/9/26</a:t>
+              <a:t>4/12/26</a:t>
             </a:fld>
             <a:endParaRPr lang="en-US" altLang="en-US"/>
           </a:p>
@@ -1707,7 +1707,7 @@
               <a:pPr>
                 <a:defRPr/>
               </a:pPr>
-              <a:t>4/9/26</a:t>
+              <a:t>4/12/26</a:t>
             </a:fld>
             <a:endParaRPr lang="en-US" altLang="en-US"/>
           </a:p>
@@ -1932,7 +1932,7 @@
               <a:pPr>
                 <a:defRPr/>
               </a:pPr>
-              <a:t>4/9/26</a:t>
+              <a:t>4/12/26</a:t>
             </a:fld>
             <a:endParaRPr lang="en-US" altLang="en-US"/>
           </a:p>
@@ -2251,7 +2251,7 @@
               <a:pPr>
                 <a:defRPr/>
               </a:pPr>
-              <a:t>4/9/26</a:t>
+              <a:t>4/12/26</a:t>
             </a:fld>
             <a:endParaRPr lang="en-US" altLang="en-US"/>
           </a:p>
@@ -2709,7 +2709,7 @@
               <a:pPr>
                 <a:defRPr/>
               </a:pPr>
-              <a:t>4/9/26</a:t>
+              <a:t>4/12/26</a:t>
             </a:fld>
             <a:endParaRPr lang="en-US" altLang="en-US"/>
           </a:p>
@@ -2860,7 +2860,7 @@
               <a:pPr>
                 <a:defRPr/>
               </a:pPr>
-              <a:t>4/9/26</a:t>
+              <a:t>4/12/26</a:t>
             </a:fld>
             <a:endParaRPr lang="en-US" altLang="en-US"/>
           </a:p>
@@ -2989,7 +2989,7 @@
               <a:pPr>
                 <a:defRPr/>
               </a:pPr>
-              <a:t>4/9/26</a:t>
+              <a:t>4/12/26</a:t>
             </a:fld>
             <a:endParaRPr lang="en-US" altLang="en-US"/>
           </a:p>
@@ -3298,7 +3298,7 @@
               <a:pPr>
                 <a:defRPr/>
               </a:pPr>
-              <a:t>4/9/26</a:t>
+              <a:t>4/12/26</a:t>
             </a:fld>
             <a:endParaRPr lang="en-US" altLang="en-US"/>
           </a:p>
@@ -3500,7 +3500,7 @@
               <a:pPr>
                 <a:defRPr/>
               </a:pPr>
-              <a:t>4/9/26</a:t>
+              <a:t>4/12/26</a:t>
             </a:fld>
             <a:endParaRPr lang="en-US" altLang="en-US"/>
           </a:p>
@@ -3787,7 +3787,7 @@
               <a:pPr>
                 <a:defRPr/>
               </a:pPr>
-              <a:t>4/9/26</a:t>
+              <a:t>4/12/26</a:t>
             </a:fld>
             <a:endParaRPr lang="en-US" altLang="en-US"/>
           </a:p>
@@ -3989,7 +3989,7 @@
               <a:pPr>
                 <a:defRPr/>
               </a:pPr>
-              <a:t>4/9/26</a:t>
+              <a:t>4/12/26</a:t>
             </a:fld>
             <a:endParaRPr lang="en-US" altLang="en-US"/>
           </a:p>
@@ -4201,7 +4201,7 @@
               <a:pPr>
                 <a:defRPr/>
               </a:pPr>
-              <a:t>4/9/26</a:t>
+              <a:t>4/12/26</a:t>
             </a:fld>
             <a:endParaRPr lang="en-US" altLang="en-US"/>
           </a:p>
@@ -4469,7 +4469,7 @@
               <a:pPr>
                 <a:defRPr/>
               </a:pPr>
-              <a:t>4/9/26</a:t>
+              <a:t>4/12/26</a:t>
             </a:fld>
             <a:endParaRPr lang="en-US" altLang="en-US"/>
           </a:p>
@@ -4694,7 +4694,7 @@
               <a:pPr>
                 <a:defRPr/>
               </a:pPr>
-              <a:t>4/9/26</a:t>
+              <a:t>4/12/26</a:t>
             </a:fld>
             <a:endParaRPr lang="en-US" altLang="en-US"/>
           </a:p>
@@ -5013,7 +5013,7 @@
               <a:pPr>
                 <a:defRPr/>
               </a:pPr>
-              <a:t>4/9/26</a:t>
+              <a:t>4/12/26</a:t>
             </a:fld>
             <a:endParaRPr lang="en-US" altLang="en-US"/>
           </a:p>
@@ -5471,7 +5471,7 @@
               <a:pPr>
                 <a:defRPr/>
               </a:pPr>
-              <a:t>4/9/26</a:t>
+              <a:t>4/12/26</a:t>
             </a:fld>
             <a:endParaRPr lang="en-US" altLang="en-US"/>
           </a:p>
@@ -5622,7 +5622,7 @@
               <a:pPr>
                 <a:defRPr/>
               </a:pPr>
-              <a:t>4/9/26</a:t>
+              <a:t>4/12/26</a:t>
             </a:fld>
             <a:endParaRPr lang="en-US" altLang="en-US"/>
           </a:p>
@@ -5751,7 +5751,7 @@
               <a:pPr>
                 <a:defRPr/>
               </a:pPr>
-              <a:t>4/9/26</a:t>
+              <a:t>4/12/26</a:t>
             </a:fld>
             <a:endParaRPr lang="en-US" altLang="en-US"/>
           </a:p>
@@ -6060,7 +6060,7 @@
               <a:pPr>
                 <a:defRPr/>
               </a:pPr>
-              <a:t>4/9/26</a:t>
+              <a:t>4/12/26</a:t>
             </a:fld>
             <a:endParaRPr lang="en-US" altLang="en-US"/>
           </a:p>
@@ -6347,7 +6347,7 @@
               <a:pPr>
                 <a:defRPr/>
               </a:pPr>
-              <a:t>4/9/26</a:t>
+              <a:t>4/12/26</a:t>
             </a:fld>
             <a:endParaRPr lang="en-US" altLang="en-US"/>
           </a:p>
@@ -6670,7 +6670,7 @@
               <a:pPr>
                 <a:defRPr/>
               </a:pPr>
-              <a:t>4/9/26</a:t>
+              <a:t>4/12/26</a:t>
             </a:fld>
             <a:endParaRPr lang="en-US" altLang="en-US"/>
           </a:p>
@@ -7766,7 +7766,7 @@
               <a:pPr>
                 <a:defRPr/>
               </a:pPr>
-              <a:t>4/9/26</a:t>
+              <a:t>4/12/26</a:t>
             </a:fld>
             <a:endParaRPr lang="en-US" altLang="en-US"/>
           </a:p>
@@ -12461,7 +12461,7 @@
                 <a:latin typeface="Tahoma" pitchFamily="34" charset="0"/>
                 <a:cs typeface="Tahoma" pitchFamily="34" charset="0"/>
               </a:rPr>
-              <a:t>A new rule was added, which identifies stagflation: a major economic crisis caused by a combination of high inflation, high unemployment, and zero or negative real GDP growth. While central banks tend to be squarely focused on inflation, they do step in as lenders of last resort in cases of catastrophic economic crises. Since this rule simply uses a rule of thumb (it is not a mathematical formula) and the degree to which growth has to be low (negative, or around zero) depends on some degree of judgement. Thus, the rule is probable (0.6).</a:t>
+              <a:t>A new rule was added, which identifies stagflation: a major economic crisis caused by a combination of high inflation, high unemployment, and zero or negative real GDP growth. While central banks tend to be squarely focused on inflation, they do step in as lenders of last resort in cases of catastrophic economic crises. Since this rule simply uses a rule of thumb (it is not a mathematical formula) and the degree to which growth has to be low (negative, or around zero) involves some judgement. Thus, the rule is probable (CF 0.6) but not certain.</a:t>
             </a:r>
           </a:p>
         </p:txBody>
@@ -12856,7 +12856,7 @@
         <p:spPr>
           <a:xfrm>
             <a:off x="303213" y="1050925"/>
-            <a:ext cx="8662987" cy="3693319"/>
+            <a:ext cx="8662987" cy="3970318"/>
           </a:xfrm>
           <a:prstGeom prst="rect">
             <a:avLst/>
@@ -12878,7 +12878,7 @@
                 <a:latin typeface="Tahoma" pitchFamily="34" charset="0"/>
                 <a:cs typeface="Tahoma" pitchFamily="34" charset="0"/>
               </a:rPr>
-              <a:t>Indicators were replaced by standalone fuzzy facts (with their own templates), each with a fuzzy membership function. Fuzziness values were also assigned when asserted, in addition to certainty factors. Changes in inflation, real GDP growth rates and unemployment are significant, even minimal ones. Thus, small fuzziness triangles with 0.1, 0.1 and 0.2 half bottom side lengths were respectively assigned. Potential GDP growth rate is more conceptual and thus matters a bit less strictly, and expected inflation is obtained from consumer sentiment, which is a bit of a loose indicator. Both received fuzziness triangles with half bottom side lengths of 0.3. Almost every rule had to be modified or replaced to accommodate the use of fuzzy facts. Some rules were completely deleted: they tried to categorize number values into linguistic ones, which was redundant (fuzzy facts do this automatically). The latter considerably improved interest rate decisions, which are based on multiple input factors that may be contradicting one another.</a:t>
+              <a:t>Indicators were replaced by standalone fuzzy facts (with their own templates), each with a fuzzy membership function. Fuzziness values were also assigned when asserted, in addition to certainty factors. Changes in inflation, real GDP growth rates and unemployment are significant, even minimal ones. Thus, small fuzziness triangles with 0.1, 0.1 and 0.2 half bottom side lengths were respectively assigned when asserted. Potential GDP growth rate is more conceptual and thus matters a bit less strictly, while expected inflation is obtained from consumer sentiment, which is a bit of a loose indicator. Thus, both received fuzziness triangles with half bottom side lengths of 0.3. Almost every rule had to be modified or replaced to accommodate the use of fuzzy facts. Some rules were completely deleted: they tried to categorize number values into linguistic ones, which was redundant (fuzzy facts do this automatically). Fuzziness considerably improved interest rate decisions, which are based on multiple input factors that may contradict each other with varying weights.</a:t>
             </a:r>
           </a:p>
         </p:txBody>
@@ -12897,7 +12897,7 @@
         </p:nvSpPr>
         <p:spPr>
           <a:xfrm>
-            <a:off x="4394200" y="4877594"/>
+            <a:off x="4634706" y="4899724"/>
             <a:ext cx="2463800" cy="1200329"/>
           </a:xfrm>
           <a:prstGeom prst="rect">
@@ -12943,7 +12943,7 @@
         </p:blipFill>
         <p:spPr>
           <a:xfrm>
-            <a:off x="330200" y="4744244"/>
+            <a:off x="303213" y="4899724"/>
             <a:ext cx="4064000" cy="2011925"/>
           </a:xfrm>
           <a:prstGeom prst="rect">
@@ -12973,8 +12973,8 @@
         </p:blipFill>
         <p:spPr>
           <a:xfrm>
-            <a:off x="6858000" y="4314210"/>
-            <a:ext cx="2286000" cy="2537184"/>
+            <a:off x="7132320" y="4618672"/>
+            <a:ext cx="2011680" cy="2232722"/>
           </a:xfrm>
           <a:prstGeom prst="rect">
             <a:avLst/>
@@ -13411,7 +13411,7 @@
                 <a:latin typeface="Tahoma" pitchFamily="34" charset="0"/>
                 <a:cs typeface="Tahoma" pitchFamily="34" charset="0"/>
               </a:rPr>
-              <a:t>Rules must accurately represent central banking knowledge. For example, an economics student relying and trusting my expert system must not be taught incorrect information that may negatively impact his grades.</a:t>
+              <a:t>Rules must accurately represent central banking knowledge. For example, an economics student relying and trusting my expert system must not be taught incorrect information that may negatively impact his understanding and grades.</a:t>
             </a:r>
           </a:p>
           <a:p>
@@ -13427,7 +13427,7 @@
                 <a:latin typeface="Tahoma" pitchFamily="34" charset="0"/>
                 <a:cs typeface="Tahoma" pitchFamily="34" charset="0"/>
               </a:rPr>
-              <a:t>All theory behind all rules is cited and references authoritative and academic sources throughout my code, ensuring correctness. Comments above each rule and at the very bottom of the knowledgebase are used for this purpose. Limitations of the expert system are acknowledged in the D1 documentation slides.</a:t>
+              <a:t>All theory behind all rules is cited and references authoritative and academic sources throughout my code, ensuring correctness. Comments above each rule and at the very bottom of the knowledgebase are used for this purpose.</a:t>
             </a:r>
           </a:p>
           <a:p>
@@ -13443,7 +13443,7 @@
                 <a:latin typeface="Tahoma" pitchFamily="34" charset="0"/>
                 <a:cs typeface="Tahoma" pitchFamily="34" charset="0"/>
               </a:rPr>
-              <a:t>Consequently, knowledge is accurately represented using rules. The impact of these guidelines are highly positive.</a:t>
+              <a:t>Consequently, the impact of these guidelines is highly positive, as they allow knowledge to be accurately represented through the rules.</a:t>
             </a:r>
           </a:p>
           <a:p>
@@ -13490,7 +13490,7 @@
                 <a:latin typeface="Tahoma" pitchFamily="34" charset="0"/>
                 <a:cs typeface="Tahoma" pitchFamily="34" charset="0"/>
               </a:rPr>
-              <a:t>There are no repeating terms (concepts) between different contexts. Moreover, any potential contradictions are handled by the use of fuzziness (when fact assertions conflict), salience (in setup rules to ensure all rules are fired and facts are asserted before reaching the conclusion rule, thus preventing it from firing multiple times due to changing information), and stop facts (when the conclusion fires, to avoid repeats).</a:t>
+              <a:t>There are no repeating terms (concepts) between different contexts. Moreover, any potential contradictions are handled by the use of fuzziness (when fact assertions conflict), salience (in setup and conclusion rules to ensure all input data is ready to be used before the reasoning stage begins and that the conclusion only fires once the reasoning has been completed, which avoids rule firing repetition with varying results), and stop facts (when an output gap determination rule fires, to avoid repeats with less certain determinations that would contradict the first one).</a:t>
             </a:r>
           </a:p>
           <a:p>
@@ -13506,7 +13506,7 @@
                 <a:latin typeface="Tahoma" pitchFamily="34" charset="0"/>
                 <a:cs typeface="Tahoma" pitchFamily="34" charset="0"/>
               </a:rPr>
-              <a:t>The effect of such consistency is positive, as users can safely rely on the expert system’s answers.</a:t>
+              <a:t>The effect of such consistency is positive, as users can safely rely on the expert system’s answers without confusion.</a:t>
             </a:r>
           </a:p>
         </p:txBody>
@@ -13900,8 +13900,8 @@
         </p:nvSpPr>
         <p:spPr>
           <a:xfrm>
-            <a:off x="303213" y="-1960095"/>
-            <a:ext cx="8662987" cy="7848302"/>
+            <a:off x="240506" y="-2180004"/>
+            <a:ext cx="8662987" cy="8679299"/>
           </a:xfrm>
           <a:prstGeom prst="rect">
             <a:avLst/>
@@ -14114,7 +14114,7 @@
                 <a:latin typeface="Tahoma" pitchFamily="34" charset="0"/>
                 <a:cs typeface="Tahoma" pitchFamily="34" charset="0"/>
               </a:rPr>
-              <a:t>Readable and descriptive names are used for each fact and rule, allowing for clear understanding of the system’s reasoning during debug. Some explanations are also printed, and many do so through explanation facts.</a:t>
+              <a:t>Readable and descriptive names are used for each fact and rule, allowing for clear understanding of the system’s reasoning during debug. Some explanations are also printed, through explanation facts.</a:t>
             </a:r>
           </a:p>
           <a:p>
@@ -14130,7 +14130,7 @@
                 <a:latin typeface="Tahoma" pitchFamily="34" charset="0"/>
                 <a:cs typeface="Tahoma" pitchFamily="34" charset="0"/>
               </a:rPr>
-              <a:t>Explainability is very helpful for users seeking to understand the expert system’s reasoning. Making the system explainable thus has a positive impact.</a:t>
+              <a:t>Explainability is very helpful for users and engineers seeking to understand the expert system’s reasoning. Making the system explainable thus has a positive impact.</a:t>
             </a:r>
           </a:p>
           <a:p>
@@ -14178,27 +14178,7 @@
                 <a:latin typeface="Tahoma" pitchFamily="34" charset="0"/>
                 <a:cs typeface="Tahoma" pitchFamily="34" charset="0"/>
               </a:rPr>
-              <a:t>Ripple effects when making modifications are prevented: all input fact values can be modified in one place, the </a:t>
-            </a:r>
-            <a:r>
-              <a:rPr lang="en-US" altLang="en-US" dirty="0" err="1">
-                <a:solidFill>
-                  <a:srgbClr val="1C1C1C"/>
-                </a:solidFill>
-                <a:latin typeface="Tahoma" pitchFamily="34" charset="0"/>
-                <a:cs typeface="Tahoma" pitchFamily="34" charset="0"/>
-              </a:rPr>
-              <a:t>factbase</a:t>
-            </a:r>
-            <a:r>
-              <a:rPr lang="en-US" altLang="en-US" dirty="0">
-                <a:solidFill>
-                  <a:srgbClr val="1C1C1C"/>
-                </a:solidFill>
-                <a:latin typeface="Tahoma" pitchFamily="34" charset="0"/>
-                <a:cs typeface="Tahoma" pitchFamily="34" charset="0"/>
-              </a:rPr>
-              <a:t>. This makes the code quick and easy to modify. Salience is correctly used as a meta-rule to separate the setup, the reasoning, and the conclusion from each other.</a:t>
+              <a:t>Ripple effects when making modifications are prevented: all input fact values can be modified in one single place, in the database. This makes the code quick and easy to edit. Salience is correctly used as a meta-rule to separate the setup and the conclusion from the core reasoning, and the conclusion from each other without interfering with the rule firing order within the reasoning; this allows rules to easily be added without needing to modify other rules’ salience values, for instance.</a:t>
             </a:r>
           </a:p>
           <a:p>
@@ -14214,7 +14194,7 @@
                 <a:latin typeface="Tahoma" pitchFamily="34" charset="0"/>
                 <a:cs typeface="Tahoma" pitchFamily="34" charset="0"/>
               </a:rPr>
-              <a:t>Improving modifiability helps support a system’s long-term success, and is thus a positive force of the development process.</a:t>
+              <a:t>Improving modifiability helps support a system’s long-term success by allowing engineers to easily make improvements, and is thus a positive force of the development process.</a:t>
             </a:r>
           </a:p>
         </p:txBody>

--- a/A-D2.pptx
+++ b/A-D2.pptx
@@ -871,7 +871,7 @@
               <a:pPr>
                 <a:defRPr/>
               </a:pPr>
-              <a:t>4/12/26</a:t>
+              <a:t>4/15/26</a:t>
             </a:fld>
             <a:endParaRPr lang="en-US" altLang="en-US"/>
           </a:p>
@@ -1073,7 +1073,7 @@
               <a:pPr>
                 <a:defRPr/>
               </a:pPr>
-              <a:t>4/12/26</a:t>
+              <a:t>4/15/26</a:t>
             </a:fld>
             <a:endParaRPr lang="en-US" altLang="en-US"/>
           </a:p>
@@ -1285,7 +1285,7 @@
               <a:pPr>
                 <a:defRPr/>
               </a:pPr>
-              <a:t>4/12/26</a:t>
+              <a:t>4/15/26</a:t>
             </a:fld>
             <a:endParaRPr lang="en-US" altLang="en-US"/>
           </a:p>
@@ -1505,7 +1505,7 @@
               <a:pPr>
                 <a:defRPr/>
               </a:pPr>
-              <a:t>4/12/26</a:t>
+              <a:t>4/15/26</a:t>
             </a:fld>
             <a:endParaRPr lang="en-US" altLang="en-US"/>
           </a:p>
@@ -1707,7 +1707,7 @@
               <a:pPr>
                 <a:defRPr/>
               </a:pPr>
-              <a:t>4/12/26</a:t>
+              <a:t>4/15/26</a:t>
             </a:fld>
             <a:endParaRPr lang="en-US" altLang="en-US"/>
           </a:p>
@@ -1932,7 +1932,7 @@
               <a:pPr>
                 <a:defRPr/>
               </a:pPr>
-              <a:t>4/12/26</a:t>
+              <a:t>4/15/26</a:t>
             </a:fld>
             <a:endParaRPr lang="en-US" altLang="en-US"/>
           </a:p>
@@ -2251,7 +2251,7 @@
               <a:pPr>
                 <a:defRPr/>
               </a:pPr>
-              <a:t>4/12/26</a:t>
+              <a:t>4/15/26</a:t>
             </a:fld>
             <a:endParaRPr lang="en-US" altLang="en-US"/>
           </a:p>
@@ -2709,7 +2709,7 @@
               <a:pPr>
                 <a:defRPr/>
               </a:pPr>
-              <a:t>4/12/26</a:t>
+              <a:t>4/15/26</a:t>
             </a:fld>
             <a:endParaRPr lang="en-US" altLang="en-US"/>
           </a:p>
@@ -2860,7 +2860,7 @@
               <a:pPr>
                 <a:defRPr/>
               </a:pPr>
-              <a:t>4/12/26</a:t>
+              <a:t>4/15/26</a:t>
             </a:fld>
             <a:endParaRPr lang="en-US" altLang="en-US"/>
           </a:p>
@@ -2989,7 +2989,7 @@
               <a:pPr>
                 <a:defRPr/>
               </a:pPr>
-              <a:t>4/12/26</a:t>
+              <a:t>4/15/26</a:t>
             </a:fld>
             <a:endParaRPr lang="en-US" altLang="en-US"/>
           </a:p>
@@ -3298,7 +3298,7 @@
               <a:pPr>
                 <a:defRPr/>
               </a:pPr>
-              <a:t>4/12/26</a:t>
+              <a:t>4/15/26</a:t>
             </a:fld>
             <a:endParaRPr lang="en-US" altLang="en-US"/>
           </a:p>
@@ -3500,7 +3500,7 @@
               <a:pPr>
                 <a:defRPr/>
               </a:pPr>
-              <a:t>4/12/26</a:t>
+              <a:t>4/15/26</a:t>
             </a:fld>
             <a:endParaRPr lang="en-US" altLang="en-US"/>
           </a:p>
@@ -3787,7 +3787,7 @@
               <a:pPr>
                 <a:defRPr/>
               </a:pPr>
-              <a:t>4/12/26</a:t>
+              <a:t>4/15/26</a:t>
             </a:fld>
             <a:endParaRPr lang="en-US" altLang="en-US"/>
           </a:p>
@@ -3989,7 +3989,7 @@
               <a:pPr>
                 <a:defRPr/>
               </a:pPr>
-              <a:t>4/12/26</a:t>
+              <a:t>4/15/26</a:t>
             </a:fld>
             <a:endParaRPr lang="en-US" altLang="en-US"/>
           </a:p>
@@ -4201,7 +4201,7 @@
               <a:pPr>
                 <a:defRPr/>
               </a:pPr>
-              <a:t>4/12/26</a:t>
+              <a:t>4/15/26</a:t>
             </a:fld>
             <a:endParaRPr lang="en-US" altLang="en-US"/>
           </a:p>
@@ -4469,7 +4469,7 @@
               <a:pPr>
                 <a:defRPr/>
               </a:pPr>
-              <a:t>4/12/26</a:t>
+              <a:t>4/15/26</a:t>
             </a:fld>
             <a:endParaRPr lang="en-US" altLang="en-US"/>
           </a:p>
@@ -4694,7 +4694,7 @@
               <a:pPr>
                 <a:defRPr/>
               </a:pPr>
-              <a:t>4/12/26</a:t>
+              <a:t>4/15/26</a:t>
             </a:fld>
             <a:endParaRPr lang="en-US" altLang="en-US"/>
           </a:p>
@@ -5013,7 +5013,7 @@
               <a:pPr>
                 <a:defRPr/>
               </a:pPr>
-              <a:t>4/12/26</a:t>
+              <a:t>4/15/26</a:t>
             </a:fld>
             <a:endParaRPr lang="en-US" altLang="en-US"/>
           </a:p>
@@ -5471,7 +5471,7 @@
               <a:pPr>
                 <a:defRPr/>
               </a:pPr>
-              <a:t>4/12/26</a:t>
+              <a:t>4/15/26</a:t>
             </a:fld>
             <a:endParaRPr lang="en-US" altLang="en-US"/>
           </a:p>
@@ -5622,7 +5622,7 @@
               <a:pPr>
                 <a:defRPr/>
               </a:pPr>
-              <a:t>4/12/26</a:t>
+              <a:t>4/15/26</a:t>
             </a:fld>
             <a:endParaRPr lang="en-US" altLang="en-US"/>
           </a:p>
@@ -5751,7 +5751,7 @@
               <a:pPr>
                 <a:defRPr/>
               </a:pPr>
-              <a:t>4/12/26</a:t>
+              <a:t>4/15/26</a:t>
             </a:fld>
             <a:endParaRPr lang="en-US" altLang="en-US"/>
           </a:p>
@@ -6060,7 +6060,7 @@
               <a:pPr>
                 <a:defRPr/>
               </a:pPr>
-              <a:t>4/12/26</a:t>
+              <a:t>4/15/26</a:t>
             </a:fld>
             <a:endParaRPr lang="en-US" altLang="en-US"/>
           </a:p>
@@ -6347,7 +6347,7 @@
               <a:pPr>
                 <a:defRPr/>
               </a:pPr>
-              <a:t>4/12/26</a:t>
+              <a:t>4/15/26</a:t>
             </a:fld>
             <a:endParaRPr lang="en-US" altLang="en-US"/>
           </a:p>
@@ -6670,7 +6670,7 @@
               <a:pPr>
                 <a:defRPr/>
               </a:pPr>
-              <a:t>4/12/26</a:t>
+              <a:t>4/15/26</a:t>
             </a:fld>
             <a:endParaRPr lang="en-US" altLang="en-US"/>
           </a:p>
@@ -7766,7 +7766,7 @@
               <a:pPr>
                 <a:defRPr/>
               </a:pPr>
-              <a:t>4/12/26</a:t>
+              <a:t>4/15/26</a:t>
             </a:fld>
             <a:endParaRPr lang="en-US" altLang="en-US"/>
           </a:p>
@@ -8295,7 +8295,7 @@
         </p:nvSpPr>
         <p:spPr>
           <a:xfrm>
-            <a:off x="1862138" y="2098675"/>
+            <a:off x="1862137" y="1408489"/>
             <a:ext cx="5545137" cy="2663825"/>
           </a:xfrm>
         </p:spPr>
@@ -8925,22 +8925,84 @@
               <a:buNone/>
             </a:pPr>
             <a:r>
-              <a:rPr lang="en-US" altLang="en-US" sz="3600">
+              <a:rPr lang="en-US" altLang="en-US" sz="3600" dirty="0">
                 <a:solidFill>
                   <a:srgbClr val="FFFFFF"/>
                 </a:solidFill>
                 <a:latin typeface="Tahoma" pitchFamily="34" charset="0"/>
                 <a:cs typeface="Tahoma" pitchFamily="34" charset="0"/>
               </a:rPr>
-              <a:t>Title</a:t>
-            </a:r>
-            <a:endParaRPr lang="en-US" altLang="en-US" sz="2800">
+              <a:t>Central Banking Expert System</a:t>
+            </a:r>
+            <a:endParaRPr lang="en-US" altLang="en-US" sz="2800" dirty="0">
               <a:solidFill>
                 <a:srgbClr val="FFFFFF"/>
               </a:solidFill>
               <a:latin typeface="Tahoma" pitchFamily="34" charset="0"/>
               <a:cs typeface="Tahoma" pitchFamily="34" charset="0"/>
             </a:endParaRPr>
+          </a:p>
+        </p:txBody>
+      </p:sp>
+      <p:sp>
+        <p:nvSpPr>
+          <p:cNvPr id="2" name="TextBox 1">
+            <a:extLst>
+              <a:ext uri="{FF2B5EF4-FFF2-40B4-BE49-F238E27FC236}">
+                <a16:creationId xmlns:a16="http://schemas.microsoft.com/office/drawing/2014/main" id="{199FC857-353D-852B-06E5-03FD1B02F361}"/>
+              </a:ext>
+            </a:extLst>
+          </p:cNvPr>
+          <p:cNvSpPr txBox="1"/>
+          <p:nvPr/>
+        </p:nvSpPr>
+        <p:spPr>
+          <a:xfrm>
+            <a:off x="814386" y="2173881"/>
+            <a:ext cx="7640637" cy="3139321"/>
+          </a:xfrm>
+          <a:prstGeom prst="rect">
+            <a:avLst/>
+          </a:prstGeom>
+          <a:noFill/>
+        </p:spPr>
+        <p:txBody>
+          <a:bodyPr wrap="square" rtlCol="0">
+            <a:spAutoFit/>
+          </a:bodyPr>
+          <a:lstStyle/>
+          <a:p>
+            <a:r>
+              <a:rPr lang="en-US" altLang="en-US" dirty="0">
+                <a:solidFill>
+                  <a:srgbClr val="1C1C1C"/>
+                </a:solidFill>
+                <a:latin typeface="Tahoma" pitchFamily="34" charset="0"/>
+                <a:cs typeface="Tahoma" pitchFamily="34" charset="0"/>
+              </a:rPr>
+              <a:t>This set of slides will document the central banking rule-based expert system I developed in CLIPS using evidence-based logic as part of the second deliverable of Concordia University’s COMP 474 (Intelligent Systems) project. The knowledge used to redact a rule is virtually always described beside said rule in the knowledgebase, alongside proper citation and reference in IEEE format.</a:t>
+            </a:r>
+          </a:p>
+          <a:p>
+            <a:endParaRPr lang="en-US" altLang="en-US" dirty="0">
+              <a:solidFill>
+                <a:srgbClr val="1C1C1C"/>
+              </a:solidFill>
+              <a:latin typeface="Tahoma" pitchFamily="34" charset="0"/>
+              <a:cs typeface="Tahoma" pitchFamily="34" charset="0"/>
+            </a:endParaRPr>
+          </a:p>
+          <a:p>
+            <a:r>
+              <a:rPr lang="en-US" altLang="en-US" dirty="0">
+                <a:solidFill>
+                  <a:srgbClr val="1C1C1C"/>
+                </a:solidFill>
+                <a:latin typeface="Tahoma" pitchFamily="34" charset="0"/>
+                <a:cs typeface="Tahoma" pitchFamily="34" charset="0"/>
+              </a:rPr>
+              <a:t>My goal for this project is to develop an expert system capable of helping individuals interested but mostly unknowledgeable in the topic of macroeconomics learn and understand central banking knowledge by simulating the advice and decision-making of central bankers.</a:t>
+            </a:r>
           </a:p>
         </p:txBody>
       </p:sp>
